--- a/models/induced-leak-P3/The-Induced-Leak-Faradays-Law-as-a-Security-Threat.pptx
+++ b/models/induced-leak-P3/The-Induced-Leak-Faradays-Law-as-a-Security-Threat.pptx
@@ -1,49 +1,32 @@
 
 <file path=ppt/presentation.xml><?xml version="1.0" encoding="utf-8"?>
-<p:presentation xmlns:a="http://schemas.openxmlformats.org/drawingml/2006/main" xmlns:r="http://schemas.openxmlformats.org/officeDocument/2006/relationships" xmlns:p="http://schemas.openxmlformats.org/presentationml/2006/main" embedTrueTypeFonts="1" saveSubsetFonts="1" autoCompressPictures="0">
+<p:presentation xmlns:a="http://schemas.openxmlformats.org/drawingml/2006/main" xmlns:r="http://schemas.openxmlformats.org/officeDocument/2006/relationships" xmlns:p="http://schemas.openxmlformats.org/presentationml/2006/main" xmlns:m="http://schemas.openxmlformats.org/officeDocument/2006/math" xmlns:w="http://schemas.openxmlformats.org/wordprocessingml/2006/main" autoCompressPictures="0" embedTrueTypeFonts="1" saveSubsetFonts="1">
   <p:sldMasterIdLst>
     <p:sldMasterId id="2147483648" r:id="rId1"/>
   </p:sldMasterIdLst>
   <p:notesMasterIdLst>
-    <p:notesMasterId r:id="rId12"/>
+    <p:notesMasterId r:id="rId14"/>
   </p:notesMasterIdLst>
   <p:sldIdLst>
-    <p:sldId id="256" r:id="rId2"/>
-    <p:sldId id="257" r:id="rId3"/>
-    <p:sldId id="258" r:id="rId4"/>
-    <p:sldId id="259" r:id="rId5"/>
-    <p:sldId id="268" r:id="rId6"/>
-    <p:sldId id="267" r:id="rId7"/>
-    <p:sldId id="262" r:id="rId8"/>
-    <p:sldId id="263" r:id="rId9"/>
-    <p:sldId id="266" r:id="rId10"/>
-    <p:sldId id="265" r:id="rId11"/>
+    <p:sldId id="256" r:id="rId4"/>
+    <p:sldId id="257" r:id="rId5"/>
+    <p:sldId id="258" r:id="rId6"/>
+    <p:sldId id="259" r:id="rId7"/>
+    <p:sldId id="260" r:id="rId8"/>
+    <p:sldId id="261" r:id="rId9"/>
+    <p:sldId id="262" r:id="rId10"/>
+    <p:sldId id="263" r:id="rId11"/>
+    <p:sldId id="264" r:id="rId12"/>
+    <p:sldId id="265" r:id="rId13"/>
   </p:sldIdLst>
   <p:sldSz cx="14630400" cy="8229600"/>
   <p:notesSz cx="8229600" cy="14630400"/>
-  <p:embeddedFontLst>
-    <p:embeddedFont>
-      <p:font typeface="Calibri" panose="020F0502020204030204" pitchFamily="34" charset="0"/>
-      <p:regular r:id="rId13"/>
-      <p:bold r:id="rId14"/>
-      <p:italic r:id="rId15"/>
-      <p:boldItalic r:id="rId16"/>
-    </p:embeddedFont>
-    <p:embeddedFont>
-      <p:font typeface="Fira Sans" panose="020B0604020202020204" charset="0"/>
-      <p:regular r:id="rId17"/>
-    </p:embeddedFont>
-    <p:embeddedFont>
-      <p:font typeface="Anton" panose="020B0604020202020204" charset="0"/>
-      <p:regular r:id="rId18"/>
-    </p:embeddedFont>
-  </p:embeddedFontLst>
   <p:defaultTextStyle>
     <a:defPPr>
       <a:defRPr lang="en-US"/>
     </a:defPPr>
-    <a:lvl1pPr marL="0" algn="l" defTabSz="914400" rtl="0" eaLnBrk="1" latinLnBrk="0" hangingPunct="1">
-      <a:defRPr sz="1800" kern="1200">
+    <a:lvl1pPr marL="0" algn="l" defTabSz="914400" rtl="0">
+      <a:defRPr sz="1800">
         <a:solidFill>
           <a:schemeClr val="tx1"/>
         </a:solidFill>
@@ -52,8 +35,8 @@
         <a:cs typeface="+mn-cs"/>
       </a:defRPr>
     </a:lvl1pPr>
-    <a:lvl2pPr marL="457200" algn="l" defTabSz="914400" rtl="0" eaLnBrk="1" latinLnBrk="0" hangingPunct="1">
-      <a:defRPr sz="1800" kern="1200">
+    <a:lvl2pPr marL="457200" algn="l" defTabSz="914400" rtl="0">
+      <a:defRPr sz="1800">
         <a:solidFill>
           <a:schemeClr val="tx1"/>
         </a:solidFill>
@@ -62,8 +45,8 @@
         <a:cs typeface="+mn-cs"/>
       </a:defRPr>
     </a:lvl2pPr>
-    <a:lvl3pPr marL="914400" algn="l" defTabSz="914400" rtl="0" eaLnBrk="1" latinLnBrk="0" hangingPunct="1">
-      <a:defRPr sz="1800" kern="1200">
+    <a:lvl3pPr marL="914400" algn="l" defTabSz="914400" rtl="0">
+      <a:defRPr sz="1800">
         <a:solidFill>
           <a:schemeClr val="tx1"/>
         </a:solidFill>
@@ -72,8 +55,8 @@
         <a:cs typeface="+mn-cs"/>
       </a:defRPr>
     </a:lvl3pPr>
-    <a:lvl4pPr marL="1371600" algn="l" defTabSz="914400" rtl="0" eaLnBrk="1" latinLnBrk="0" hangingPunct="1">
-      <a:defRPr sz="1800" kern="1200">
+    <a:lvl4pPr marL="1371600" algn="l" defTabSz="914400" rtl="0">
+      <a:defRPr sz="1800">
         <a:solidFill>
           <a:schemeClr val="tx1"/>
         </a:solidFill>
@@ -82,8 +65,8 @@
         <a:cs typeface="+mn-cs"/>
       </a:defRPr>
     </a:lvl4pPr>
-    <a:lvl5pPr marL="1828800" algn="l" defTabSz="914400" rtl="0" eaLnBrk="1" latinLnBrk="0" hangingPunct="1">
-      <a:defRPr sz="1800" kern="1200">
+    <a:lvl5pPr marL="1828800" algn="l" defTabSz="914400" rtl="0">
+      <a:defRPr sz="1800">
         <a:solidFill>
           <a:schemeClr val="tx1"/>
         </a:solidFill>
@@ -92,8 +75,8 @@
         <a:cs typeface="+mn-cs"/>
       </a:defRPr>
     </a:lvl5pPr>
-    <a:lvl6pPr marL="2286000" algn="l" defTabSz="914400" rtl="0" eaLnBrk="1" latinLnBrk="0" hangingPunct="1">
-      <a:defRPr sz="1800" kern="1200">
+    <a:lvl6pPr marL="2286000" algn="l" defTabSz="914400" rtl="0">
+      <a:defRPr sz="1800">
         <a:solidFill>
           <a:schemeClr val="tx1"/>
         </a:solidFill>
@@ -102,8 +85,8 @@
         <a:cs typeface="+mn-cs"/>
       </a:defRPr>
     </a:lvl6pPr>
-    <a:lvl7pPr marL="2743200" algn="l" defTabSz="914400" rtl="0" eaLnBrk="1" latinLnBrk="0" hangingPunct="1">
-      <a:defRPr sz="1800" kern="1200">
+    <a:lvl7pPr marL="2743200" algn="l" defTabSz="914400" rtl="0">
+      <a:defRPr sz="1800">
         <a:solidFill>
           <a:schemeClr val="tx1"/>
         </a:solidFill>
@@ -112,8 +95,8 @@
         <a:cs typeface="+mn-cs"/>
       </a:defRPr>
     </a:lvl7pPr>
-    <a:lvl8pPr marL="3200400" algn="l" defTabSz="914400" rtl="0" eaLnBrk="1" latinLnBrk="0" hangingPunct="1">
-      <a:defRPr sz="1800" kern="1200">
+    <a:lvl8pPr marL="3200400" algn="l" defTabSz="914400" rtl="0">
+      <a:defRPr sz="1800">
         <a:solidFill>
           <a:schemeClr val="tx1"/>
         </a:solidFill>
@@ -122,8 +105,8 @@
         <a:cs typeface="+mn-cs"/>
       </a:defRPr>
     </a:lvl8pPr>
-    <a:lvl9pPr marL="3657600" algn="l" defTabSz="914400" rtl="0" eaLnBrk="1" latinLnBrk="0" hangingPunct="1">
-      <a:defRPr sz="1800" kern="1200">
+    <a:lvl9pPr marL="3657600" algn="l" defTabSz="914400" rtl="0">
+      <a:defRPr sz="1800">
         <a:solidFill>
           <a:schemeClr val="tx1"/>
         </a:solidFill>
@@ -133,17 +116,12 @@
       </a:defRPr>
     </a:lvl9pPr>
   </p:defaultTextStyle>
-  <p:extLst>
-    <p:ext uri="{EFAFB233-063F-42B5-8137-9DF3F51BA10A}">
-      <p15:sldGuideLst xmlns:p15="http://schemas.microsoft.com/office/powerpoint/2012/main"/>
-    </p:ext>
-  </p:extLst>
 </p:presentation>
 </file>
 
 <file path=ppt/notesMasters/notesMaster1.xml><?xml version="1.0" encoding="utf-8"?>
 <p:notesMaster xmlns:a="http://schemas.openxmlformats.org/drawingml/2006/main" xmlns:r="http://schemas.openxmlformats.org/officeDocument/2006/relationships" xmlns:p="http://schemas.openxmlformats.org/presentationml/2006/main">
-  <p:cSld>
+  <p:cSld name="">
     <p:bg>
       <p:bgRef idx="1001">
         <a:schemeClr val="bg1"/>
@@ -155,7 +133,7 @@
         <p:cNvGrpSpPr/>
         <p:nvPr/>
       </p:nvGrpSpPr>
-      <p:grpSpPr>
+      <p:grpSpPr bwMode="auto">
         <a:xfrm>
           <a:off x="0" y="0"/>
           <a:ext cx="0" cy="0"/>
@@ -164,16 +142,11 @@
         </a:xfrm>
       </p:grpSpPr>
     </p:spTree>
-    <p:extLst>
-      <p:ext uri="{BB962C8B-B14F-4D97-AF65-F5344CB8AC3E}">
-        <p14:creationId xmlns:p14="http://schemas.microsoft.com/office/powerpoint/2010/main" val="4040390867"/>
-      </p:ext>
-    </p:extLst>
   </p:cSld>
   <p:clrMap bg1="lt1" tx1="dk1" bg2="lt2" tx2="dk2" accent1="accent1" accent2="accent2" accent3="accent3" accent4="accent4" accent5="accent5" accent6="accent6" hlink="hlink" folHlink="folHlink"/>
   <p:notesStyle>
-    <a:lvl1pPr marL="0" algn="l" defTabSz="914400" rtl="0" eaLnBrk="1" latinLnBrk="0" hangingPunct="1">
-      <a:defRPr sz="1200" kern="1200">
+    <a:lvl1pPr marL="0" algn="l" defTabSz="914400" rtl="0">
+      <a:defRPr sz="1200">
         <a:solidFill>
           <a:schemeClr val="tx1"/>
         </a:solidFill>
@@ -182,8 +155,8 @@
         <a:cs typeface="+mn-cs"/>
       </a:defRPr>
     </a:lvl1pPr>
-    <a:lvl2pPr marL="457200" algn="l" defTabSz="914400" rtl="0" eaLnBrk="1" latinLnBrk="0" hangingPunct="1">
-      <a:defRPr sz="1200" kern="1200">
+    <a:lvl2pPr marL="457200" algn="l" defTabSz="914400" rtl="0">
+      <a:defRPr sz="1200">
         <a:solidFill>
           <a:schemeClr val="tx1"/>
         </a:solidFill>
@@ -192,8 +165,8 @@
         <a:cs typeface="+mn-cs"/>
       </a:defRPr>
     </a:lvl2pPr>
-    <a:lvl3pPr marL="914400" algn="l" defTabSz="914400" rtl="0" eaLnBrk="1" latinLnBrk="0" hangingPunct="1">
-      <a:defRPr sz="1200" kern="1200">
+    <a:lvl3pPr marL="914400" algn="l" defTabSz="914400" rtl="0">
+      <a:defRPr sz="1200">
         <a:solidFill>
           <a:schemeClr val="tx1"/>
         </a:solidFill>
@@ -202,8 +175,8 @@
         <a:cs typeface="+mn-cs"/>
       </a:defRPr>
     </a:lvl3pPr>
-    <a:lvl4pPr marL="1371600" algn="l" defTabSz="914400" rtl="0" eaLnBrk="1" latinLnBrk="0" hangingPunct="1">
-      <a:defRPr sz="1200" kern="1200">
+    <a:lvl4pPr marL="1371600" algn="l" defTabSz="914400" rtl="0">
+      <a:defRPr sz="1200">
         <a:solidFill>
           <a:schemeClr val="tx1"/>
         </a:solidFill>
@@ -212,8 +185,8 @@
         <a:cs typeface="+mn-cs"/>
       </a:defRPr>
     </a:lvl4pPr>
-    <a:lvl5pPr marL="1828800" algn="l" defTabSz="914400" rtl="0" eaLnBrk="1" latinLnBrk="0" hangingPunct="1">
-      <a:defRPr sz="1200" kern="1200">
+    <a:lvl5pPr marL="1828800" algn="l" defTabSz="914400" rtl="0">
+      <a:defRPr sz="1200">
         <a:solidFill>
           <a:schemeClr val="tx1"/>
         </a:solidFill>
@@ -222,8 +195,8 @@
         <a:cs typeface="+mn-cs"/>
       </a:defRPr>
     </a:lvl5pPr>
-    <a:lvl6pPr marL="2286000" algn="l" defTabSz="914400" rtl="0" eaLnBrk="1" latinLnBrk="0" hangingPunct="1">
-      <a:defRPr sz="1200" kern="1200">
+    <a:lvl6pPr marL="2286000" algn="l" defTabSz="914400" rtl="0">
+      <a:defRPr sz="1200">
         <a:solidFill>
           <a:schemeClr val="tx1"/>
         </a:solidFill>
@@ -232,8 +205,8 @@
         <a:cs typeface="+mn-cs"/>
       </a:defRPr>
     </a:lvl6pPr>
-    <a:lvl7pPr marL="2743200" algn="l" defTabSz="914400" rtl="0" eaLnBrk="1" latinLnBrk="0" hangingPunct="1">
-      <a:defRPr sz="1200" kern="1200">
+    <a:lvl7pPr marL="2743200" algn="l" defTabSz="914400" rtl="0">
+      <a:defRPr sz="1200">
         <a:solidFill>
           <a:schemeClr val="tx1"/>
         </a:solidFill>
@@ -242,8 +215,8 @@
         <a:cs typeface="+mn-cs"/>
       </a:defRPr>
     </a:lvl7pPr>
-    <a:lvl8pPr marL="3200400" algn="l" defTabSz="914400" rtl="0" eaLnBrk="1" latinLnBrk="0" hangingPunct="1">
-      <a:defRPr sz="1200" kern="1200">
+    <a:lvl8pPr marL="3200400" algn="l" defTabSz="914400" rtl="0">
+      <a:defRPr sz="1200">
         <a:solidFill>
           <a:schemeClr val="tx1"/>
         </a:solidFill>
@@ -252,8 +225,8 @@
         <a:cs typeface="+mn-cs"/>
       </a:defRPr>
     </a:lvl8pPr>
-    <a:lvl9pPr marL="3657600" algn="l" defTabSz="914400" rtl="0" eaLnBrk="1" latinLnBrk="0" hangingPunct="1">
-      <a:defRPr sz="1200" kern="1200">
+    <a:lvl9pPr marL="3657600" algn="l" defTabSz="914400" rtl="0">
+      <a:defRPr sz="1200">
         <a:solidFill>
           <a:schemeClr val="tx1"/>
         </a:solidFill>
@@ -267,15 +240,15 @@
 </file>
 
 <file path=ppt/notesSlides/notesSlide1.xml><?xml version="1.0" encoding="utf-8"?>
-<p:notes xmlns:a="http://schemas.openxmlformats.org/drawingml/2006/main" xmlns:r="http://schemas.openxmlformats.org/officeDocument/2006/relationships" xmlns:p="http://schemas.openxmlformats.org/presentationml/2006/main">
-  <p:cSld>
+<p:notes xmlns:a="http://schemas.openxmlformats.org/drawingml/2006/main" xmlns:r="http://schemas.openxmlformats.org/officeDocument/2006/relationships" xmlns:p="http://schemas.openxmlformats.org/presentationml/2006/main" xmlns:m="http://schemas.openxmlformats.org/officeDocument/2006/math" xmlns:w="http://schemas.openxmlformats.org/wordprocessingml/2006/main">
+  <p:cSld name="">
     <p:spTree>
       <p:nvGrpSpPr>
         <p:cNvPr id="1" name=""/>
         <p:cNvGrpSpPr/>
         <p:nvPr/>
       </p:nvGrpSpPr>
-      <p:grpSpPr>
+      <p:grpSpPr bwMode="auto">
         <a:xfrm>
           <a:off x="0" y="0"/>
           <a:ext cx="0" cy="0"/>
@@ -285,19 +258,19 @@
       </p:grpSpPr>
       <p:sp>
         <p:nvSpPr>
-          <p:cNvPr id="2" name="Slide Image Placeholder 1"/>
+          <p:cNvPr id="778459800" name="Slide Image Placeholder 1"/>
           <p:cNvSpPr>
-            <a:spLocks noGrp="1" noRot="1" noChangeAspect="1"/>
+            <a:spLocks noChangeAspect="1" noGrp="1" noRot="1"/>
           </p:cNvSpPr>
           <p:nvPr>
             <p:ph type="sldImg"/>
           </p:nvPr>
         </p:nvSpPr>
-        <p:spPr/>
-      </p:sp>
-      <p:sp>
-        <p:nvSpPr>
-          <p:cNvPr id="3" name="Notes Placeholder 2"/>
+        <p:spPr bwMode="auto"/>
+      </p:sp>
+      <p:sp>
+        <p:nvSpPr>
+          <p:cNvPr id="1878525321" name="Notes Placeholder 2"/>
           <p:cNvSpPr>
             <a:spLocks noGrp="1"/>
           </p:cNvSpPr>
@@ -305,18 +278,21 @@
             <p:ph type="body" idx="1"/>
           </p:nvPr>
         </p:nvSpPr>
-        <p:spPr/>
+        <p:spPr bwMode="auto"/>
         <p:txBody>
           <a:bodyPr/>
           <a:lstStyle/>
           <a:p>
-            <a:endParaRPr lang="en-US" dirty="0"/>
-          </a:p>
-        </p:txBody>
-      </p:sp>
-      <p:sp>
-        <p:nvSpPr>
-          <p:cNvPr id="4" name="Slide Number Placeholder 3"/>
+            <a:pPr>
+              <a:defRPr/>
+            </a:pPr>
+            <a:endParaRPr lang="en-US"/>
+          </a:p>
+        </p:txBody>
+      </p:sp>
+      <p:sp>
+        <p:nvSpPr>
+          <p:cNvPr id="1442598395" name="Slide Number Placeholder 3"/>
           <p:cNvSpPr>
             <a:spLocks noGrp="1"/>
           </p:cNvSpPr>
@@ -324,11 +300,14 @@
             <p:ph type="sldNum" sz="quarter" idx="10"/>
           </p:nvPr>
         </p:nvSpPr>
-        <p:spPr/>
+        <p:spPr bwMode="auto"/>
         <p:txBody>
           <a:bodyPr/>
           <a:lstStyle/>
           <a:p>
+            <a:pPr>
+              <a:defRPr/>
+            </a:pPr>
             <a:fld id="{F7021451-1387-4CA6-816F-3879F97B5CBC}" type="slidenum">
               <a:rPr lang="en-US"/>
               <a:t>1</a:t>
@@ -338,11 +317,6 @@
         </p:txBody>
       </p:sp>
     </p:spTree>
-    <p:extLst>
-      <p:ext uri="{BB962C8B-B14F-4D97-AF65-F5344CB8AC3E}">
-        <p14:creationId xmlns:p14="http://schemas.microsoft.com/office/powerpoint/2010/main" val="1024086991"/>
-      </p:ext>
-    </p:extLst>
   </p:cSld>
   <p:clrMapOvr>
     <a:masterClrMapping/>
@@ -351,15 +325,15 @@
 </file>
 
 <file path=ppt/notesSlides/notesSlide10.xml><?xml version="1.0" encoding="utf-8"?>
-<p:notes xmlns:a="http://schemas.openxmlformats.org/drawingml/2006/main" xmlns:r="http://schemas.openxmlformats.org/officeDocument/2006/relationships" xmlns:p="http://schemas.openxmlformats.org/presentationml/2006/main">
-  <p:cSld>
+<p:notes xmlns:a="http://schemas.openxmlformats.org/drawingml/2006/main" xmlns:r="http://schemas.openxmlformats.org/officeDocument/2006/relationships" xmlns:p="http://schemas.openxmlformats.org/presentationml/2006/main" xmlns:m="http://schemas.openxmlformats.org/officeDocument/2006/math" xmlns:w="http://schemas.openxmlformats.org/wordprocessingml/2006/main">
+  <p:cSld name="">
     <p:spTree>
       <p:nvGrpSpPr>
         <p:cNvPr id="1" name=""/>
         <p:cNvGrpSpPr/>
         <p:nvPr/>
       </p:nvGrpSpPr>
-      <p:grpSpPr>
+      <p:grpSpPr bwMode="auto">
         <a:xfrm>
           <a:off x="0" y="0"/>
           <a:ext cx="0" cy="0"/>
@@ -369,19 +343,19 @@
       </p:grpSpPr>
       <p:sp>
         <p:nvSpPr>
-          <p:cNvPr id="2" name="Slide Image Placeholder 1"/>
+          <p:cNvPr id="2140416834" name="Slide Image Placeholder 1"/>
           <p:cNvSpPr>
-            <a:spLocks noGrp="1" noRot="1" noChangeAspect="1"/>
+            <a:spLocks noChangeAspect="1" noGrp="1" noRot="1"/>
           </p:cNvSpPr>
           <p:nvPr>
             <p:ph type="sldImg"/>
           </p:nvPr>
         </p:nvSpPr>
-        <p:spPr/>
-      </p:sp>
-      <p:sp>
-        <p:nvSpPr>
-          <p:cNvPr id="3" name="Notes Placeholder 2"/>
+        <p:spPr bwMode="auto"/>
+      </p:sp>
+      <p:sp>
+        <p:nvSpPr>
+          <p:cNvPr id="767297746" name="Notes Placeholder 2"/>
           <p:cNvSpPr>
             <a:spLocks noGrp="1"/>
           </p:cNvSpPr>
@@ -389,18 +363,21 @@
             <p:ph type="body" idx="1"/>
           </p:nvPr>
         </p:nvSpPr>
-        <p:spPr/>
+        <p:spPr bwMode="auto"/>
         <p:txBody>
           <a:bodyPr/>
           <a:lstStyle/>
           <a:p>
-            <a:endParaRPr lang="en-US" dirty="0"/>
-          </a:p>
-        </p:txBody>
-      </p:sp>
-      <p:sp>
-        <p:nvSpPr>
-          <p:cNvPr id="4" name="Slide Number Placeholder 3"/>
+            <a:pPr>
+              <a:defRPr/>
+            </a:pPr>
+            <a:endParaRPr lang="en-US"/>
+          </a:p>
+        </p:txBody>
+      </p:sp>
+      <p:sp>
+        <p:nvSpPr>
+          <p:cNvPr id="952053446" name="Slide Number Placeholder 3"/>
           <p:cNvSpPr>
             <a:spLocks noGrp="1"/>
           </p:cNvSpPr>
@@ -408,11 +385,14 @@
             <p:ph type="sldNum" sz="quarter" idx="10"/>
           </p:nvPr>
         </p:nvSpPr>
-        <p:spPr/>
+        <p:spPr bwMode="auto"/>
         <p:txBody>
           <a:bodyPr/>
           <a:lstStyle/>
           <a:p>
+            <a:pPr>
+              <a:defRPr/>
+            </a:pPr>
             <a:fld id="{F7021451-1387-4CA6-816F-3879F97B5CBC}" type="slidenum">
               <a:rPr lang="en-US"/>
               <a:t>10</a:t>
@@ -422,11 +402,6 @@
         </p:txBody>
       </p:sp>
     </p:spTree>
-    <p:extLst>
-      <p:ext uri="{BB962C8B-B14F-4D97-AF65-F5344CB8AC3E}">
-        <p14:creationId xmlns:p14="http://schemas.microsoft.com/office/powerpoint/2010/main" val="1024086991"/>
-      </p:ext>
-    </p:extLst>
   </p:cSld>
   <p:clrMapOvr>
     <a:masterClrMapping/>
@@ -435,15 +410,15 @@
 </file>
 
 <file path=ppt/notesSlides/notesSlide2.xml><?xml version="1.0" encoding="utf-8"?>
-<p:notes xmlns:a="http://schemas.openxmlformats.org/drawingml/2006/main" xmlns:r="http://schemas.openxmlformats.org/officeDocument/2006/relationships" xmlns:p="http://schemas.openxmlformats.org/presentationml/2006/main">
-  <p:cSld>
+<p:notes xmlns:a="http://schemas.openxmlformats.org/drawingml/2006/main" xmlns:r="http://schemas.openxmlformats.org/officeDocument/2006/relationships" xmlns:p="http://schemas.openxmlformats.org/presentationml/2006/main" xmlns:m="http://schemas.openxmlformats.org/officeDocument/2006/math" xmlns:w="http://schemas.openxmlformats.org/wordprocessingml/2006/main">
+  <p:cSld name="">
     <p:spTree>
       <p:nvGrpSpPr>
         <p:cNvPr id="1" name=""/>
         <p:cNvGrpSpPr/>
         <p:nvPr/>
       </p:nvGrpSpPr>
-      <p:grpSpPr>
+      <p:grpSpPr bwMode="auto">
         <a:xfrm>
           <a:off x="0" y="0"/>
           <a:ext cx="0" cy="0"/>
@@ -453,19 +428,19 @@
       </p:grpSpPr>
       <p:sp>
         <p:nvSpPr>
-          <p:cNvPr id="2" name="Slide Image Placeholder 1"/>
+          <p:cNvPr id="737165279" name="Slide Image Placeholder 1"/>
           <p:cNvSpPr>
-            <a:spLocks noGrp="1" noRot="1" noChangeAspect="1"/>
+            <a:spLocks noChangeAspect="1" noGrp="1" noRot="1"/>
           </p:cNvSpPr>
           <p:nvPr>
             <p:ph type="sldImg"/>
           </p:nvPr>
         </p:nvSpPr>
-        <p:spPr/>
-      </p:sp>
-      <p:sp>
-        <p:nvSpPr>
-          <p:cNvPr id="3" name="Notes Placeholder 2"/>
+        <p:spPr bwMode="auto"/>
+      </p:sp>
+      <p:sp>
+        <p:nvSpPr>
+          <p:cNvPr id="530520970" name="Notes Placeholder 2"/>
           <p:cNvSpPr>
             <a:spLocks noGrp="1"/>
           </p:cNvSpPr>
@@ -473,18 +448,21 @@
             <p:ph type="body" idx="1"/>
           </p:nvPr>
         </p:nvSpPr>
-        <p:spPr/>
+        <p:spPr bwMode="auto"/>
         <p:txBody>
           <a:bodyPr/>
           <a:lstStyle/>
           <a:p>
-            <a:endParaRPr lang="en-US" dirty="0"/>
-          </a:p>
-        </p:txBody>
-      </p:sp>
-      <p:sp>
-        <p:nvSpPr>
-          <p:cNvPr id="4" name="Slide Number Placeholder 3"/>
+            <a:pPr>
+              <a:defRPr/>
+            </a:pPr>
+            <a:endParaRPr lang="en-US"/>
+          </a:p>
+        </p:txBody>
+      </p:sp>
+      <p:sp>
+        <p:nvSpPr>
+          <p:cNvPr id="1877667023" name="Slide Number Placeholder 3"/>
           <p:cNvSpPr>
             <a:spLocks noGrp="1"/>
           </p:cNvSpPr>
@@ -492,11 +470,14 @@
             <p:ph type="sldNum" sz="quarter" idx="10"/>
           </p:nvPr>
         </p:nvSpPr>
-        <p:spPr/>
+        <p:spPr bwMode="auto"/>
         <p:txBody>
           <a:bodyPr/>
           <a:lstStyle/>
           <a:p>
+            <a:pPr>
+              <a:defRPr/>
+            </a:pPr>
             <a:fld id="{F7021451-1387-4CA6-816F-3879F97B5CBC}" type="slidenum">
               <a:rPr lang="en-US"/>
               <a:t>2</a:t>
@@ -506,11 +487,6 @@
         </p:txBody>
       </p:sp>
     </p:spTree>
-    <p:extLst>
-      <p:ext uri="{BB962C8B-B14F-4D97-AF65-F5344CB8AC3E}">
-        <p14:creationId xmlns:p14="http://schemas.microsoft.com/office/powerpoint/2010/main" val="1024086991"/>
-      </p:ext>
-    </p:extLst>
   </p:cSld>
   <p:clrMapOvr>
     <a:masterClrMapping/>
@@ -519,15 +495,15 @@
 </file>
 
 <file path=ppt/notesSlides/notesSlide3.xml><?xml version="1.0" encoding="utf-8"?>
-<p:notes xmlns:a="http://schemas.openxmlformats.org/drawingml/2006/main" xmlns:r="http://schemas.openxmlformats.org/officeDocument/2006/relationships" xmlns:p="http://schemas.openxmlformats.org/presentationml/2006/main">
-  <p:cSld>
+<p:notes xmlns:a="http://schemas.openxmlformats.org/drawingml/2006/main" xmlns:r="http://schemas.openxmlformats.org/officeDocument/2006/relationships" xmlns:p="http://schemas.openxmlformats.org/presentationml/2006/main" xmlns:m="http://schemas.openxmlformats.org/officeDocument/2006/math" xmlns:w="http://schemas.openxmlformats.org/wordprocessingml/2006/main">
+  <p:cSld name="">
     <p:spTree>
       <p:nvGrpSpPr>
         <p:cNvPr id="1" name=""/>
         <p:cNvGrpSpPr/>
         <p:nvPr/>
       </p:nvGrpSpPr>
-      <p:grpSpPr>
+      <p:grpSpPr bwMode="auto">
         <a:xfrm>
           <a:off x="0" y="0"/>
           <a:ext cx="0" cy="0"/>
@@ -537,19 +513,19 @@
       </p:grpSpPr>
       <p:sp>
         <p:nvSpPr>
-          <p:cNvPr id="2" name="Slide Image Placeholder 1"/>
+          <p:cNvPr id="1111585315" name="Slide Image Placeholder 1"/>
           <p:cNvSpPr>
-            <a:spLocks noGrp="1" noRot="1" noChangeAspect="1"/>
+            <a:spLocks noChangeAspect="1" noGrp="1" noRot="1"/>
           </p:cNvSpPr>
           <p:nvPr>
             <p:ph type="sldImg"/>
           </p:nvPr>
         </p:nvSpPr>
-        <p:spPr/>
-      </p:sp>
-      <p:sp>
-        <p:nvSpPr>
-          <p:cNvPr id="3" name="Notes Placeholder 2"/>
+        <p:spPr bwMode="auto"/>
+      </p:sp>
+      <p:sp>
+        <p:nvSpPr>
+          <p:cNvPr id="1413258458" name="Notes Placeholder 2"/>
           <p:cNvSpPr>
             <a:spLocks noGrp="1"/>
           </p:cNvSpPr>
@@ -557,18 +533,21 @@
             <p:ph type="body" idx="1"/>
           </p:nvPr>
         </p:nvSpPr>
-        <p:spPr/>
+        <p:spPr bwMode="auto"/>
         <p:txBody>
           <a:bodyPr/>
           <a:lstStyle/>
           <a:p>
-            <a:endParaRPr lang="en-US" dirty="0"/>
-          </a:p>
-        </p:txBody>
-      </p:sp>
-      <p:sp>
-        <p:nvSpPr>
-          <p:cNvPr id="4" name="Slide Number Placeholder 3"/>
+            <a:pPr>
+              <a:defRPr/>
+            </a:pPr>
+            <a:endParaRPr lang="en-US"/>
+          </a:p>
+        </p:txBody>
+      </p:sp>
+      <p:sp>
+        <p:nvSpPr>
+          <p:cNvPr id="56017929" name="Slide Number Placeholder 3"/>
           <p:cNvSpPr>
             <a:spLocks noGrp="1"/>
           </p:cNvSpPr>
@@ -576,11 +555,14 @@
             <p:ph type="sldNum" sz="quarter" idx="10"/>
           </p:nvPr>
         </p:nvSpPr>
-        <p:spPr/>
+        <p:spPr bwMode="auto"/>
         <p:txBody>
           <a:bodyPr/>
           <a:lstStyle/>
           <a:p>
+            <a:pPr>
+              <a:defRPr/>
+            </a:pPr>
             <a:fld id="{F7021451-1387-4CA6-816F-3879F97B5CBC}" type="slidenum">
               <a:rPr lang="en-US"/>
               <a:t>3</a:t>
@@ -590,11 +572,6 @@
         </p:txBody>
       </p:sp>
     </p:spTree>
-    <p:extLst>
-      <p:ext uri="{BB962C8B-B14F-4D97-AF65-F5344CB8AC3E}">
-        <p14:creationId xmlns:p14="http://schemas.microsoft.com/office/powerpoint/2010/main" val="1024086991"/>
-      </p:ext>
-    </p:extLst>
   </p:cSld>
   <p:clrMapOvr>
     <a:masterClrMapping/>
@@ -603,15 +580,15 @@
 </file>
 
 <file path=ppt/notesSlides/notesSlide4.xml><?xml version="1.0" encoding="utf-8"?>
-<p:notes xmlns:a="http://schemas.openxmlformats.org/drawingml/2006/main" xmlns:r="http://schemas.openxmlformats.org/officeDocument/2006/relationships" xmlns:p="http://schemas.openxmlformats.org/presentationml/2006/main">
-  <p:cSld>
+<p:notes xmlns:a="http://schemas.openxmlformats.org/drawingml/2006/main" xmlns:r="http://schemas.openxmlformats.org/officeDocument/2006/relationships" xmlns:p="http://schemas.openxmlformats.org/presentationml/2006/main" xmlns:m="http://schemas.openxmlformats.org/officeDocument/2006/math" xmlns:w="http://schemas.openxmlformats.org/wordprocessingml/2006/main">
+  <p:cSld name="">
     <p:spTree>
       <p:nvGrpSpPr>
         <p:cNvPr id="1" name=""/>
         <p:cNvGrpSpPr/>
         <p:nvPr/>
       </p:nvGrpSpPr>
-      <p:grpSpPr>
+      <p:grpSpPr bwMode="auto">
         <a:xfrm>
           <a:off x="0" y="0"/>
           <a:ext cx="0" cy="0"/>
@@ -621,19 +598,19 @@
       </p:grpSpPr>
       <p:sp>
         <p:nvSpPr>
-          <p:cNvPr id="2" name="Slide Image Placeholder 1"/>
+          <p:cNvPr id="167022005" name="Slide Image Placeholder 1"/>
           <p:cNvSpPr>
-            <a:spLocks noGrp="1" noRot="1" noChangeAspect="1"/>
+            <a:spLocks noChangeAspect="1" noGrp="1" noRot="1"/>
           </p:cNvSpPr>
           <p:nvPr>
             <p:ph type="sldImg"/>
           </p:nvPr>
         </p:nvSpPr>
-        <p:spPr/>
-      </p:sp>
-      <p:sp>
-        <p:nvSpPr>
-          <p:cNvPr id="3" name="Notes Placeholder 2"/>
+        <p:spPr bwMode="auto"/>
+      </p:sp>
+      <p:sp>
+        <p:nvSpPr>
+          <p:cNvPr id="156355890" name="Notes Placeholder 2"/>
           <p:cNvSpPr>
             <a:spLocks noGrp="1"/>
           </p:cNvSpPr>
@@ -641,18 +618,21 @@
             <p:ph type="body" idx="1"/>
           </p:nvPr>
         </p:nvSpPr>
-        <p:spPr/>
+        <p:spPr bwMode="auto"/>
         <p:txBody>
           <a:bodyPr/>
           <a:lstStyle/>
           <a:p>
-            <a:endParaRPr lang="en-US" dirty="0"/>
-          </a:p>
-        </p:txBody>
-      </p:sp>
-      <p:sp>
-        <p:nvSpPr>
-          <p:cNvPr id="4" name="Slide Number Placeholder 3"/>
+            <a:pPr>
+              <a:defRPr/>
+            </a:pPr>
+            <a:endParaRPr lang="en-US"/>
+          </a:p>
+        </p:txBody>
+      </p:sp>
+      <p:sp>
+        <p:nvSpPr>
+          <p:cNvPr id="1178077654" name="Slide Number Placeholder 3"/>
           <p:cNvSpPr>
             <a:spLocks noGrp="1"/>
           </p:cNvSpPr>
@@ -660,11 +640,14 @@
             <p:ph type="sldNum" sz="quarter" idx="10"/>
           </p:nvPr>
         </p:nvSpPr>
-        <p:spPr/>
+        <p:spPr bwMode="auto"/>
         <p:txBody>
           <a:bodyPr/>
           <a:lstStyle/>
           <a:p>
+            <a:pPr>
+              <a:defRPr/>
+            </a:pPr>
             <a:fld id="{F7021451-1387-4CA6-816F-3879F97B5CBC}" type="slidenum">
               <a:rPr lang="en-US"/>
               <a:t>4</a:t>
@@ -674,11 +657,6 @@
         </p:txBody>
       </p:sp>
     </p:spTree>
-    <p:extLst>
-      <p:ext uri="{BB962C8B-B14F-4D97-AF65-F5344CB8AC3E}">
-        <p14:creationId xmlns:p14="http://schemas.microsoft.com/office/powerpoint/2010/main" val="1024086991"/>
-      </p:ext>
-    </p:extLst>
   </p:cSld>
   <p:clrMapOvr>
     <a:masterClrMapping/>
@@ -687,15 +665,15 @@
 </file>
 
 <file path=ppt/notesSlides/notesSlide5.xml><?xml version="1.0" encoding="utf-8"?>
-<p:notes xmlns:a="http://schemas.openxmlformats.org/drawingml/2006/main" xmlns:r="http://schemas.openxmlformats.org/officeDocument/2006/relationships" xmlns:p="http://schemas.openxmlformats.org/presentationml/2006/main">
-  <p:cSld>
+<p:notes xmlns:a="http://schemas.openxmlformats.org/drawingml/2006/main" xmlns:r="http://schemas.openxmlformats.org/officeDocument/2006/relationships" xmlns:p="http://schemas.openxmlformats.org/presentationml/2006/main" xmlns:m="http://schemas.openxmlformats.org/officeDocument/2006/math" xmlns:w="http://schemas.openxmlformats.org/wordprocessingml/2006/main">
+  <p:cSld name="">
     <p:spTree>
       <p:nvGrpSpPr>
         <p:cNvPr id="1" name=""/>
         <p:cNvGrpSpPr/>
         <p:nvPr/>
       </p:nvGrpSpPr>
-      <p:grpSpPr>
+      <p:grpSpPr bwMode="auto">
         <a:xfrm>
           <a:off x="0" y="0"/>
           <a:ext cx="0" cy="0"/>
@@ -705,19 +683,19 @@
       </p:grpSpPr>
       <p:sp>
         <p:nvSpPr>
-          <p:cNvPr id="2" name="Slide Image Placeholder 1"/>
+          <p:cNvPr id="1538819033" name="Slide Image Placeholder 1"/>
           <p:cNvSpPr>
-            <a:spLocks noGrp="1" noRot="1" noChangeAspect="1"/>
+            <a:spLocks noChangeAspect="1" noGrp="1" noRot="1"/>
           </p:cNvSpPr>
           <p:nvPr>
             <p:ph type="sldImg"/>
           </p:nvPr>
         </p:nvSpPr>
-        <p:spPr/>
-      </p:sp>
-      <p:sp>
-        <p:nvSpPr>
-          <p:cNvPr id="3" name="Notes Placeholder 2"/>
+        <p:spPr bwMode="auto"/>
+      </p:sp>
+      <p:sp>
+        <p:nvSpPr>
+          <p:cNvPr id="1535645468" name="Notes Placeholder 2"/>
           <p:cNvSpPr>
             <a:spLocks noGrp="1"/>
           </p:cNvSpPr>
@@ -725,18 +703,21 @@
             <p:ph type="body" idx="1"/>
           </p:nvPr>
         </p:nvSpPr>
-        <p:spPr/>
+        <p:spPr bwMode="auto"/>
         <p:txBody>
           <a:bodyPr/>
           <a:lstStyle/>
           <a:p>
-            <a:endParaRPr lang="en-US" dirty="0"/>
-          </a:p>
-        </p:txBody>
-      </p:sp>
-      <p:sp>
-        <p:nvSpPr>
-          <p:cNvPr id="4" name="Slide Number Placeholder 3"/>
+            <a:pPr>
+              <a:defRPr/>
+            </a:pPr>
+            <a:endParaRPr lang="en-US"/>
+          </a:p>
+        </p:txBody>
+      </p:sp>
+      <p:sp>
+        <p:nvSpPr>
+          <p:cNvPr id="1323928188" name="Slide Number Placeholder 3"/>
           <p:cNvSpPr>
             <a:spLocks noGrp="1"/>
           </p:cNvSpPr>
@@ -744,11 +725,14 @@
             <p:ph type="sldNum" sz="quarter" idx="10"/>
           </p:nvPr>
         </p:nvSpPr>
-        <p:spPr/>
+        <p:spPr bwMode="auto"/>
         <p:txBody>
           <a:bodyPr/>
           <a:lstStyle/>
           <a:p>
+            <a:pPr>
+              <a:defRPr/>
+            </a:pPr>
             <a:fld id="{F7021451-1387-4CA6-816F-3879F97B5CBC}" type="slidenum">
               <a:rPr lang="en-US"/>
               <a:t>5</a:t>
@@ -758,11 +742,6 @@
         </p:txBody>
       </p:sp>
     </p:spTree>
-    <p:extLst>
-      <p:ext uri="{BB962C8B-B14F-4D97-AF65-F5344CB8AC3E}">
-        <p14:creationId xmlns:p14="http://schemas.microsoft.com/office/powerpoint/2010/main" val="102153663"/>
-      </p:ext>
-    </p:extLst>
   </p:cSld>
   <p:clrMapOvr>
     <a:masterClrMapping/>
@@ -771,15 +750,15 @@
 </file>
 
 <file path=ppt/notesSlides/notesSlide6.xml><?xml version="1.0" encoding="utf-8"?>
-<p:notes xmlns:a="http://schemas.openxmlformats.org/drawingml/2006/main" xmlns:r="http://schemas.openxmlformats.org/officeDocument/2006/relationships" xmlns:p="http://schemas.openxmlformats.org/presentationml/2006/main">
-  <p:cSld>
+<p:notes xmlns:a="http://schemas.openxmlformats.org/drawingml/2006/main" xmlns:r="http://schemas.openxmlformats.org/officeDocument/2006/relationships" xmlns:p="http://schemas.openxmlformats.org/presentationml/2006/main" xmlns:m="http://schemas.openxmlformats.org/officeDocument/2006/math" xmlns:w="http://schemas.openxmlformats.org/wordprocessingml/2006/main">
+  <p:cSld name="">
     <p:spTree>
       <p:nvGrpSpPr>
         <p:cNvPr id="1" name=""/>
         <p:cNvGrpSpPr/>
         <p:nvPr/>
       </p:nvGrpSpPr>
-      <p:grpSpPr>
+      <p:grpSpPr bwMode="auto">
         <a:xfrm>
           <a:off x="0" y="0"/>
           <a:ext cx="0" cy="0"/>
@@ -789,19 +768,19 @@
       </p:grpSpPr>
       <p:sp>
         <p:nvSpPr>
-          <p:cNvPr id="2" name="Slide Image Placeholder 1"/>
+          <p:cNvPr id="908687067" name="Slide Image Placeholder 1"/>
           <p:cNvSpPr>
-            <a:spLocks noGrp="1" noRot="1" noChangeAspect="1"/>
+            <a:spLocks noChangeAspect="1" noGrp="1" noRot="1"/>
           </p:cNvSpPr>
           <p:nvPr>
             <p:ph type="sldImg"/>
           </p:nvPr>
         </p:nvSpPr>
-        <p:spPr/>
-      </p:sp>
-      <p:sp>
-        <p:nvSpPr>
-          <p:cNvPr id="3" name="Notes Placeholder 2"/>
+        <p:spPr bwMode="auto"/>
+      </p:sp>
+      <p:sp>
+        <p:nvSpPr>
+          <p:cNvPr id="1567509522" name="Notes Placeholder 2"/>
           <p:cNvSpPr>
             <a:spLocks noGrp="1"/>
           </p:cNvSpPr>
@@ -809,18 +788,21 @@
             <p:ph type="body" idx="1"/>
           </p:nvPr>
         </p:nvSpPr>
-        <p:spPr/>
+        <p:spPr bwMode="auto"/>
         <p:txBody>
           <a:bodyPr/>
           <a:lstStyle/>
           <a:p>
-            <a:endParaRPr lang="en-US" dirty="0"/>
-          </a:p>
-        </p:txBody>
-      </p:sp>
-      <p:sp>
-        <p:nvSpPr>
-          <p:cNvPr id="4" name="Slide Number Placeholder 3"/>
+            <a:pPr>
+              <a:defRPr/>
+            </a:pPr>
+            <a:endParaRPr lang="en-US"/>
+          </a:p>
+        </p:txBody>
+      </p:sp>
+      <p:sp>
+        <p:nvSpPr>
+          <p:cNvPr id="1789815443" name="Slide Number Placeholder 3"/>
           <p:cNvSpPr>
             <a:spLocks noGrp="1"/>
           </p:cNvSpPr>
@@ -828,11 +810,14 @@
             <p:ph type="sldNum" sz="quarter" idx="10"/>
           </p:nvPr>
         </p:nvSpPr>
-        <p:spPr/>
+        <p:spPr bwMode="auto"/>
         <p:txBody>
           <a:bodyPr/>
           <a:lstStyle/>
           <a:p>
+            <a:pPr>
+              <a:defRPr/>
+            </a:pPr>
             <a:fld id="{F7021451-1387-4CA6-816F-3879F97B5CBC}" type="slidenum">
               <a:rPr lang="en-US"/>
               <a:t>6</a:t>
@@ -842,11 +827,6 @@
         </p:txBody>
       </p:sp>
     </p:spTree>
-    <p:extLst>
-      <p:ext uri="{BB962C8B-B14F-4D97-AF65-F5344CB8AC3E}">
-        <p14:creationId xmlns:p14="http://schemas.microsoft.com/office/powerpoint/2010/main" val="950342749"/>
-      </p:ext>
-    </p:extLst>
   </p:cSld>
   <p:clrMapOvr>
     <a:masterClrMapping/>
@@ -855,15 +835,15 @@
 </file>
 
 <file path=ppt/notesSlides/notesSlide7.xml><?xml version="1.0" encoding="utf-8"?>
-<p:notes xmlns:a="http://schemas.openxmlformats.org/drawingml/2006/main" xmlns:r="http://schemas.openxmlformats.org/officeDocument/2006/relationships" xmlns:p="http://schemas.openxmlformats.org/presentationml/2006/main">
-  <p:cSld>
+<p:notes xmlns:a="http://schemas.openxmlformats.org/drawingml/2006/main" xmlns:r="http://schemas.openxmlformats.org/officeDocument/2006/relationships" xmlns:p="http://schemas.openxmlformats.org/presentationml/2006/main" xmlns:m="http://schemas.openxmlformats.org/officeDocument/2006/math" xmlns:w="http://schemas.openxmlformats.org/wordprocessingml/2006/main">
+  <p:cSld name="">
     <p:spTree>
       <p:nvGrpSpPr>
         <p:cNvPr id="1" name=""/>
         <p:cNvGrpSpPr/>
         <p:nvPr/>
       </p:nvGrpSpPr>
-      <p:grpSpPr>
+      <p:grpSpPr bwMode="auto">
         <a:xfrm>
           <a:off x="0" y="0"/>
           <a:ext cx="0" cy="0"/>
@@ -873,19 +853,19 @@
       </p:grpSpPr>
       <p:sp>
         <p:nvSpPr>
-          <p:cNvPr id="2" name="Slide Image Placeholder 1"/>
+          <p:cNvPr id="1498276560" name="Slide Image Placeholder 1"/>
           <p:cNvSpPr>
-            <a:spLocks noGrp="1" noRot="1" noChangeAspect="1"/>
+            <a:spLocks noChangeAspect="1" noGrp="1" noRot="1"/>
           </p:cNvSpPr>
           <p:nvPr>
             <p:ph type="sldImg"/>
           </p:nvPr>
         </p:nvSpPr>
-        <p:spPr/>
-      </p:sp>
-      <p:sp>
-        <p:nvSpPr>
-          <p:cNvPr id="3" name="Notes Placeholder 2"/>
+        <p:spPr bwMode="auto"/>
+      </p:sp>
+      <p:sp>
+        <p:nvSpPr>
+          <p:cNvPr id="877434885" name="Notes Placeholder 2"/>
           <p:cNvSpPr>
             <a:spLocks noGrp="1"/>
           </p:cNvSpPr>
@@ -893,18 +873,21 @@
             <p:ph type="body" idx="1"/>
           </p:nvPr>
         </p:nvSpPr>
-        <p:spPr/>
+        <p:spPr bwMode="auto"/>
         <p:txBody>
           <a:bodyPr/>
           <a:lstStyle/>
           <a:p>
-            <a:endParaRPr lang="en-US" dirty="0"/>
-          </a:p>
-        </p:txBody>
-      </p:sp>
-      <p:sp>
-        <p:nvSpPr>
-          <p:cNvPr id="4" name="Slide Number Placeholder 3"/>
+            <a:pPr>
+              <a:defRPr/>
+            </a:pPr>
+            <a:endParaRPr lang="en-US"/>
+          </a:p>
+        </p:txBody>
+      </p:sp>
+      <p:sp>
+        <p:nvSpPr>
+          <p:cNvPr id="1594046964" name="Slide Number Placeholder 3"/>
           <p:cNvSpPr>
             <a:spLocks noGrp="1"/>
           </p:cNvSpPr>
@@ -912,11 +895,14 @@
             <p:ph type="sldNum" sz="quarter" idx="10"/>
           </p:nvPr>
         </p:nvSpPr>
-        <p:spPr/>
+        <p:spPr bwMode="auto"/>
         <p:txBody>
           <a:bodyPr/>
           <a:lstStyle/>
           <a:p>
+            <a:pPr>
+              <a:defRPr/>
+            </a:pPr>
             <a:fld id="{F7021451-1387-4CA6-816F-3879F97B5CBC}" type="slidenum">
               <a:rPr lang="en-US"/>
               <a:t>7</a:t>
@@ -926,11 +912,6 @@
         </p:txBody>
       </p:sp>
     </p:spTree>
-    <p:extLst>
-      <p:ext uri="{BB962C8B-B14F-4D97-AF65-F5344CB8AC3E}">
-        <p14:creationId xmlns:p14="http://schemas.microsoft.com/office/powerpoint/2010/main" val="1024086991"/>
-      </p:ext>
-    </p:extLst>
   </p:cSld>
   <p:clrMapOvr>
     <a:masterClrMapping/>
@@ -939,15 +920,15 @@
 </file>
 
 <file path=ppt/notesSlides/notesSlide8.xml><?xml version="1.0" encoding="utf-8"?>
-<p:notes xmlns:a="http://schemas.openxmlformats.org/drawingml/2006/main" xmlns:r="http://schemas.openxmlformats.org/officeDocument/2006/relationships" xmlns:p="http://schemas.openxmlformats.org/presentationml/2006/main">
-  <p:cSld>
+<p:notes xmlns:a="http://schemas.openxmlformats.org/drawingml/2006/main" xmlns:r="http://schemas.openxmlformats.org/officeDocument/2006/relationships" xmlns:p="http://schemas.openxmlformats.org/presentationml/2006/main" xmlns:m="http://schemas.openxmlformats.org/officeDocument/2006/math" xmlns:w="http://schemas.openxmlformats.org/wordprocessingml/2006/main">
+  <p:cSld name="">
     <p:spTree>
       <p:nvGrpSpPr>
         <p:cNvPr id="1" name=""/>
         <p:cNvGrpSpPr/>
         <p:nvPr/>
       </p:nvGrpSpPr>
-      <p:grpSpPr>
+      <p:grpSpPr bwMode="auto">
         <a:xfrm>
           <a:off x="0" y="0"/>
           <a:ext cx="0" cy="0"/>
@@ -957,19 +938,19 @@
       </p:grpSpPr>
       <p:sp>
         <p:nvSpPr>
-          <p:cNvPr id="2" name="Slide Image Placeholder 1"/>
+          <p:cNvPr id="1229752005" name="Slide Image Placeholder 1"/>
           <p:cNvSpPr>
-            <a:spLocks noGrp="1" noRot="1" noChangeAspect="1"/>
+            <a:spLocks noChangeAspect="1" noGrp="1" noRot="1"/>
           </p:cNvSpPr>
           <p:nvPr>
             <p:ph type="sldImg"/>
           </p:nvPr>
         </p:nvSpPr>
-        <p:spPr/>
-      </p:sp>
-      <p:sp>
-        <p:nvSpPr>
-          <p:cNvPr id="3" name="Notes Placeholder 2"/>
+        <p:spPr bwMode="auto"/>
+      </p:sp>
+      <p:sp>
+        <p:nvSpPr>
+          <p:cNvPr id="1617304600" name="Notes Placeholder 2"/>
           <p:cNvSpPr>
             <a:spLocks noGrp="1"/>
           </p:cNvSpPr>
@@ -977,18 +958,21 @@
             <p:ph type="body" idx="1"/>
           </p:nvPr>
         </p:nvSpPr>
-        <p:spPr/>
+        <p:spPr bwMode="auto"/>
         <p:txBody>
           <a:bodyPr/>
           <a:lstStyle/>
           <a:p>
-            <a:endParaRPr lang="en-US" dirty="0"/>
-          </a:p>
-        </p:txBody>
-      </p:sp>
-      <p:sp>
-        <p:nvSpPr>
-          <p:cNvPr id="4" name="Slide Number Placeholder 3"/>
+            <a:pPr>
+              <a:defRPr/>
+            </a:pPr>
+            <a:endParaRPr lang="en-US"/>
+          </a:p>
+        </p:txBody>
+      </p:sp>
+      <p:sp>
+        <p:nvSpPr>
+          <p:cNvPr id="679134909" name="Slide Number Placeholder 3"/>
           <p:cNvSpPr>
             <a:spLocks noGrp="1"/>
           </p:cNvSpPr>
@@ -996,11 +980,14 @@
             <p:ph type="sldNum" sz="quarter" idx="10"/>
           </p:nvPr>
         </p:nvSpPr>
-        <p:spPr/>
+        <p:spPr bwMode="auto"/>
         <p:txBody>
           <a:bodyPr/>
           <a:lstStyle/>
           <a:p>
+            <a:pPr>
+              <a:defRPr/>
+            </a:pPr>
             <a:fld id="{F7021451-1387-4CA6-816F-3879F97B5CBC}" type="slidenum">
               <a:rPr lang="en-US"/>
               <a:t>8</a:t>
@@ -1010,11 +997,6 @@
         </p:txBody>
       </p:sp>
     </p:spTree>
-    <p:extLst>
-      <p:ext uri="{BB962C8B-B14F-4D97-AF65-F5344CB8AC3E}">
-        <p14:creationId xmlns:p14="http://schemas.microsoft.com/office/powerpoint/2010/main" val="1024086991"/>
-      </p:ext>
-    </p:extLst>
   </p:cSld>
   <p:clrMapOvr>
     <a:masterClrMapping/>
@@ -1023,15 +1005,15 @@
 </file>
 
 <file path=ppt/notesSlides/notesSlide9.xml><?xml version="1.0" encoding="utf-8"?>
-<p:notes xmlns:a="http://schemas.openxmlformats.org/drawingml/2006/main" xmlns:r="http://schemas.openxmlformats.org/officeDocument/2006/relationships" xmlns:p="http://schemas.openxmlformats.org/presentationml/2006/main">
-  <p:cSld>
+<p:notes xmlns:a="http://schemas.openxmlformats.org/drawingml/2006/main" xmlns:r="http://schemas.openxmlformats.org/officeDocument/2006/relationships" xmlns:p="http://schemas.openxmlformats.org/presentationml/2006/main" xmlns:m="http://schemas.openxmlformats.org/officeDocument/2006/math" xmlns:w="http://schemas.openxmlformats.org/wordprocessingml/2006/main">
+  <p:cSld name="">
     <p:spTree>
       <p:nvGrpSpPr>
         <p:cNvPr id="1" name=""/>
         <p:cNvGrpSpPr/>
         <p:nvPr/>
       </p:nvGrpSpPr>
-      <p:grpSpPr>
+      <p:grpSpPr bwMode="auto">
         <a:xfrm>
           <a:off x="0" y="0"/>
           <a:ext cx="0" cy="0"/>
@@ -1041,19 +1023,19 @@
       </p:grpSpPr>
       <p:sp>
         <p:nvSpPr>
-          <p:cNvPr id="2" name="Slide Image Placeholder 1"/>
+          <p:cNvPr id="179933562" name="Slide Image Placeholder 1"/>
           <p:cNvSpPr>
-            <a:spLocks noGrp="1" noRot="1" noChangeAspect="1"/>
+            <a:spLocks noChangeAspect="1" noGrp="1" noRot="1"/>
           </p:cNvSpPr>
           <p:nvPr>
             <p:ph type="sldImg"/>
           </p:nvPr>
         </p:nvSpPr>
-        <p:spPr/>
-      </p:sp>
-      <p:sp>
-        <p:nvSpPr>
-          <p:cNvPr id="3" name="Notes Placeholder 2"/>
+        <p:spPr bwMode="auto"/>
+      </p:sp>
+      <p:sp>
+        <p:nvSpPr>
+          <p:cNvPr id="244840684" name="Notes Placeholder 2"/>
           <p:cNvSpPr>
             <a:spLocks noGrp="1"/>
           </p:cNvSpPr>
@@ -1061,18 +1043,21 @@
             <p:ph type="body" idx="1"/>
           </p:nvPr>
         </p:nvSpPr>
-        <p:spPr/>
+        <p:spPr bwMode="auto"/>
         <p:txBody>
           <a:bodyPr/>
           <a:lstStyle/>
           <a:p>
-            <a:endParaRPr lang="en-US" dirty="0"/>
-          </a:p>
-        </p:txBody>
-      </p:sp>
-      <p:sp>
-        <p:nvSpPr>
-          <p:cNvPr id="4" name="Slide Number Placeholder 3"/>
+            <a:pPr>
+              <a:defRPr/>
+            </a:pPr>
+            <a:endParaRPr lang="en-US"/>
+          </a:p>
+        </p:txBody>
+      </p:sp>
+      <p:sp>
+        <p:nvSpPr>
+          <p:cNvPr id="2083100720" name="Slide Number Placeholder 3"/>
           <p:cNvSpPr>
             <a:spLocks noGrp="1"/>
           </p:cNvSpPr>
@@ -1080,11 +1065,14 @@
             <p:ph type="sldNum" sz="quarter" idx="10"/>
           </p:nvPr>
         </p:nvSpPr>
-        <p:spPr/>
+        <p:spPr bwMode="auto"/>
         <p:txBody>
           <a:bodyPr/>
           <a:lstStyle/>
           <a:p>
+            <a:pPr>
+              <a:defRPr/>
+            </a:pPr>
             <a:fld id="{F7021451-1387-4CA6-816F-3879F97B5CBC}" type="slidenum">
               <a:rPr lang="en-US"/>
               <a:t>9</a:t>
@@ -1094,11 +1082,6 @@
         </p:txBody>
       </p:sp>
     </p:spTree>
-    <p:extLst>
-      <p:ext uri="{BB962C8B-B14F-4D97-AF65-F5344CB8AC3E}">
-        <p14:creationId xmlns:p14="http://schemas.microsoft.com/office/powerpoint/2010/main" val="2188785348"/>
-      </p:ext>
-    </p:extLst>
   </p:cSld>
   <p:clrMapOvr>
     <a:masterClrMapping/>
@@ -1107,7 +1090,7 @@
 </file>
 
 <file path=ppt/slideLayouts/slideLayout1.xml><?xml version="1.0" encoding="utf-8"?>
-<p:sldLayout xmlns:a="http://schemas.openxmlformats.org/drawingml/2006/main" xmlns:r="http://schemas.openxmlformats.org/officeDocument/2006/relationships" xmlns:p="http://schemas.openxmlformats.org/presentationml/2006/main" preserve="1">
+<p:sldLayout xmlns:a="http://schemas.openxmlformats.org/drawingml/2006/main" xmlns:r="http://schemas.openxmlformats.org/officeDocument/2006/relationships" xmlns:p="http://schemas.openxmlformats.org/presentationml/2006/main" xmlns:m="http://schemas.openxmlformats.org/officeDocument/2006/math" xmlns:w="http://schemas.openxmlformats.org/wordprocessingml/2006/main" matchingName="" preserve="1" showMasterPhAnim="0" showMasterSp="1" userDrawn="1">
   <p:cSld name="DEFAULT">
     <p:bg>
       <p:bgRef idx="1001">
@@ -1120,7 +1103,7 @@
         <p:cNvGrpSpPr/>
         <p:nvPr/>
       </p:nvGrpSpPr>
-      <p:grpSpPr>
+      <p:grpSpPr bwMode="auto">
         <a:xfrm>
           <a:off x="0" y="0"/>
           <a:ext cx="0" cy="0"/>
@@ -1137,7 +1120,7 @@
 </file>
 
 <file path=ppt/slideLayouts/slideLayout10.xml><?xml version="1.0" encoding="utf-8"?>
-<p:sldLayout xmlns:a="http://schemas.openxmlformats.org/drawingml/2006/main" xmlns:r="http://schemas.openxmlformats.org/officeDocument/2006/relationships" xmlns:p="http://schemas.openxmlformats.org/presentationml/2006/main" preserve="1">
+<p:sldLayout xmlns:a="http://schemas.openxmlformats.org/drawingml/2006/main" xmlns:r="http://schemas.openxmlformats.org/officeDocument/2006/relationships" xmlns:p="http://schemas.openxmlformats.org/presentationml/2006/main" xmlns:m="http://schemas.openxmlformats.org/officeDocument/2006/math" xmlns:w="http://schemas.openxmlformats.org/wordprocessingml/2006/main" matchingName="" preserve="1" showMasterPhAnim="0" showMasterSp="1" userDrawn="1">
   <p:cSld name="Slide 9 master">
     <p:spTree>
       <p:nvGrpSpPr>
@@ -1145,7 +1128,7 @@
         <p:cNvGrpSpPr/>
         <p:nvPr/>
       </p:nvGrpSpPr>
-      <p:grpSpPr>
+      <p:grpSpPr bwMode="auto">
         <a:xfrm>
           <a:off x="0" y="0"/>
           <a:ext cx="0" cy="0"/>
@@ -1155,11 +1138,11 @@
       </p:grpSpPr>
       <p:sp>
         <p:nvSpPr>
-          <p:cNvPr id="2" name="Shape 0"/>
-          <p:cNvSpPr/>
-          <p:nvPr/>
-        </p:nvSpPr>
-        <p:spPr>
+          <p:cNvPr id="678728704" name="Shape 0"/>
+          <p:cNvSpPr/>
+          <p:nvPr/>
+        </p:nvSpPr>
+        <p:spPr bwMode="auto">
           <a:xfrm>
             <a:off x="0" y="0"/>
             <a:ext cx="14630400" cy="8229600"/>
@@ -1175,11 +1158,11 @@
       </p:sp>
       <p:sp>
         <p:nvSpPr>
-          <p:cNvPr id="3" name="Shape 1"/>
-          <p:cNvSpPr/>
-          <p:nvPr/>
-        </p:nvSpPr>
-        <p:spPr>
+          <p:cNvPr id="732218955" name="Shape 1"/>
+          <p:cNvSpPr/>
+          <p:nvPr/>
+        </p:nvSpPr>
+        <p:spPr bwMode="auto">
           <a:xfrm>
             <a:off x="0" y="0"/>
             <a:ext cx="14630400" cy="8229600"/>
@@ -1195,7 +1178,7 @@
       </p:sp>
       <p:pic>
         <p:nvPicPr>
-          <p:cNvPr id="4" name="Image 0" descr="preencoded.png">
+          <p:cNvPr id="1376782857" name="Image 0" descr="preencoded.png">
             <a:hlinkClick r:id="rId2"/>
           </p:cNvPr>
           <p:cNvPicPr>
@@ -1203,16 +1186,14 @@
           </p:cNvPicPr>
           <p:nvPr/>
         </p:nvPicPr>
-        <p:blipFill>
+        <p:blipFill rotWithShape="1">
           <a:blip r:embed="rId3"/>
-          <a:stretch>
-            <a:fillRect/>
-          </a:stretch>
+          <a:stretch/>
         </p:blipFill>
-        <p:spPr>
-          <a:xfrm>
-            <a:off x="12839215" y="7749540"/>
-            <a:ext cx="1722605" cy="411480"/>
+        <p:spPr bwMode="auto">
+          <a:xfrm>
+            <a:off x="12839214" y="7749539"/>
+            <a:ext cx="1722604" cy="411480"/>
           </a:xfrm>
           <a:prstGeom prst="rect">
             <a:avLst/>
@@ -1228,7 +1209,7 @@
 </file>
 
 <file path=ppt/slideLayouts/slideLayout11.xml><?xml version="1.0" encoding="utf-8"?>
-<p:sldLayout xmlns:a="http://schemas.openxmlformats.org/drawingml/2006/main" xmlns:r="http://schemas.openxmlformats.org/officeDocument/2006/relationships" xmlns:p="http://schemas.openxmlformats.org/presentationml/2006/main" preserve="1">
+<p:sldLayout xmlns:a="http://schemas.openxmlformats.org/drawingml/2006/main" xmlns:r="http://schemas.openxmlformats.org/officeDocument/2006/relationships" xmlns:p="http://schemas.openxmlformats.org/presentationml/2006/main" xmlns:m="http://schemas.openxmlformats.org/officeDocument/2006/math" xmlns:w="http://schemas.openxmlformats.org/wordprocessingml/2006/main" matchingName="" preserve="1" showMasterPhAnim="0" showMasterSp="1" userDrawn="1">
   <p:cSld name="Slide 10 master">
     <p:spTree>
       <p:nvGrpSpPr>
@@ -1236,7 +1217,7 @@
         <p:cNvGrpSpPr/>
         <p:nvPr/>
       </p:nvGrpSpPr>
-      <p:grpSpPr>
+      <p:grpSpPr bwMode="auto">
         <a:xfrm>
           <a:off x="0" y="0"/>
           <a:ext cx="0" cy="0"/>
@@ -1246,11 +1227,11 @@
       </p:grpSpPr>
       <p:sp>
         <p:nvSpPr>
-          <p:cNvPr id="2" name="Shape 0"/>
-          <p:cNvSpPr/>
-          <p:nvPr/>
-        </p:nvSpPr>
-        <p:spPr>
+          <p:cNvPr id="473378554" name="Shape 0"/>
+          <p:cNvSpPr/>
+          <p:nvPr/>
+        </p:nvSpPr>
+        <p:spPr bwMode="auto">
           <a:xfrm>
             <a:off x="0" y="0"/>
             <a:ext cx="14630400" cy="8229600"/>
@@ -1266,11 +1247,11 @@
       </p:sp>
       <p:sp>
         <p:nvSpPr>
-          <p:cNvPr id="3" name="Shape 1"/>
-          <p:cNvSpPr/>
-          <p:nvPr/>
-        </p:nvSpPr>
-        <p:spPr>
+          <p:cNvPr id="687274241" name="Shape 1"/>
+          <p:cNvSpPr/>
+          <p:nvPr/>
+        </p:nvSpPr>
+        <p:spPr bwMode="auto">
           <a:xfrm>
             <a:off x="0" y="0"/>
             <a:ext cx="14630400" cy="8229600"/>
@@ -1286,7 +1267,7 @@
       </p:sp>
       <p:pic>
         <p:nvPicPr>
-          <p:cNvPr id="4" name="Image 0" descr="preencoded.png">
+          <p:cNvPr id="129977833" name="Image 0" descr="preencoded.png">
             <a:hlinkClick r:id="rId2"/>
           </p:cNvPr>
           <p:cNvPicPr>
@@ -1294,16 +1275,14 @@
           </p:cNvPicPr>
           <p:nvPr/>
         </p:nvPicPr>
-        <p:blipFill>
+        <p:blipFill rotWithShape="1">
           <a:blip r:embed="rId3"/>
-          <a:stretch>
-            <a:fillRect/>
-          </a:stretch>
+          <a:stretch/>
         </p:blipFill>
-        <p:spPr>
-          <a:xfrm>
-            <a:off x="12839215" y="7749540"/>
-            <a:ext cx="1722605" cy="411480"/>
+        <p:spPr bwMode="auto">
+          <a:xfrm>
+            <a:off x="12839214" y="7749539"/>
+            <a:ext cx="1722604" cy="411480"/>
           </a:xfrm>
           <a:prstGeom prst="rect">
             <a:avLst/>
@@ -1319,7 +1298,7 @@
 </file>
 
 <file path=ppt/slideLayouts/slideLayout2.xml><?xml version="1.0" encoding="utf-8"?>
-<p:sldLayout xmlns:a="http://schemas.openxmlformats.org/drawingml/2006/main" xmlns:r="http://schemas.openxmlformats.org/officeDocument/2006/relationships" xmlns:p="http://schemas.openxmlformats.org/presentationml/2006/main" preserve="1">
+<p:sldLayout xmlns:a="http://schemas.openxmlformats.org/drawingml/2006/main" xmlns:r="http://schemas.openxmlformats.org/officeDocument/2006/relationships" xmlns:p="http://schemas.openxmlformats.org/presentationml/2006/main" xmlns:m="http://schemas.openxmlformats.org/officeDocument/2006/math" xmlns:w="http://schemas.openxmlformats.org/wordprocessingml/2006/main" matchingName="" preserve="1" showMasterPhAnim="0" showMasterSp="1" userDrawn="1">
   <p:cSld name="Slide 1 master">
     <p:spTree>
       <p:nvGrpSpPr>
@@ -1327,7 +1306,7 @@
         <p:cNvGrpSpPr/>
         <p:nvPr/>
       </p:nvGrpSpPr>
-      <p:grpSpPr>
+      <p:grpSpPr bwMode="auto">
         <a:xfrm>
           <a:off x="0" y="0"/>
           <a:ext cx="0" cy="0"/>
@@ -1337,11 +1316,11 @@
       </p:grpSpPr>
       <p:sp>
         <p:nvSpPr>
-          <p:cNvPr id="2" name="Shape 0"/>
-          <p:cNvSpPr/>
-          <p:nvPr/>
-        </p:nvSpPr>
-        <p:spPr>
+          <p:cNvPr id="1308290283" name="Shape 0"/>
+          <p:cNvSpPr/>
+          <p:nvPr/>
+        </p:nvSpPr>
+        <p:spPr bwMode="auto">
           <a:xfrm>
             <a:off x="0" y="0"/>
             <a:ext cx="14630400" cy="8229600"/>
@@ -1357,11 +1336,11 @@
       </p:sp>
       <p:sp>
         <p:nvSpPr>
-          <p:cNvPr id="3" name="Shape 1"/>
-          <p:cNvSpPr/>
-          <p:nvPr/>
-        </p:nvSpPr>
-        <p:spPr>
+          <p:cNvPr id="573118608" name="Shape 1"/>
+          <p:cNvSpPr/>
+          <p:nvPr/>
+        </p:nvSpPr>
+        <p:spPr bwMode="auto">
           <a:xfrm>
             <a:off x="0" y="0"/>
             <a:ext cx="14630400" cy="8229600"/>
@@ -1377,7 +1356,7 @@
       </p:sp>
       <p:pic>
         <p:nvPicPr>
-          <p:cNvPr id="4" name="Image 0" descr="preencoded.png">
+          <p:cNvPr id="67984549" name="Image 0" descr="preencoded.png">
             <a:hlinkClick r:id="rId2"/>
           </p:cNvPr>
           <p:cNvPicPr>
@@ -1385,16 +1364,14 @@
           </p:cNvPicPr>
           <p:nvPr/>
         </p:nvPicPr>
-        <p:blipFill>
+        <p:blipFill rotWithShape="1">
           <a:blip r:embed="rId3"/>
-          <a:stretch>
-            <a:fillRect/>
-          </a:stretch>
+          <a:stretch/>
         </p:blipFill>
-        <p:spPr>
-          <a:xfrm>
-            <a:off x="12839215" y="7749540"/>
-            <a:ext cx="1722605" cy="411480"/>
+        <p:spPr bwMode="auto">
+          <a:xfrm>
+            <a:off x="12839214" y="7749539"/>
+            <a:ext cx="1722604" cy="411480"/>
           </a:xfrm>
           <a:prstGeom prst="rect">
             <a:avLst/>
@@ -1410,7 +1387,7 @@
 </file>
 
 <file path=ppt/slideLayouts/slideLayout3.xml><?xml version="1.0" encoding="utf-8"?>
-<p:sldLayout xmlns:a="http://schemas.openxmlformats.org/drawingml/2006/main" xmlns:r="http://schemas.openxmlformats.org/officeDocument/2006/relationships" xmlns:p="http://schemas.openxmlformats.org/presentationml/2006/main" preserve="1">
+<p:sldLayout xmlns:a="http://schemas.openxmlformats.org/drawingml/2006/main" xmlns:r="http://schemas.openxmlformats.org/officeDocument/2006/relationships" xmlns:p="http://schemas.openxmlformats.org/presentationml/2006/main" xmlns:m="http://schemas.openxmlformats.org/officeDocument/2006/math" xmlns:w="http://schemas.openxmlformats.org/wordprocessingml/2006/main" matchingName="" preserve="1" showMasterPhAnim="0" showMasterSp="1" userDrawn="1">
   <p:cSld name="Slide 2 master">
     <p:spTree>
       <p:nvGrpSpPr>
@@ -1418,7 +1395,7 @@
         <p:cNvGrpSpPr/>
         <p:nvPr/>
       </p:nvGrpSpPr>
-      <p:grpSpPr>
+      <p:grpSpPr bwMode="auto">
         <a:xfrm>
           <a:off x="0" y="0"/>
           <a:ext cx="0" cy="0"/>
@@ -1428,11 +1405,11 @@
       </p:grpSpPr>
       <p:sp>
         <p:nvSpPr>
-          <p:cNvPr id="2" name="Shape 0"/>
-          <p:cNvSpPr/>
-          <p:nvPr/>
-        </p:nvSpPr>
-        <p:spPr>
+          <p:cNvPr id="195588862" name="Shape 0"/>
+          <p:cNvSpPr/>
+          <p:nvPr/>
+        </p:nvSpPr>
+        <p:spPr bwMode="auto">
           <a:xfrm>
             <a:off x="0" y="0"/>
             <a:ext cx="14630400" cy="8229600"/>
@@ -1448,11 +1425,11 @@
       </p:sp>
       <p:sp>
         <p:nvSpPr>
-          <p:cNvPr id="3" name="Shape 1"/>
-          <p:cNvSpPr/>
-          <p:nvPr/>
-        </p:nvSpPr>
-        <p:spPr>
+          <p:cNvPr id="142735812" name="Shape 1"/>
+          <p:cNvSpPr/>
+          <p:nvPr/>
+        </p:nvSpPr>
+        <p:spPr bwMode="auto">
           <a:xfrm>
             <a:off x="0" y="0"/>
             <a:ext cx="14630400" cy="8229600"/>
@@ -1468,7 +1445,7 @@
       </p:sp>
       <p:pic>
         <p:nvPicPr>
-          <p:cNvPr id="4" name="Image 0" descr="preencoded.png">
+          <p:cNvPr id="609227457" name="Image 0" descr="preencoded.png">
             <a:hlinkClick r:id="rId2"/>
           </p:cNvPr>
           <p:cNvPicPr>
@@ -1476,16 +1453,14 @@
           </p:cNvPicPr>
           <p:nvPr/>
         </p:nvPicPr>
-        <p:blipFill>
+        <p:blipFill rotWithShape="1">
           <a:blip r:embed="rId3"/>
-          <a:stretch>
-            <a:fillRect/>
-          </a:stretch>
+          <a:stretch/>
         </p:blipFill>
-        <p:spPr>
-          <a:xfrm>
-            <a:off x="12839215" y="7749540"/>
-            <a:ext cx="1722605" cy="411480"/>
+        <p:spPr bwMode="auto">
+          <a:xfrm>
+            <a:off x="12839214" y="7749539"/>
+            <a:ext cx="1722604" cy="411480"/>
           </a:xfrm>
           <a:prstGeom prst="rect">
             <a:avLst/>
@@ -1501,7 +1476,7 @@
 </file>
 
 <file path=ppt/slideLayouts/slideLayout4.xml><?xml version="1.0" encoding="utf-8"?>
-<p:sldLayout xmlns:a="http://schemas.openxmlformats.org/drawingml/2006/main" xmlns:r="http://schemas.openxmlformats.org/officeDocument/2006/relationships" xmlns:p="http://schemas.openxmlformats.org/presentationml/2006/main" preserve="1">
+<p:sldLayout xmlns:a="http://schemas.openxmlformats.org/drawingml/2006/main" xmlns:r="http://schemas.openxmlformats.org/officeDocument/2006/relationships" xmlns:p="http://schemas.openxmlformats.org/presentationml/2006/main" xmlns:m="http://schemas.openxmlformats.org/officeDocument/2006/math" xmlns:w="http://schemas.openxmlformats.org/wordprocessingml/2006/main" matchingName="" preserve="1" showMasterPhAnim="0" showMasterSp="1" userDrawn="1">
   <p:cSld name="Slide 3 master">
     <p:spTree>
       <p:nvGrpSpPr>
@@ -1509,7 +1484,7 @@
         <p:cNvGrpSpPr/>
         <p:nvPr/>
       </p:nvGrpSpPr>
-      <p:grpSpPr>
+      <p:grpSpPr bwMode="auto">
         <a:xfrm>
           <a:off x="0" y="0"/>
           <a:ext cx="0" cy="0"/>
@@ -1519,11 +1494,11 @@
       </p:grpSpPr>
       <p:sp>
         <p:nvSpPr>
-          <p:cNvPr id="2" name="Shape 0"/>
-          <p:cNvSpPr/>
-          <p:nvPr/>
-        </p:nvSpPr>
-        <p:spPr>
+          <p:cNvPr id="1707996078" name="Shape 0"/>
+          <p:cNvSpPr/>
+          <p:nvPr/>
+        </p:nvSpPr>
+        <p:spPr bwMode="auto">
           <a:xfrm>
             <a:off x="0" y="0"/>
             <a:ext cx="14630400" cy="8229600"/>
@@ -1539,11 +1514,11 @@
       </p:sp>
       <p:sp>
         <p:nvSpPr>
-          <p:cNvPr id="3" name="Shape 1"/>
-          <p:cNvSpPr/>
-          <p:nvPr/>
-        </p:nvSpPr>
-        <p:spPr>
+          <p:cNvPr id="986022862" name="Shape 1"/>
+          <p:cNvSpPr/>
+          <p:nvPr/>
+        </p:nvSpPr>
+        <p:spPr bwMode="auto">
           <a:xfrm>
             <a:off x="0" y="0"/>
             <a:ext cx="14630400" cy="8229600"/>
@@ -1559,7 +1534,7 @@
       </p:sp>
       <p:pic>
         <p:nvPicPr>
-          <p:cNvPr id="4" name="Image 0" descr="preencoded.png">
+          <p:cNvPr id="1528169573" name="Image 0" descr="preencoded.png">
             <a:hlinkClick r:id="rId2"/>
           </p:cNvPr>
           <p:cNvPicPr>
@@ -1567,16 +1542,14 @@
           </p:cNvPicPr>
           <p:nvPr/>
         </p:nvPicPr>
-        <p:blipFill>
+        <p:blipFill rotWithShape="1">
           <a:blip r:embed="rId3"/>
-          <a:stretch>
-            <a:fillRect/>
-          </a:stretch>
+          <a:stretch/>
         </p:blipFill>
-        <p:spPr>
-          <a:xfrm>
-            <a:off x="12839215" y="7749540"/>
-            <a:ext cx="1722605" cy="411480"/>
+        <p:spPr bwMode="auto">
+          <a:xfrm>
+            <a:off x="12839214" y="7749539"/>
+            <a:ext cx="1722604" cy="411480"/>
           </a:xfrm>
           <a:prstGeom prst="rect">
             <a:avLst/>
@@ -1592,7 +1565,7 @@
 </file>
 
 <file path=ppt/slideLayouts/slideLayout5.xml><?xml version="1.0" encoding="utf-8"?>
-<p:sldLayout xmlns:a="http://schemas.openxmlformats.org/drawingml/2006/main" xmlns:r="http://schemas.openxmlformats.org/officeDocument/2006/relationships" xmlns:p="http://schemas.openxmlformats.org/presentationml/2006/main" preserve="1">
+<p:sldLayout xmlns:a="http://schemas.openxmlformats.org/drawingml/2006/main" xmlns:r="http://schemas.openxmlformats.org/officeDocument/2006/relationships" xmlns:p="http://schemas.openxmlformats.org/presentationml/2006/main" xmlns:m="http://schemas.openxmlformats.org/officeDocument/2006/math" xmlns:w="http://schemas.openxmlformats.org/wordprocessingml/2006/main" matchingName="" preserve="1" showMasterPhAnim="0" showMasterSp="1" userDrawn="1">
   <p:cSld name="Slide 4 master">
     <p:spTree>
       <p:nvGrpSpPr>
@@ -1600,7 +1573,7 @@
         <p:cNvGrpSpPr/>
         <p:nvPr/>
       </p:nvGrpSpPr>
-      <p:grpSpPr>
+      <p:grpSpPr bwMode="auto">
         <a:xfrm>
           <a:off x="0" y="0"/>
           <a:ext cx="0" cy="0"/>
@@ -1610,11 +1583,11 @@
       </p:grpSpPr>
       <p:sp>
         <p:nvSpPr>
-          <p:cNvPr id="2" name="Shape 0"/>
-          <p:cNvSpPr/>
-          <p:nvPr/>
-        </p:nvSpPr>
-        <p:spPr>
+          <p:cNvPr id="2138163857" name="Shape 0"/>
+          <p:cNvSpPr/>
+          <p:nvPr/>
+        </p:nvSpPr>
+        <p:spPr bwMode="auto">
           <a:xfrm>
             <a:off x="0" y="0"/>
             <a:ext cx="14630400" cy="8229600"/>
@@ -1630,11 +1603,11 @@
       </p:sp>
       <p:sp>
         <p:nvSpPr>
-          <p:cNvPr id="3" name="Shape 1"/>
-          <p:cNvSpPr/>
-          <p:nvPr/>
-        </p:nvSpPr>
-        <p:spPr>
+          <p:cNvPr id="1569274998" name="Shape 1"/>
+          <p:cNvSpPr/>
+          <p:nvPr/>
+        </p:nvSpPr>
+        <p:spPr bwMode="auto">
           <a:xfrm>
             <a:off x="0" y="0"/>
             <a:ext cx="14630400" cy="8229600"/>
@@ -1650,7 +1623,7 @@
       </p:sp>
       <p:pic>
         <p:nvPicPr>
-          <p:cNvPr id="4" name="Image 0" descr="preencoded.png">
+          <p:cNvPr id="2066277638" name="Image 0" descr="preencoded.png">
             <a:hlinkClick r:id="rId2"/>
           </p:cNvPr>
           <p:cNvPicPr>
@@ -1658,16 +1631,14 @@
           </p:cNvPicPr>
           <p:nvPr/>
         </p:nvPicPr>
-        <p:blipFill>
+        <p:blipFill rotWithShape="1">
           <a:blip r:embed="rId3"/>
-          <a:stretch>
-            <a:fillRect/>
-          </a:stretch>
+          <a:stretch/>
         </p:blipFill>
-        <p:spPr>
-          <a:xfrm>
-            <a:off x="12839215" y="7749540"/>
-            <a:ext cx="1722605" cy="411480"/>
+        <p:spPr bwMode="auto">
+          <a:xfrm>
+            <a:off x="12839214" y="7749539"/>
+            <a:ext cx="1722604" cy="411480"/>
           </a:xfrm>
           <a:prstGeom prst="rect">
             <a:avLst/>
@@ -1683,7 +1654,7 @@
 </file>
 
 <file path=ppt/slideLayouts/slideLayout6.xml><?xml version="1.0" encoding="utf-8"?>
-<p:sldLayout xmlns:a="http://schemas.openxmlformats.org/drawingml/2006/main" xmlns:r="http://schemas.openxmlformats.org/officeDocument/2006/relationships" xmlns:p="http://schemas.openxmlformats.org/presentationml/2006/main" preserve="1">
+<p:sldLayout xmlns:a="http://schemas.openxmlformats.org/drawingml/2006/main" xmlns:r="http://schemas.openxmlformats.org/officeDocument/2006/relationships" xmlns:p="http://schemas.openxmlformats.org/presentationml/2006/main" xmlns:m="http://schemas.openxmlformats.org/officeDocument/2006/math" xmlns:w="http://schemas.openxmlformats.org/wordprocessingml/2006/main" matchingName="" preserve="1" showMasterPhAnim="0" showMasterSp="1" userDrawn="1">
   <p:cSld name="Slide 5 master">
     <p:spTree>
       <p:nvGrpSpPr>
@@ -1691,7 +1662,7 @@
         <p:cNvGrpSpPr/>
         <p:nvPr/>
       </p:nvGrpSpPr>
-      <p:grpSpPr>
+      <p:grpSpPr bwMode="auto">
         <a:xfrm>
           <a:off x="0" y="0"/>
           <a:ext cx="0" cy="0"/>
@@ -1701,11 +1672,11 @@
       </p:grpSpPr>
       <p:sp>
         <p:nvSpPr>
-          <p:cNvPr id="2" name="Shape 0"/>
-          <p:cNvSpPr/>
-          <p:nvPr/>
-        </p:nvSpPr>
-        <p:spPr>
+          <p:cNvPr id="511427282" name="Shape 0"/>
+          <p:cNvSpPr/>
+          <p:nvPr/>
+        </p:nvSpPr>
+        <p:spPr bwMode="auto">
           <a:xfrm>
             <a:off x="0" y="0"/>
             <a:ext cx="14630400" cy="8229600"/>
@@ -1721,11 +1692,11 @@
       </p:sp>
       <p:sp>
         <p:nvSpPr>
-          <p:cNvPr id="3" name="Shape 1"/>
-          <p:cNvSpPr/>
-          <p:nvPr/>
-        </p:nvSpPr>
-        <p:spPr>
+          <p:cNvPr id="260411011" name="Shape 1"/>
+          <p:cNvSpPr/>
+          <p:nvPr/>
+        </p:nvSpPr>
+        <p:spPr bwMode="auto">
           <a:xfrm>
             <a:off x="0" y="0"/>
             <a:ext cx="14630400" cy="8229600"/>
@@ -1741,7 +1712,7 @@
       </p:sp>
       <p:pic>
         <p:nvPicPr>
-          <p:cNvPr id="4" name="Image 0" descr="preencoded.png">
+          <p:cNvPr id="2078004441" name="Image 0" descr="preencoded.png">
             <a:hlinkClick r:id="rId2"/>
           </p:cNvPr>
           <p:cNvPicPr>
@@ -1749,16 +1720,14 @@
           </p:cNvPicPr>
           <p:nvPr/>
         </p:nvPicPr>
-        <p:blipFill>
+        <p:blipFill rotWithShape="1">
           <a:blip r:embed="rId3"/>
-          <a:stretch>
-            <a:fillRect/>
-          </a:stretch>
+          <a:stretch/>
         </p:blipFill>
-        <p:spPr>
-          <a:xfrm>
-            <a:off x="12839215" y="7749540"/>
-            <a:ext cx="1722605" cy="411480"/>
+        <p:spPr bwMode="auto">
+          <a:xfrm>
+            <a:off x="12839214" y="7749539"/>
+            <a:ext cx="1722604" cy="411480"/>
           </a:xfrm>
           <a:prstGeom prst="rect">
             <a:avLst/>
@@ -1774,7 +1743,7 @@
 </file>
 
 <file path=ppt/slideLayouts/slideLayout7.xml><?xml version="1.0" encoding="utf-8"?>
-<p:sldLayout xmlns:a="http://schemas.openxmlformats.org/drawingml/2006/main" xmlns:r="http://schemas.openxmlformats.org/officeDocument/2006/relationships" xmlns:p="http://schemas.openxmlformats.org/presentationml/2006/main" preserve="1">
+<p:sldLayout xmlns:a="http://schemas.openxmlformats.org/drawingml/2006/main" xmlns:r="http://schemas.openxmlformats.org/officeDocument/2006/relationships" xmlns:p="http://schemas.openxmlformats.org/presentationml/2006/main" xmlns:m="http://schemas.openxmlformats.org/officeDocument/2006/math" xmlns:w="http://schemas.openxmlformats.org/wordprocessingml/2006/main" matchingName="" preserve="1" showMasterPhAnim="0" showMasterSp="1" userDrawn="1">
   <p:cSld name="Slide 6 master">
     <p:spTree>
       <p:nvGrpSpPr>
@@ -1782,7 +1751,7 @@
         <p:cNvGrpSpPr/>
         <p:nvPr/>
       </p:nvGrpSpPr>
-      <p:grpSpPr>
+      <p:grpSpPr bwMode="auto">
         <a:xfrm>
           <a:off x="0" y="0"/>
           <a:ext cx="0" cy="0"/>
@@ -1792,11 +1761,11 @@
       </p:grpSpPr>
       <p:sp>
         <p:nvSpPr>
-          <p:cNvPr id="2" name="Shape 0"/>
-          <p:cNvSpPr/>
-          <p:nvPr/>
-        </p:nvSpPr>
-        <p:spPr>
+          <p:cNvPr id="692544735" name="Shape 0"/>
+          <p:cNvSpPr/>
+          <p:nvPr/>
+        </p:nvSpPr>
+        <p:spPr bwMode="auto">
           <a:xfrm>
             <a:off x="0" y="0"/>
             <a:ext cx="14630400" cy="8229600"/>
@@ -1812,11 +1781,11 @@
       </p:sp>
       <p:sp>
         <p:nvSpPr>
-          <p:cNvPr id="3" name="Shape 1"/>
-          <p:cNvSpPr/>
-          <p:nvPr/>
-        </p:nvSpPr>
-        <p:spPr>
+          <p:cNvPr id="948434599" name="Shape 1"/>
+          <p:cNvSpPr/>
+          <p:nvPr/>
+        </p:nvSpPr>
+        <p:spPr bwMode="auto">
           <a:xfrm>
             <a:off x="0" y="0"/>
             <a:ext cx="14630400" cy="8229600"/>
@@ -1832,7 +1801,7 @@
       </p:sp>
       <p:pic>
         <p:nvPicPr>
-          <p:cNvPr id="4" name="Image 0" descr="preencoded.png">
+          <p:cNvPr id="438580149" name="Image 0" descr="preencoded.png">
             <a:hlinkClick r:id="rId2"/>
           </p:cNvPr>
           <p:cNvPicPr>
@@ -1840,16 +1809,14 @@
           </p:cNvPicPr>
           <p:nvPr/>
         </p:nvPicPr>
-        <p:blipFill>
+        <p:blipFill rotWithShape="1">
           <a:blip r:embed="rId3"/>
-          <a:stretch>
-            <a:fillRect/>
-          </a:stretch>
+          <a:stretch/>
         </p:blipFill>
-        <p:spPr>
-          <a:xfrm>
-            <a:off x="12839215" y="7749540"/>
-            <a:ext cx="1722605" cy="411480"/>
+        <p:spPr bwMode="auto">
+          <a:xfrm>
+            <a:off x="12839214" y="7749539"/>
+            <a:ext cx="1722604" cy="411480"/>
           </a:xfrm>
           <a:prstGeom prst="rect">
             <a:avLst/>
@@ -1865,7 +1832,7 @@
 </file>
 
 <file path=ppt/slideLayouts/slideLayout8.xml><?xml version="1.0" encoding="utf-8"?>
-<p:sldLayout xmlns:a="http://schemas.openxmlformats.org/drawingml/2006/main" xmlns:r="http://schemas.openxmlformats.org/officeDocument/2006/relationships" xmlns:p="http://schemas.openxmlformats.org/presentationml/2006/main" preserve="1">
+<p:sldLayout xmlns:a="http://schemas.openxmlformats.org/drawingml/2006/main" xmlns:r="http://schemas.openxmlformats.org/officeDocument/2006/relationships" xmlns:p="http://schemas.openxmlformats.org/presentationml/2006/main" xmlns:m="http://schemas.openxmlformats.org/officeDocument/2006/math" xmlns:w="http://schemas.openxmlformats.org/wordprocessingml/2006/main" matchingName="" preserve="1" showMasterPhAnim="0" showMasterSp="1" userDrawn="1">
   <p:cSld name="Slide 7 master">
     <p:spTree>
       <p:nvGrpSpPr>
@@ -1873,7 +1840,7 @@
         <p:cNvGrpSpPr/>
         <p:nvPr/>
       </p:nvGrpSpPr>
-      <p:grpSpPr>
+      <p:grpSpPr bwMode="auto">
         <a:xfrm>
           <a:off x="0" y="0"/>
           <a:ext cx="0" cy="0"/>
@@ -1883,11 +1850,11 @@
       </p:grpSpPr>
       <p:sp>
         <p:nvSpPr>
-          <p:cNvPr id="2" name="Shape 0"/>
-          <p:cNvSpPr/>
-          <p:nvPr/>
-        </p:nvSpPr>
-        <p:spPr>
+          <p:cNvPr id="774146328" name="Shape 0"/>
+          <p:cNvSpPr/>
+          <p:nvPr/>
+        </p:nvSpPr>
+        <p:spPr bwMode="auto">
           <a:xfrm>
             <a:off x="0" y="0"/>
             <a:ext cx="14630400" cy="8229600"/>
@@ -1903,11 +1870,11 @@
       </p:sp>
       <p:sp>
         <p:nvSpPr>
-          <p:cNvPr id="3" name="Shape 1"/>
-          <p:cNvSpPr/>
-          <p:nvPr/>
-        </p:nvSpPr>
-        <p:spPr>
+          <p:cNvPr id="740712353" name="Shape 1"/>
+          <p:cNvSpPr/>
+          <p:nvPr/>
+        </p:nvSpPr>
+        <p:spPr bwMode="auto">
           <a:xfrm>
             <a:off x="0" y="0"/>
             <a:ext cx="14630400" cy="8229600"/>
@@ -1923,7 +1890,7 @@
       </p:sp>
       <p:pic>
         <p:nvPicPr>
-          <p:cNvPr id="4" name="Image 0" descr="preencoded.png">
+          <p:cNvPr id="288241539" name="Image 0" descr="preencoded.png">
             <a:hlinkClick r:id="rId2"/>
           </p:cNvPr>
           <p:cNvPicPr>
@@ -1931,16 +1898,14 @@
           </p:cNvPicPr>
           <p:nvPr/>
         </p:nvPicPr>
-        <p:blipFill>
+        <p:blipFill rotWithShape="1">
           <a:blip r:embed="rId3"/>
-          <a:stretch>
-            <a:fillRect/>
-          </a:stretch>
+          <a:stretch/>
         </p:blipFill>
-        <p:spPr>
-          <a:xfrm>
-            <a:off x="12839215" y="7749540"/>
-            <a:ext cx="1722605" cy="411480"/>
+        <p:spPr bwMode="auto">
+          <a:xfrm>
+            <a:off x="12839214" y="7749539"/>
+            <a:ext cx="1722604" cy="411480"/>
           </a:xfrm>
           <a:prstGeom prst="rect">
             <a:avLst/>
@@ -1956,7 +1921,7 @@
 </file>
 
 <file path=ppt/slideLayouts/slideLayout9.xml><?xml version="1.0" encoding="utf-8"?>
-<p:sldLayout xmlns:a="http://schemas.openxmlformats.org/drawingml/2006/main" xmlns:r="http://schemas.openxmlformats.org/officeDocument/2006/relationships" xmlns:p="http://schemas.openxmlformats.org/presentationml/2006/main" preserve="1">
+<p:sldLayout xmlns:a="http://schemas.openxmlformats.org/drawingml/2006/main" xmlns:r="http://schemas.openxmlformats.org/officeDocument/2006/relationships" xmlns:p="http://schemas.openxmlformats.org/presentationml/2006/main" xmlns:m="http://schemas.openxmlformats.org/officeDocument/2006/math" xmlns:w="http://schemas.openxmlformats.org/wordprocessingml/2006/main" matchingName="" preserve="1" showMasterPhAnim="0" showMasterSp="1" userDrawn="1">
   <p:cSld name="Slide 8 master">
     <p:spTree>
       <p:nvGrpSpPr>
@@ -1964,7 +1929,7 @@
         <p:cNvGrpSpPr/>
         <p:nvPr/>
       </p:nvGrpSpPr>
-      <p:grpSpPr>
+      <p:grpSpPr bwMode="auto">
         <a:xfrm>
           <a:off x="0" y="0"/>
           <a:ext cx="0" cy="0"/>
@@ -1974,11 +1939,11 @@
       </p:grpSpPr>
       <p:sp>
         <p:nvSpPr>
-          <p:cNvPr id="2" name="Shape 0"/>
-          <p:cNvSpPr/>
-          <p:nvPr/>
-        </p:nvSpPr>
-        <p:spPr>
+          <p:cNvPr id="1021557217" name="Shape 0"/>
+          <p:cNvSpPr/>
+          <p:nvPr/>
+        </p:nvSpPr>
+        <p:spPr bwMode="auto">
           <a:xfrm>
             <a:off x="0" y="0"/>
             <a:ext cx="14630400" cy="8229600"/>
@@ -1994,11 +1959,11 @@
       </p:sp>
       <p:sp>
         <p:nvSpPr>
-          <p:cNvPr id="3" name="Shape 1"/>
-          <p:cNvSpPr/>
-          <p:nvPr/>
-        </p:nvSpPr>
-        <p:spPr>
+          <p:cNvPr id="1387238491" name="Shape 1"/>
+          <p:cNvSpPr/>
+          <p:nvPr/>
+        </p:nvSpPr>
+        <p:spPr bwMode="auto">
           <a:xfrm>
             <a:off x="0" y="0"/>
             <a:ext cx="14630400" cy="8229600"/>
@@ -2014,7 +1979,7 @@
       </p:sp>
       <p:pic>
         <p:nvPicPr>
-          <p:cNvPr id="4" name="Image 0" descr="preencoded.png">
+          <p:cNvPr id="1516426623" name="Image 0" descr="preencoded.png">
             <a:hlinkClick r:id="rId2"/>
           </p:cNvPr>
           <p:cNvPicPr>
@@ -2022,16 +1987,14 @@
           </p:cNvPicPr>
           <p:nvPr/>
         </p:nvPicPr>
-        <p:blipFill>
+        <p:blipFill rotWithShape="1">
           <a:blip r:embed="rId3"/>
-          <a:stretch>
-            <a:fillRect/>
-          </a:stretch>
+          <a:stretch/>
         </p:blipFill>
-        <p:spPr>
-          <a:xfrm>
-            <a:off x="12839215" y="7749540"/>
-            <a:ext cx="1722605" cy="411480"/>
+        <p:spPr bwMode="auto">
+          <a:xfrm>
+            <a:off x="12839214" y="7749539"/>
+            <a:ext cx="1722604" cy="411480"/>
           </a:xfrm>
           <a:prstGeom prst="rect">
             <a:avLst/>
@@ -2047,8 +2010,8 @@
 </file>
 
 <file path=ppt/slideMasters/slideMaster1.xml><?xml version="1.0" encoding="utf-8"?>
-<p:sldMaster xmlns:a="http://schemas.openxmlformats.org/drawingml/2006/main" xmlns:r="http://schemas.openxmlformats.org/officeDocument/2006/relationships" xmlns:p="http://schemas.openxmlformats.org/presentationml/2006/main">
-  <p:cSld>
+<p:sldMaster xmlns:a="http://schemas.openxmlformats.org/drawingml/2006/main" xmlns:r="http://schemas.openxmlformats.org/officeDocument/2006/relationships" xmlns:p="http://schemas.openxmlformats.org/presentationml/2006/main" xmlns:m="http://schemas.openxmlformats.org/officeDocument/2006/math" xmlns:w="http://schemas.openxmlformats.org/wordprocessingml/2006/main" preserve="0">
+  <p:cSld name="">
     <p:bg>
       <p:bgRef idx="1001">
         <a:schemeClr val="bg1"/>
@@ -2060,7 +2023,7 @@
         <p:cNvGrpSpPr/>
         <p:nvPr/>
       </p:nvGrpSpPr>
-      <p:grpSpPr>
+      <p:grpSpPr bwMode="auto">
         <a:xfrm>
           <a:off x="0" y="0"/>
           <a:ext cx="0" cy="0"/>
@@ -2084,15 +2047,15 @@
     <p:sldLayoutId id="2147483658" r:id="rId10"/>
     <p:sldLayoutId id="2147483659" r:id="rId11"/>
   </p:sldLayoutIdLst>
-  <p:hf sldNum="0" hdr="0" ftr="0" dt="0"/>
+  <p:hf dt="0" ftr="0" hdr="0" sldNum="0"/>
   <p:txStyles>
     <p:titleStyle>
-      <a:lvl1pPr algn="ctr" defTabSz="914400" rtl="0" eaLnBrk="1" latinLnBrk="0" hangingPunct="1">
+      <a:lvl1pPr algn="ctr" defTabSz="914400" rtl="0">
         <a:spcBef>
-          <a:spcPct val="0"/>
+          <a:spcPts val="0"/>
         </a:spcBef>
         <a:buNone/>
-        <a:defRPr sz="4400" kern="1200">
+        <a:defRPr sz="4400">
           <a:solidFill>
             <a:schemeClr val="tx1"/>
           </a:solidFill>
@@ -2103,13 +2066,13 @@
       </a:lvl1pPr>
     </p:titleStyle>
     <p:bodyStyle>
-      <a:lvl1pPr marL="342900" indent="-342900" algn="l" defTabSz="914400" rtl="0" eaLnBrk="1" latinLnBrk="0" hangingPunct="1">
+      <a:lvl1pPr marL="342900" indent="-342900" algn="l" defTabSz="914400" rtl="0">
         <a:spcBef>
-          <a:spcPct val="20000"/>
+          <a:spcPts val="0"/>
         </a:spcBef>
-        <a:buFont typeface="Arial" pitchFamily="34" charset="0"/>
+        <a:buFont typeface="Arial"/>
         <a:buChar char="•"/>
-        <a:defRPr sz="3200" kern="1200">
+        <a:defRPr sz="3200">
           <a:solidFill>
             <a:schemeClr val="tx1"/>
           </a:solidFill>
@@ -2118,13 +2081,13 @@
           <a:cs typeface="+mn-cs"/>
         </a:defRPr>
       </a:lvl1pPr>
-      <a:lvl2pPr marL="742950" indent="-285750" algn="l" defTabSz="914400" rtl="0" eaLnBrk="1" latinLnBrk="0" hangingPunct="1">
+      <a:lvl2pPr marL="742950" indent="-285750" algn="l" defTabSz="914400" rtl="0">
         <a:spcBef>
-          <a:spcPct val="20000"/>
+          <a:spcPts val="0"/>
         </a:spcBef>
-        <a:buFont typeface="Arial" pitchFamily="34" charset="0"/>
+        <a:buFont typeface="Arial"/>
         <a:buChar char="–"/>
-        <a:defRPr sz="2800" kern="1200">
+        <a:defRPr sz="2800">
           <a:solidFill>
             <a:schemeClr val="tx1"/>
           </a:solidFill>
@@ -2133,13 +2096,13 @@
           <a:cs typeface="+mn-cs"/>
         </a:defRPr>
       </a:lvl2pPr>
-      <a:lvl3pPr marL="1143000" indent="-228600" algn="l" defTabSz="914400" rtl="0" eaLnBrk="1" latinLnBrk="0" hangingPunct="1">
+      <a:lvl3pPr marL="1143000" indent="-228600" algn="l" defTabSz="914400" rtl="0">
         <a:spcBef>
-          <a:spcPct val="20000"/>
+          <a:spcPts val="0"/>
         </a:spcBef>
-        <a:buFont typeface="Arial" pitchFamily="34" charset="0"/>
+        <a:buFont typeface="Arial"/>
         <a:buChar char="•"/>
-        <a:defRPr sz="2400" kern="1200">
+        <a:defRPr sz="2400">
           <a:solidFill>
             <a:schemeClr val="tx1"/>
           </a:solidFill>
@@ -2148,13 +2111,13 @@
           <a:cs typeface="+mn-cs"/>
         </a:defRPr>
       </a:lvl3pPr>
-      <a:lvl4pPr marL="1600200" indent="-228600" algn="l" defTabSz="914400" rtl="0" eaLnBrk="1" latinLnBrk="0" hangingPunct="1">
+      <a:lvl4pPr marL="1600200" indent="-228600" algn="l" defTabSz="914400" rtl="0">
         <a:spcBef>
-          <a:spcPct val="20000"/>
+          <a:spcPts val="0"/>
         </a:spcBef>
-        <a:buFont typeface="Arial" pitchFamily="34" charset="0"/>
+        <a:buFont typeface="Arial"/>
         <a:buChar char="–"/>
-        <a:defRPr sz="2000" kern="1200">
+        <a:defRPr sz="2000">
           <a:solidFill>
             <a:schemeClr val="tx1"/>
           </a:solidFill>
@@ -2163,13 +2126,13 @@
           <a:cs typeface="+mn-cs"/>
         </a:defRPr>
       </a:lvl4pPr>
-      <a:lvl5pPr marL="2057400" indent="-228600" algn="l" defTabSz="914400" rtl="0" eaLnBrk="1" latinLnBrk="0" hangingPunct="1">
+      <a:lvl5pPr marL="2057400" indent="-228600" algn="l" defTabSz="914400" rtl="0">
         <a:spcBef>
-          <a:spcPct val="20000"/>
+          <a:spcPts val="0"/>
         </a:spcBef>
-        <a:buFont typeface="Arial" pitchFamily="34" charset="0"/>
+        <a:buFont typeface="Arial"/>
         <a:buChar char="»"/>
-        <a:defRPr sz="2000" kern="1200">
+        <a:defRPr sz="2000">
           <a:solidFill>
             <a:schemeClr val="tx1"/>
           </a:solidFill>
@@ -2178,13 +2141,13 @@
           <a:cs typeface="+mn-cs"/>
         </a:defRPr>
       </a:lvl5pPr>
-      <a:lvl6pPr marL="2514600" indent="-228600" algn="l" defTabSz="914400" rtl="0" eaLnBrk="1" latinLnBrk="0" hangingPunct="1">
+      <a:lvl6pPr marL="2514600" indent="-228600" algn="l" defTabSz="914400" rtl="0">
         <a:spcBef>
-          <a:spcPct val="20000"/>
+          <a:spcPts val="0"/>
         </a:spcBef>
-        <a:buFont typeface="Arial" pitchFamily="34" charset="0"/>
+        <a:buFont typeface="Arial"/>
         <a:buChar char="•"/>
-        <a:defRPr sz="2000" kern="1200">
+        <a:defRPr sz="2000">
           <a:solidFill>
             <a:schemeClr val="tx1"/>
           </a:solidFill>
@@ -2193,13 +2156,13 @@
           <a:cs typeface="+mn-cs"/>
         </a:defRPr>
       </a:lvl6pPr>
-      <a:lvl7pPr marL="2971800" indent="-228600" algn="l" defTabSz="914400" rtl="0" eaLnBrk="1" latinLnBrk="0" hangingPunct="1">
+      <a:lvl7pPr marL="2971800" indent="-228600" algn="l" defTabSz="914400" rtl="0">
         <a:spcBef>
-          <a:spcPct val="20000"/>
+          <a:spcPts val="0"/>
         </a:spcBef>
-        <a:buFont typeface="Arial" pitchFamily="34" charset="0"/>
+        <a:buFont typeface="Arial"/>
         <a:buChar char="•"/>
-        <a:defRPr sz="2000" kern="1200">
+        <a:defRPr sz="2000">
           <a:solidFill>
             <a:schemeClr val="tx1"/>
           </a:solidFill>
@@ -2208,13 +2171,13 @@
           <a:cs typeface="+mn-cs"/>
         </a:defRPr>
       </a:lvl7pPr>
-      <a:lvl8pPr marL="3429000" indent="-228600" algn="l" defTabSz="914400" rtl="0" eaLnBrk="1" latinLnBrk="0" hangingPunct="1">
+      <a:lvl8pPr marL="3429000" indent="-228600" algn="l" defTabSz="914400" rtl="0">
         <a:spcBef>
-          <a:spcPct val="20000"/>
+          <a:spcPts val="0"/>
         </a:spcBef>
-        <a:buFont typeface="Arial" pitchFamily="34" charset="0"/>
+        <a:buFont typeface="Arial"/>
         <a:buChar char="•"/>
-        <a:defRPr sz="2000" kern="1200">
+        <a:defRPr sz="2000">
           <a:solidFill>
             <a:schemeClr val="tx1"/>
           </a:solidFill>
@@ -2223,13 +2186,13 @@
           <a:cs typeface="+mn-cs"/>
         </a:defRPr>
       </a:lvl8pPr>
-      <a:lvl9pPr marL="3886200" indent="-228600" algn="l" defTabSz="914400" rtl="0" eaLnBrk="1" latinLnBrk="0" hangingPunct="1">
+      <a:lvl9pPr marL="3886200" indent="-228600" algn="l" defTabSz="914400" rtl="0">
         <a:spcBef>
-          <a:spcPct val="20000"/>
+          <a:spcPts val="0"/>
         </a:spcBef>
-        <a:buFont typeface="Arial" pitchFamily="34" charset="0"/>
+        <a:buFont typeface="Arial"/>
         <a:buChar char="•"/>
-        <a:defRPr sz="2000" kern="1200">
+        <a:defRPr sz="2000">
           <a:solidFill>
             <a:schemeClr val="tx1"/>
           </a:solidFill>
@@ -2243,8 +2206,8 @@
       <a:defPPr>
         <a:defRPr lang="en-US"/>
       </a:defPPr>
-      <a:lvl1pPr marL="0" algn="l" defTabSz="914400" rtl="0" eaLnBrk="1" latinLnBrk="0" hangingPunct="1">
-        <a:defRPr sz="1800" kern="1200">
+      <a:lvl1pPr marL="0" algn="l" defTabSz="914400" rtl="0">
+        <a:defRPr sz="1800">
           <a:solidFill>
             <a:schemeClr val="tx1"/>
           </a:solidFill>
@@ -2253,8 +2216,8 @@
           <a:cs typeface="+mn-cs"/>
         </a:defRPr>
       </a:lvl1pPr>
-      <a:lvl2pPr marL="457200" algn="l" defTabSz="914400" rtl="0" eaLnBrk="1" latinLnBrk="0" hangingPunct="1">
-        <a:defRPr sz="1800" kern="1200">
+      <a:lvl2pPr marL="457200" algn="l" defTabSz="914400" rtl="0">
+        <a:defRPr sz="1800">
           <a:solidFill>
             <a:schemeClr val="tx1"/>
           </a:solidFill>
@@ -2263,8 +2226,8 @@
           <a:cs typeface="+mn-cs"/>
         </a:defRPr>
       </a:lvl2pPr>
-      <a:lvl3pPr marL="914400" algn="l" defTabSz="914400" rtl="0" eaLnBrk="1" latinLnBrk="0" hangingPunct="1">
-        <a:defRPr sz="1800" kern="1200">
+      <a:lvl3pPr marL="914400" algn="l" defTabSz="914400" rtl="0">
+        <a:defRPr sz="1800">
           <a:solidFill>
             <a:schemeClr val="tx1"/>
           </a:solidFill>
@@ -2273,8 +2236,8 @@
           <a:cs typeface="+mn-cs"/>
         </a:defRPr>
       </a:lvl3pPr>
-      <a:lvl4pPr marL="1371600" algn="l" defTabSz="914400" rtl="0" eaLnBrk="1" latinLnBrk="0" hangingPunct="1">
-        <a:defRPr sz="1800" kern="1200">
+      <a:lvl4pPr marL="1371600" algn="l" defTabSz="914400" rtl="0">
+        <a:defRPr sz="1800">
           <a:solidFill>
             <a:schemeClr val="tx1"/>
           </a:solidFill>
@@ -2283,8 +2246,8 @@
           <a:cs typeface="+mn-cs"/>
         </a:defRPr>
       </a:lvl4pPr>
-      <a:lvl5pPr marL="1828800" algn="l" defTabSz="914400" rtl="0" eaLnBrk="1" latinLnBrk="0" hangingPunct="1">
-        <a:defRPr sz="1800" kern="1200">
+      <a:lvl5pPr marL="1828800" algn="l" defTabSz="914400" rtl="0">
+        <a:defRPr sz="1800">
           <a:solidFill>
             <a:schemeClr val="tx1"/>
           </a:solidFill>
@@ -2293,8 +2256,8 @@
           <a:cs typeface="+mn-cs"/>
         </a:defRPr>
       </a:lvl5pPr>
-      <a:lvl6pPr marL="2286000" algn="l" defTabSz="914400" rtl="0" eaLnBrk="1" latinLnBrk="0" hangingPunct="1">
-        <a:defRPr sz="1800" kern="1200">
+      <a:lvl6pPr marL="2286000" algn="l" defTabSz="914400" rtl="0">
+        <a:defRPr sz="1800">
           <a:solidFill>
             <a:schemeClr val="tx1"/>
           </a:solidFill>
@@ -2303,8 +2266,8 @@
           <a:cs typeface="+mn-cs"/>
         </a:defRPr>
       </a:lvl6pPr>
-      <a:lvl7pPr marL="2743200" algn="l" defTabSz="914400" rtl="0" eaLnBrk="1" latinLnBrk="0" hangingPunct="1">
-        <a:defRPr sz="1800" kern="1200">
+      <a:lvl7pPr marL="2743200" algn="l" defTabSz="914400" rtl="0">
+        <a:defRPr sz="1800">
           <a:solidFill>
             <a:schemeClr val="tx1"/>
           </a:solidFill>
@@ -2313,8 +2276,8 @@
           <a:cs typeface="+mn-cs"/>
         </a:defRPr>
       </a:lvl7pPr>
-      <a:lvl8pPr marL="3200400" algn="l" defTabSz="914400" rtl="0" eaLnBrk="1" latinLnBrk="0" hangingPunct="1">
-        <a:defRPr sz="1800" kern="1200">
+      <a:lvl8pPr marL="3200400" algn="l" defTabSz="914400" rtl="0">
+        <a:defRPr sz="1800">
           <a:solidFill>
             <a:schemeClr val="tx1"/>
           </a:solidFill>
@@ -2323,8 +2286,8 @@
           <a:cs typeface="+mn-cs"/>
         </a:defRPr>
       </a:lvl8pPr>
-      <a:lvl9pPr marL="3657600" algn="l" defTabSz="914400" rtl="0" eaLnBrk="1" latinLnBrk="0" hangingPunct="1">
-        <a:defRPr sz="1800" kern="1200">
+      <a:lvl9pPr marL="3657600" algn="l" defTabSz="914400" rtl="0">
+        <a:defRPr sz="1800">
           <a:solidFill>
             <a:schemeClr val="tx1"/>
           </a:solidFill>
@@ -2339,7 +2302,7 @@
 </file>
 
 <file path=ppt/slides/slide1.xml><?xml version="1.0" encoding="utf-8"?>
-<p:sld xmlns:a="http://schemas.openxmlformats.org/drawingml/2006/main" xmlns:r="http://schemas.openxmlformats.org/officeDocument/2006/relationships" xmlns:p="http://schemas.openxmlformats.org/presentationml/2006/main">
+<p:sld xmlns:a="http://schemas.openxmlformats.org/drawingml/2006/main" xmlns:r="http://schemas.openxmlformats.org/officeDocument/2006/relationships" xmlns:p="http://schemas.openxmlformats.org/presentationml/2006/main" xmlns:m="http://schemas.openxmlformats.org/officeDocument/2006/math" xmlns:w="http://schemas.openxmlformats.org/wordprocessingml/2006/main" xmlns:mc="http://schemas.openxmlformats.org/markup-compatibility/2006" showMasterPhAnim="0" showMasterSp="1" show="1">
   <p:cSld name="Slide 1">
     <p:spTree>
       <p:nvGrpSpPr>
@@ -2347,7 +2310,7 @@
         <p:cNvGrpSpPr/>
         <p:nvPr/>
       </p:nvGrpSpPr>
-      <p:grpSpPr>
+      <p:grpSpPr bwMode="auto">
         <a:xfrm>
           <a:off x="0" y="0"/>
           <a:ext cx="0" cy="0"/>
@@ -2357,28 +2320,20 @@
       </p:grpSpPr>
       <p:pic>
         <p:nvPicPr>
-          <p:cNvPr id="2" name="Image 0"/>
+          <p:cNvPr id="606850147" name="Image 0"/>
           <p:cNvPicPr>
             <a:picLocks noChangeAspect="1"/>
           </p:cNvPicPr>
           <p:nvPr/>
         </p:nvPicPr>
-        <p:blipFill>
-          <a:blip r:embed="rId3">
-            <a:extLst>
-              <a:ext uri="{28A0092B-C50C-407E-A947-70E740481C1C}">
-                <a14:useLocalDpi xmlns:a14="http://schemas.microsoft.com/office/drawing/2010/main" val="0"/>
-              </a:ext>
-            </a:extLst>
-          </a:blip>
-          <a:stretch>
-            <a:fillRect/>
-          </a:stretch>
+        <p:blipFill rotWithShape="1">
+          <a:blip r:embed="rId3"/>
+          <a:stretch/>
         </p:blipFill>
-        <p:spPr>
-          <a:xfrm>
-            <a:off x="8661195" y="0"/>
-            <a:ext cx="5969205" cy="8229600"/>
+        <p:spPr bwMode="auto">
+          <a:xfrm flipH="0" flipV="0">
+            <a:off x="8661195" y="-57150"/>
+            <a:ext cx="5969205" cy="8286750"/>
           </a:xfrm>
           <a:prstGeom prst="rect">
             <a:avLst/>
@@ -2387,14 +2342,14 @@
       </p:pic>
       <p:sp>
         <p:nvSpPr>
-          <p:cNvPr id="3" name="Text 0"/>
-          <p:cNvSpPr/>
-          <p:nvPr/>
-        </p:nvSpPr>
-        <p:spPr>
-          <a:xfrm>
-            <a:off x="507207" y="2636044"/>
-            <a:ext cx="8636793" cy="1570316"/>
+          <p:cNvPr id="1607786294" name="Text 0"/>
+          <p:cNvSpPr/>
+          <p:nvPr/>
+        </p:nvSpPr>
+        <p:spPr bwMode="auto">
+          <a:xfrm flipH="0" flipV="0">
+            <a:off x="413285" y="1376287"/>
+            <a:ext cx="7630013" cy="1570315"/>
           </a:xfrm>
           <a:prstGeom prst="rect">
             <a:avLst/>
@@ -2411,29 +2366,58 @@
                 <a:spcPts val="5550"/>
               </a:lnSpc>
               <a:buNone/>
-            </a:pPr>
-            <a:r>
-              <a:rPr lang="en-US" sz="5400" dirty="0">
+              <a:defRPr/>
+            </a:pPr>
+            <a:r>
+              <a:rPr lang="en-US" sz="4800">
                 <a:solidFill>
                   <a:srgbClr val="FA95AF"/>
                 </a:solidFill>
-                <a:latin typeface="Anton" pitchFamily="34" charset="0"/>
-                <a:ea typeface="Anton" pitchFamily="34" charset="-122"/>
-                <a:cs typeface="Anton" pitchFamily="34" charset="-120"/>
-              </a:rPr>
-              <a:t>The Induced Leak — Faraday's Law as a Security Threat</a:t>
-            </a:r>
-            <a:endParaRPr lang="en-US" sz="5400" dirty="0"/>
-          </a:p>
-        </p:txBody>
-      </p:sp>
-      <p:sp>
-        <p:nvSpPr>
-          <p:cNvPr id="4" name="Text 1"/>
-          <p:cNvSpPr/>
-          <p:nvPr/>
-        </p:nvSpPr>
-        <p:spPr>
+                <a:latin typeface="Anton"/>
+                <a:ea typeface="Anton"/>
+                <a:cs typeface="Anton"/>
+              </a:rPr>
+              <a:t>The Induced Leak </a:t>
+            </a:r>
+            <a:endParaRPr lang="en-US" sz="4800">
+              <a:solidFill>
+                <a:srgbClr val="FA95AF"/>
+              </a:solidFill>
+              <a:latin typeface="Anton"/>
+              <a:ea typeface="Anton"/>
+              <a:cs typeface="Anton"/>
+            </a:endParaRPr>
+          </a:p>
+          <a:p>
+            <a:pPr marL="0" indent="0" algn="l">
+              <a:lnSpc>
+                <a:spcPts val="5549"/>
+              </a:lnSpc>
+              <a:buNone/>
+              <a:defRPr/>
+            </a:pPr>
+            <a:r>
+              <a:rPr lang="en-US" sz="3600">
+                <a:solidFill>
+                  <a:srgbClr val="FA95AF"/>
+                </a:solidFill>
+                <a:latin typeface="Anton"/>
+                <a:ea typeface="Anton"/>
+                <a:cs typeface="Anton"/>
+              </a:rPr>
+              <a:t>Faraday's Law as a Security Threat</a:t>
+            </a:r>
+            <a:endParaRPr lang="en-US" sz="4800"/>
+          </a:p>
+        </p:txBody>
+      </p:sp>
+      <p:sp>
+        <p:nvSpPr>
+          <p:cNvPr id="589132048" name="Text 1"/>
+          <p:cNvSpPr/>
+          <p:nvPr/>
+        </p:nvSpPr>
+        <p:spPr bwMode="auto">
           <a:xfrm>
             <a:off x="793790" y="4206360"/>
             <a:ext cx="7556421" cy="1088708"/>
@@ -2453,19 +2437,20 @@
                 <a:spcPts val="2850"/>
               </a:lnSpc>
               <a:buNone/>
-            </a:pPr>
-            <a:r>
-              <a:rPr lang="en-US" sz="1750" dirty="0">
+              <a:defRPr/>
+            </a:pPr>
+            <a:r>
+              <a:rPr lang="en-US" sz="2000">
                 <a:solidFill>
                   <a:srgbClr val="E0D6DE"/>
                 </a:solidFill>
-                <a:latin typeface="Fira Sans" pitchFamily="34" charset="0"/>
-                <a:ea typeface="Fira Sans" pitchFamily="34" charset="-122"/>
-                <a:cs typeface="Fira Sans" pitchFamily="34" charset="-120"/>
+                <a:latin typeface="Fira Sans"/>
+                <a:ea typeface="Fira Sans"/>
+                <a:cs typeface="Fira Sans"/>
               </a:rPr>
               <a:t>How electromagnetic crosstalk leaks binary data. A concise technical walkthrough : from moving electrons to recoverable voltage pulses, and practical mitigations.</a:t>
             </a:r>
-            <a:endParaRPr lang="en-US" sz="1750" dirty="0"/>
+            <a:endParaRPr lang="en-US" sz="2000"/>
           </a:p>
         </p:txBody>
       </p:sp>
@@ -2474,6 +2459,18 @@
   <p:clrMapOvr>
     <a:masterClrMapping/>
   </p:clrMapOvr>
+  <mc:AlternateContent xmlns:mc="http://schemas.openxmlformats.org/markup-compatibility/2006">
+    <mc:Choice xmlns:p159="http://schemas.microsoft.com/office/powerpoint/2015/09/main" xmlns:p14="http://schemas.microsoft.com/office/powerpoint/2010/main" Requires="p159">
+      <p:transition spd="fast" p14:dur="500" advClick="1">
+        <p:fade thruBlk="0"/>
+      </p:transition>
+    </mc:Choice>
+    <mc:Fallback>
+      <p:transition spd="fast" advClick="1">
+        <p:fade thruBlk="0"/>
+      </p:transition>
+    </mc:Fallback>
+  </mc:AlternateContent>
   <p:timing>
     <p:tnLst>
       <p:par>
@@ -2485,7 +2482,7 @@
 </file>
 
 <file path=ppt/slides/slide10.xml><?xml version="1.0" encoding="utf-8"?>
-<p:sld xmlns:a="http://schemas.openxmlformats.org/drawingml/2006/main" xmlns:r="http://schemas.openxmlformats.org/officeDocument/2006/relationships" xmlns:p="http://schemas.openxmlformats.org/presentationml/2006/main">
+<p:sld xmlns:a="http://schemas.openxmlformats.org/drawingml/2006/main" xmlns:r="http://schemas.openxmlformats.org/officeDocument/2006/relationships" xmlns:p="http://schemas.openxmlformats.org/presentationml/2006/main" xmlns:m="http://schemas.openxmlformats.org/officeDocument/2006/math" xmlns:w="http://schemas.openxmlformats.org/wordprocessingml/2006/main" xmlns:mc="http://schemas.openxmlformats.org/markup-compatibility/2006" showMasterPhAnim="0" showMasterSp="1" show="1">
   <p:cSld name="Slide 10">
     <p:spTree>
       <p:nvGrpSpPr>
@@ -2493,7 +2490,7 @@
         <p:cNvGrpSpPr/>
         <p:nvPr/>
       </p:nvGrpSpPr>
-      <p:grpSpPr>
+      <p:grpSpPr bwMode="auto">
         <a:xfrm>
           <a:off x="0" y="0"/>
           <a:ext cx="0" cy="0"/>
@@ -2503,11 +2500,11 @@
       </p:grpSpPr>
       <p:sp>
         <p:nvSpPr>
-          <p:cNvPr id="8" name="Rectangle 7"/>
-          <p:cNvSpPr/>
-          <p:nvPr/>
-        </p:nvSpPr>
-        <p:spPr>
+          <p:cNvPr id="309922885" name="Rectangle 7"/>
+          <p:cNvSpPr/>
+          <p:nvPr/>
+        </p:nvSpPr>
+        <p:spPr bwMode="auto">
           <a:xfrm>
             <a:off x="12265819" y="7429500"/>
             <a:ext cx="2364581" cy="800100"/>
@@ -2542,32 +2539,26 @@
           <a:bodyPr rtlCol="0" anchor="ctr"/>
           <a:lstStyle/>
           <a:p>
-            <a:pPr algn="ctr"/>
+            <a:pPr algn="ctr">
+              <a:defRPr/>
+            </a:pPr>
             <a:endParaRPr lang="en-US"/>
           </a:p>
         </p:txBody>
       </p:sp>
       <p:pic>
         <p:nvPicPr>
-          <p:cNvPr id="2" name="Image 0"/>
+          <p:cNvPr id="655386609" name="Image 0"/>
           <p:cNvPicPr>
             <a:picLocks noChangeAspect="1"/>
           </p:cNvPicPr>
           <p:nvPr/>
         </p:nvPicPr>
-        <p:blipFill>
-          <a:blip r:embed="rId3">
-            <a:extLst>
-              <a:ext uri="{28A0092B-C50C-407E-A947-70E740481C1C}">
-                <a14:useLocalDpi xmlns:a14="http://schemas.microsoft.com/office/drawing/2010/main" val="0"/>
-              </a:ext>
-            </a:extLst>
-          </a:blip>
-          <a:stretch>
-            <a:fillRect/>
-          </a:stretch>
+        <p:blipFill rotWithShape="1">
+          <a:blip r:embed="rId3"/>
+          <a:stretch/>
         </p:blipFill>
-        <p:spPr>
+        <p:spPr bwMode="auto">
           <a:xfrm>
             <a:off x="9087327" y="751656"/>
             <a:ext cx="5436394" cy="6788731"/>
@@ -2593,14 +2584,14 @@
       </p:pic>
       <p:sp>
         <p:nvSpPr>
-          <p:cNvPr id="3" name="Text 0"/>
-          <p:cNvSpPr/>
-          <p:nvPr/>
-        </p:nvSpPr>
-        <p:spPr>
+          <p:cNvPr id="210144738" name="Text 0"/>
+          <p:cNvSpPr/>
+          <p:nvPr/>
+        </p:nvSpPr>
+        <p:spPr bwMode="auto">
           <a:xfrm>
             <a:off x="793790" y="1781532"/>
-            <a:ext cx="7109579" cy="566976"/>
+            <a:ext cx="7109578" cy="566976"/>
           </a:xfrm>
           <a:prstGeom prst="rect">
             <a:avLst/>
@@ -2617,29 +2608,30 @@
                 <a:spcPts val="4450"/>
               </a:lnSpc>
               <a:buNone/>
-            </a:pPr>
-            <a:r>
-              <a:rPr lang="en-US" sz="3550" dirty="0">
+              <a:defRPr/>
+            </a:pPr>
+            <a:r>
+              <a:rPr lang="en-US" sz="3550">
                 <a:solidFill>
                   <a:srgbClr val="FA95AF"/>
                 </a:solidFill>
-                <a:latin typeface="Anton" pitchFamily="34" charset="0"/>
-                <a:ea typeface="Anton" pitchFamily="34" charset="-122"/>
-                <a:cs typeface="Anton" pitchFamily="34" charset="-120"/>
+                <a:latin typeface="Anton"/>
+                <a:ea typeface="Anton"/>
+                <a:cs typeface="Anton"/>
               </a:rPr>
               <a:t>Summary — Physics is the Vulnerability</a:t>
             </a:r>
-            <a:endParaRPr lang="en-US" sz="3550" dirty="0"/>
-          </a:p>
-        </p:txBody>
-      </p:sp>
-      <p:sp>
-        <p:nvSpPr>
-          <p:cNvPr id="4" name="Text 1"/>
-          <p:cNvSpPr/>
-          <p:nvPr/>
-        </p:nvSpPr>
-        <p:spPr>
+            <a:endParaRPr lang="en-US" sz="3550"/>
+          </a:p>
+        </p:txBody>
+      </p:sp>
+      <p:sp>
+        <p:nvSpPr>
+          <p:cNvPr id="1262864889" name="Text 1"/>
+          <p:cNvSpPr/>
+          <p:nvPr/>
+        </p:nvSpPr>
+        <p:spPr bwMode="auto">
           <a:xfrm>
             <a:off x="793790" y="2688669"/>
             <a:ext cx="7556421" cy="1814513"/>
@@ -2659,29 +2651,30 @@
                 <a:spcPts val="2850"/>
               </a:lnSpc>
               <a:buNone/>
-            </a:pPr>
-            <a:r>
-              <a:rPr lang="en-US" sz="1750" dirty="0">
+              <a:defRPr/>
+            </a:pPr>
+            <a:r>
+              <a:rPr lang="en-US" sz="1750">
                 <a:solidFill>
                   <a:srgbClr val="E0D6DE"/>
                 </a:solidFill>
-                <a:latin typeface="Fira Sans" pitchFamily="34" charset="0"/>
-                <a:ea typeface="Fira Sans" pitchFamily="34" charset="-122"/>
-                <a:cs typeface="Fira Sans" pitchFamily="34" charset="-120"/>
+                <a:latin typeface="Fira Sans"/>
+                <a:ea typeface="Fira Sans"/>
+                <a:cs typeface="Fira Sans"/>
               </a:rPr>
               <a:t>Chain of leakage: I → B → Φ → e. Every fast bit transition can create an induced electromagnetic pulse on nearby conductors. Mutual inductance M couples cables; an attacker with access to Cable B can recover Cable A's data passively. Mitigation requires physical and signal‑level controls — twisted pairs, shielding, spacing, and edge control.</a:t>
             </a:r>
-            <a:endParaRPr lang="en-US" sz="1750" dirty="0"/>
-          </a:p>
-        </p:txBody>
-      </p:sp>
-      <p:sp>
-        <p:nvSpPr>
-          <p:cNvPr id="5" name="Shape 2"/>
-          <p:cNvSpPr/>
-          <p:nvPr/>
-        </p:nvSpPr>
-        <p:spPr>
+            <a:endParaRPr lang="en-US" sz="1750"/>
+          </a:p>
+        </p:txBody>
+      </p:sp>
+      <p:sp>
+        <p:nvSpPr>
+          <p:cNvPr id="1404579694" name="Shape 2"/>
+          <p:cNvSpPr/>
+          <p:nvPr/>
+        </p:nvSpPr>
+        <p:spPr bwMode="auto">
           <a:xfrm>
             <a:off x="793790" y="4758333"/>
             <a:ext cx="7556421" cy="1689616"/>
@@ -2699,19 +2692,17 @@
       </p:sp>
       <p:pic>
         <p:nvPicPr>
-          <p:cNvPr id="6" name="Image 1" descr="preencoded.png"/>
+          <p:cNvPr id="1535969607" name="Image 1" descr="preencoded.png"/>
           <p:cNvPicPr>
             <a:picLocks noChangeAspect="1"/>
           </p:cNvPicPr>
           <p:nvPr/>
         </p:nvPicPr>
-        <p:blipFill>
+        <p:blipFill rotWithShape="1">
           <a:blip r:embed="rId4"/>
-          <a:stretch>
-            <a:fillRect/>
-          </a:stretch>
+          <a:stretch/>
         </p:blipFill>
-        <p:spPr>
+        <p:spPr bwMode="auto">
           <a:xfrm>
             <a:off x="1020604" y="5094803"/>
             <a:ext cx="283488" cy="226814"/>
@@ -2723,11 +2714,11 @@
       </p:pic>
       <p:sp>
         <p:nvSpPr>
-          <p:cNvPr id="7" name="Text 3"/>
-          <p:cNvSpPr/>
-          <p:nvPr/>
-        </p:nvSpPr>
-        <p:spPr>
+          <p:cNvPr id="667240764" name="Text 3"/>
+          <p:cNvSpPr/>
+          <p:nvPr/>
+        </p:nvSpPr>
+        <p:spPr bwMode="auto">
           <a:xfrm>
             <a:off x="1530906" y="5041821"/>
             <a:ext cx="6592491" cy="1088708"/>
@@ -2747,19 +2738,20 @@
                 <a:spcPts val="2850"/>
               </a:lnSpc>
               <a:buNone/>
-            </a:pPr>
-            <a:r>
-              <a:rPr lang="en-US" sz="1750" dirty="0">
+              <a:defRPr/>
+            </a:pPr>
+            <a:r>
+              <a:rPr lang="en-US" sz="1750">
                 <a:solidFill>
                   <a:srgbClr val="FFFFFF"/>
                 </a:solidFill>
-                <a:latin typeface="Fira Sans" pitchFamily="34" charset="0"/>
-                <a:ea typeface="Fira Sans" pitchFamily="34" charset="-122"/>
-                <a:cs typeface="Fira Sans" pitchFamily="34" charset="-120"/>
+                <a:latin typeface="Fira Sans"/>
+                <a:ea typeface="Fira Sans"/>
+                <a:cs typeface="Fira Sans"/>
               </a:rPr>
               <a:t>Action item: review cabling topology and signal slew rates for high‑risk systems; prioritise physical isolation and shielding for classified links.</a:t>
             </a:r>
-            <a:endParaRPr lang="en-US" sz="1750" dirty="0"/>
+            <a:endParaRPr lang="en-US" sz="1750"/>
           </a:p>
         </p:txBody>
       </p:sp>
@@ -2768,6 +2760,18 @@
   <p:clrMapOvr>
     <a:masterClrMapping/>
   </p:clrMapOvr>
+  <mc:AlternateContent xmlns:mc="http://schemas.openxmlformats.org/markup-compatibility/2006">
+    <mc:Choice xmlns:p159="http://schemas.microsoft.com/office/powerpoint/2015/09/main" xmlns:p14="http://schemas.microsoft.com/office/powerpoint/2010/main" Requires="p159">
+      <p:transition spd="fast" p14:dur="500" advClick="1">
+        <p:fade thruBlk="0"/>
+      </p:transition>
+    </mc:Choice>
+    <mc:Fallback>
+      <p:transition spd="fast" advClick="1">
+        <p:fade thruBlk="0"/>
+      </p:transition>
+    </mc:Fallback>
+  </mc:AlternateContent>
   <p:timing>
     <p:tnLst>
       <p:par>
@@ -2779,7 +2783,7 @@
 </file>
 
 <file path=ppt/slides/slide2.xml><?xml version="1.0" encoding="utf-8"?>
-<p:sld xmlns:a="http://schemas.openxmlformats.org/drawingml/2006/main" xmlns:r="http://schemas.openxmlformats.org/officeDocument/2006/relationships" xmlns:p="http://schemas.openxmlformats.org/presentationml/2006/main">
+<p:sld xmlns:a="http://schemas.openxmlformats.org/drawingml/2006/main" xmlns:r="http://schemas.openxmlformats.org/officeDocument/2006/relationships" xmlns:p="http://schemas.openxmlformats.org/presentationml/2006/main" xmlns:m="http://schemas.openxmlformats.org/officeDocument/2006/math" xmlns:w="http://schemas.openxmlformats.org/wordprocessingml/2006/main" xmlns:mc="http://schemas.openxmlformats.org/markup-compatibility/2006" showMasterPhAnim="0" showMasterSp="1" show="1">
   <p:cSld name="Slide 2">
     <p:spTree>
       <p:nvGrpSpPr>
@@ -2787,7 +2791,7 @@
         <p:cNvGrpSpPr/>
         <p:nvPr/>
       </p:nvGrpSpPr>
-      <p:grpSpPr>
+      <p:grpSpPr bwMode="auto">
         <a:xfrm>
           <a:off x="0" y="0"/>
           <a:ext cx="0" cy="0"/>
@@ -2797,25 +2801,17 @@
       </p:grpSpPr>
       <p:pic>
         <p:nvPicPr>
-          <p:cNvPr id="2" name="Image 0"/>
+          <p:cNvPr id="1097043633" name="Image 0"/>
           <p:cNvPicPr>
             <a:picLocks noChangeAspect="1"/>
           </p:cNvPicPr>
           <p:nvPr/>
         </p:nvPicPr>
-        <p:blipFill>
-          <a:blip r:embed="rId3">
-            <a:extLst>
-              <a:ext uri="{28A0092B-C50C-407E-A947-70E740481C1C}">
-                <a14:useLocalDpi xmlns:a14="http://schemas.microsoft.com/office/drawing/2010/main" val="0"/>
-              </a:ext>
-            </a:extLst>
-          </a:blip>
-          <a:stretch>
-            <a:fillRect/>
-          </a:stretch>
+        <p:blipFill rotWithShape="1">
+          <a:blip r:embed="rId3"/>
+          <a:stretch/>
         </p:blipFill>
-        <p:spPr>
+        <p:spPr bwMode="auto">
           <a:xfrm>
             <a:off x="8493919" y="0"/>
             <a:ext cx="6136481" cy="8229599"/>
@@ -2827,14 +2823,14 @@
       </p:pic>
       <p:sp>
         <p:nvSpPr>
-          <p:cNvPr id="3" name="Text 0"/>
-          <p:cNvSpPr/>
-          <p:nvPr/>
-        </p:nvSpPr>
-        <p:spPr>
-          <a:xfrm>
-            <a:off x="793790" y="1791414"/>
-            <a:ext cx="5015270" cy="566976"/>
+          <p:cNvPr id="1576726823" name="Text 0"/>
+          <p:cNvSpPr/>
+          <p:nvPr/>
+        </p:nvSpPr>
+        <p:spPr bwMode="auto">
+          <a:xfrm flipH="0" flipV="0">
+            <a:off x="603289" y="1696163"/>
+            <a:ext cx="5592159" cy="566975"/>
           </a:xfrm>
           <a:prstGeom prst="rect">
             <a:avLst/>
@@ -2843,7 +2839,7 @@
           <a:ln/>
         </p:spPr>
         <p:txBody>
-          <a:bodyPr wrap="none" lIns="0" tIns="0" rIns="0" bIns="0" rtlCol="0" anchor="t"/>
+          <a:bodyPr wrap="square" lIns="0" tIns="0" rIns="0" bIns="0" rtlCol="0" anchor="t"/>
           <a:lstStyle/>
           <a:p>
             <a:pPr marL="0" indent="0" algn="l">
@@ -2851,31 +2847,32 @@
                 <a:spcPts val="4450"/>
               </a:lnSpc>
               <a:buNone/>
-            </a:pPr>
-            <a:r>
-              <a:rPr lang="en-US" sz="3550" dirty="0">
+              <a:defRPr/>
+            </a:pPr>
+            <a:r>
+              <a:rPr lang="en-US" sz="3550">
                 <a:solidFill>
                   <a:srgbClr val="FA95AF"/>
                 </a:solidFill>
-                <a:latin typeface="Anton" pitchFamily="34" charset="0"/>
-                <a:ea typeface="Anton" pitchFamily="34" charset="-122"/>
-                <a:cs typeface="Anton" pitchFamily="34" charset="-120"/>
+                <a:latin typeface="Anton"/>
+                <a:ea typeface="Anton"/>
+                <a:cs typeface="Anton"/>
               </a:rPr>
               <a:t>Current &amp; Its Magnetic Field</a:t>
             </a:r>
-            <a:endParaRPr lang="en-US" sz="3550" dirty="0"/>
-          </a:p>
-        </p:txBody>
-      </p:sp>
-      <p:sp>
-        <p:nvSpPr>
-          <p:cNvPr id="4" name="Text 1"/>
-          <p:cNvSpPr/>
-          <p:nvPr/>
-        </p:nvSpPr>
-        <p:spPr>
-          <a:xfrm>
-            <a:off x="793790" y="2698552"/>
+            <a:endParaRPr lang="en-US" sz="3550"/>
+          </a:p>
+        </p:txBody>
+      </p:sp>
+      <p:sp>
+        <p:nvSpPr>
+          <p:cNvPr id="730631855" name="Text 1"/>
+          <p:cNvSpPr/>
+          <p:nvPr/>
+        </p:nvSpPr>
+        <p:spPr bwMode="auto">
+          <a:xfrm>
+            <a:off x="603289" y="2603301"/>
             <a:ext cx="7556421" cy="1088708"/>
           </a:xfrm>
           <a:prstGeom prst="rect">
@@ -2893,31 +2890,32 @@
                 <a:spcPts val="2850"/>
               </a:lnSpc>
               <a:buNone/>
-            </a:pPr>
-            <a:r>
-              <a:rPr lang="en-US" sz="1750" dirty="0">
+              <a:defRPr/>
+            </a:pPr>
+            <a:r>
+              <a:rPr lang="en-US" sz="1750">
                 <a:solidFill>
                   <a:srgbClr val="E0D6DE"/>
                 </a:solidFill>
-                <a:latin typeface="Fira Sans" pitchFamily="34" charset="0"/>
-                <a:ea typeface="Fira Sans" pitchFamily="34" charset="-122"/>
-                <a:cs typeface="Fira Sans" pitchFamily="34" charset="-120"/>
+                <a:latin typeface="Fira Sans"/>
+                <a:ea typeface="Fira Sans"/>
+                <a:cs typeface="Fira Sans"/>
               </a:rPr>
               <a:t>Electric current is a flow of charges. Any moving charge produces a magnetic field encircling the conductor (Ampère's Law). Field strength scales with current and decays with radial distance.</a:t>
             </a:r>
-            <a:endParaRPr lang="en-US" sz="1750" dirty="0"/>
-          </a:p>
-        </p:txBody>
-      </p:sp>
-      <p:sp>
-        <p:nvSpPr>
-          <p:cNvPr id="5" name="Shape 2"/>
-          <p:cNvSpPr/>
-          <p:nvPr/>
-        </p:nvSpPr>
-        <p:spPr>
-          <a:xfrm>
-            <a:off x="793790" y="4042410"/>
+            <a:endParaRPr lang="en-US" sz="1750"/>
+          </a:p>
+        </p:txBody>
+      </p:sp>
+      <p:sp>
+        <p:nvSpPr>
+          <p:cNvPr id="260669889" name="Shape 2"/>
+          <p:cNvSpPr/>
+          <p:nvPr/>
+        </p:nvSpPr>
+        <p:spPr bwMode="auto">
+          <a:xfrm>
+            <a:off x="603289" y="3947159"/>
             <a:ext cx="3664744" cy="2395657"/>
           </a:xfrm>
           <a:prstGeom prst="roundRect">
@@ -2933,14 +2931,14 @@
       </p:sp>
       <p:sp>
         <p:nvSpPr>
-          <p:cNvPr id="6" name="Text 3"/>
-          <p:cNvSpPr/>
-          <p:nvPr/>
-        </p:nvSpPr>
-        <p:spPr>
-          <a:xfrm>
-            <a:off x="1020604" y="4269224"/>
-            <a:ext cx="2835235" cy="354330"/>
+          <p:cNvPr id="1696328174" name="Text 3"/>
+          <p:cNvSpPr/>
+          <p:nvPr/>
+        </p:nvSpPr>
+        <p:spPr bwMode="auto">
+          <a:xfrm flipH="0" flipV="0">
+            <a:off x="753903" y="4253507"/>
+            <a:ext cx="1605557" cy="549592"/>
           </a:xfrm>
           <a:prstGeom prst="rect">
             <a:avLst/>
@@ -2949,7 +2947,7 @@
           <a:ln/>
         </p:spPr>
         <p:txBody>
-          <a:bodyPr wrap="none" lIns="0" tIns="0" rIns="0" bIns="0" rtlCol="0" anchor="t"/>
+          <a:bodyPr wrap="square" lIns="0" tIns="0" rIns="0" bIns="0" rtlCol="0" anchor="t"/>
           <a:lstStyle/>
           <a:p>
             <a:pPr marL="0" indent="0" algn="l">
@@ -2957,31 +2955,139 @@
                 <a:spcPts val="2750"/>
               </a:lnSpc>
               <a:buNone/>
-            </a:pPr>
-            <a:r>
-              <a:rPr lang="en-US" sz="2200" dirty="0">
-                <a:solidFill>
-                  <a:srgbClr val="E0D6DE"/>
-                </a:solidFill>
-                <a:latin typeface="Anton" pitchFamily="34" charset="0"/>
-                <a:ea typeface="Anton" pitchFamily="34" charset="-122"/>
-                <a:cs typeface="Anton" pitchFamily="34" charset="-120"/>
-              </a:rPr>
-              <a:t>B = μ₀ I / (2π r)</a:t>
-            </a:r>
-            <a:endParaRPr lang="en-US" sz="2200" dirty="0"/>
-          </a:p>
-        </p:txBody>
-      </p:sp>
-      <p:sp>
-        <p:nvSpPr>
-          <p:cNvPr id="7" name="Text 4"/>
-          <p:cNvSpPr/>
-          <p:nvPr/>
-        </p:nvSpPr>
-        <p:spPr>
-          <a:xfrm>
-            <a:off x="1020604" y="4759643"/>
+              <a:defRPr/>
+            </a:pPr>
+            <mc:AlternateContent xmlns:mc="http://schemas.openxmlformats.org/markup-compatibility/2006" xmlns:m="http://schemas.openxmlformats.org/officeDocument/2006/math">
+              <mc:Choice xmlns:a14="http://schemas.microsoft.com/office/drawing/2010/main" Requires="a14">
+                <a14:m>
+                  <m:oMathPara>
+                    <m:oMathParaPr/>
+                    <m:oMath>
+                      <m:r>
+                        <m:rPr>
+                          <m:sty m:val="p"/>
+                        </m:rPr>
+                        <a:rPr lang="en-US" sz="2400" u="none" strike="noStrike" cap="none" spc="0">
+                          <a:solidFill>
+                            <a:srgbClr val="E0D6DE"/>
+                          </a:solidFill>
+                          <a:latin typeface="Cambria Math"/>
+                          <a:ea typeface="Cambria Math"/>
+                          <a:cs typeface="Cambria Math"/>
+                        </a:rPr>
+                        <m:t>B= </m:t>
+                      </m:r>
+                      <m:f>
+                        <m:fPr>
+                          <m:ctrlPr>
+                            <a:rPr lang="en-US" sz="2400" b="0" i="1" u="none" strike="noStrike" cap="none" spc="0">
+                              <a:solidFill>
+                                <a:srgbClr val="E0D6DE"/>
+                              </a:solidFill>
+                              <a:latin typeface="Cambria Math"/>
+                              <a:ea typeface="Cambria Math"/>
+                              <a:cs typeface="Cambria Math"/>
+                            </a:rPr>
+                          </m:ctrlPr>
+                        </m:fPr>
+                        <m:num>
+                          <m:sSub>
+                            <m:sSubPr>
+                              <m:ctrlPr>
+                                <a:rPr lang="en-US" sz="2400" b="0" i="1" u="none" strike="noStrike" cap="none" spc="0">
+                                  <a:solidFill>
+                                    <a:srgbClr val="E0D6DE"/>
+                                  </a:solidFill>
+                                  <a:latin typeface="Cambria Math"/>
+                                  <a:ea typeface="Cambria Math"/>
+                                  <a:cs typeface="Cambria Math"/>
+                                </a:rPr>
+                              </m:ctrlPr>
+                            </m:sSubPr>
+                            <m:e>
+                              <m:r>
+                                <m:rPr>
+                                  <m:sty m:val="i"/>
+                                </m:rPr>
+                                <a:rPr lang="en-US" sz="2400" u="none" strike="noStrike" cap="none" spc="0">
+                                  <a:solidFill>
+                                    <a:srgbClr val="E0D6DE"/>
+                                  </a:solidFill>
+                                  <a:latin typeface="Cambria Math"/>
+                                  <a:ea typeface="Cambria Math"/>
+                                  <a:cs typeface="Cambria Math"/>
+                                </a:rPr>
+                                <m:t>μ</m:t>
+                              </m:r>
+                            </m:e>
+                            <m:sub>
+                              <m:r>
+                                <m:rPr>
+                                  <m:sty m:val="i"/>
+                                </m:rPr>
+                                <a:rPr lang="en-US" sz="2400" u="none" strike="noStrike" cap="none" spc="0">
+                                  <a:solidFill>
+                                    <a:srgbClr val="E0D6DE"/>
+                                  </a:solidFill>
+                                  <a:latin typeface="Cambria Math"/>
+                                  <a:ea typeface="Cambria Math"/>
+                                  <a:cs typeface="Cambria Math"/>
+                                </a:rPr>
+                                <m:t>0</m:t>
+                              </m:r>
+                            </m:sub>
+                          </m:sSub>
+                          <m:r>
+                            <m:rPr>
+                              <m:sty m:val="i"/>
+                            </m:rPr>
+                            <a:rPr lang="en-US" sz="2400" u="none" strike="noStrike" cap="none" spc="0">
+                              <a:solidFill>
+                                <a:srgbClr val="E0D6DE"/>
+                              </a:solidFill>
+                              <a:latin typeface="Cambria Math"/>
+                              <a:ea typeface="Cambria Math"/>
+                              <a:cs typeface="Cambria Math"/>
+                            </a:rPr>
+                            <m:t>I</m:t>
+                          </m:r>
+                        </m:num>
+                        <m:den>
+                          <m:r>
+                            <m:rPr>
+                              <m:sty m:val="i"/>
+                            </m:rPr>
+                            <a:rPr lang="en-US" sz="2400" u="none" strike="noStrike" cap="none" spc="0">
+                              <a:solidFill>
+                                <a:srgbClr val="E0D6DE"/>
+                              </a:solidFill>
+                              <a:latin typeface="Cambria Math"/>
+                              <a:ea typeface="Cambria Math"/>
+                              <a:cs typeface="Cambria Math"/>
+                            </a:rPr>
+                            <m:t>2R</m:t>
+                          </m:r>
+                        </m:den>
+                      </m:f>
+                    </m:oMath>
+                  </m:oMathPara>
+                </a14:m>
+              </mc:Choice>
+              <mc:Fallback/>
+            </mc:AlternateContent>
+            <a:endParaRPr lang="en-US" sz="2400"/>
+          </a:p>
+        </p:txBody>
+      </p:sp>
+      <p:sp>
+        <p:nvSpPr>
+          <p:cNvPr id="2120577343" name="Text 4"/>
+          <p:cNvSpPr/>
+          <p:nvPr/>
+        </p:nvSpPr>
+        <p:spPr bwMode="auto">
+          <a:xfrm>
+            <a:off x="830103" y="4845843"/>
             <a:ext cx="3211116" cy="1088708"/>
           </a:xfrm>
           <a:prstGeom prst="rect">
@@ -2999,31 +3105,32 @@
                 <a:spcPts val="2850"/>
               </a:lnSpc>
               <a:buNone/>
-            </a:pPr>
-            <a:r>
-              <a:rPr lang="en-US" sz="1750" dirty="0">
+              <a:defRPr/>
+            </a:pPr>
+            <a:r>
+              <a:rPr lang="en-US" sz="1750">
                 <a:solidFill>
                   <a:srgbClr val="E0D6DE"/>
                 </a:solidFill>
-                <a:latin typeface="Fira Sans" pitchFamily="34" charset="0"/>
-                <a:ea typeface="Fira Sans" pitchFamily="34" charset="-122"/>
-                <a:cs typeface="Fira Sans" pitchFamily="34" charset="-120"/>
+                <a:latin typeface="Fira Sans"/>
+                <a:ea typeface="Fira Sans"/>
+                <a:cs typeface="Fira Sans"/>
               </a:rPr>
               <a:t>Magnetic flux density B around a long straight wire — inverse proportion to distance r.</a:t>
             </a:r>
-            <a:endParaRPr lang="en-US" sz="1750" dirty="0"/>
-          </a:p>
-        </p:txBody>
-      </p:sp>
-      <p:sp>
-        <p:nvSpPr>
-          <p:cNvPr id="8" name="Shape 5"/>
-          <p:cNvSpPr/>
-          <p:nvPr/>
-        </p:nvSpPr>
-        <p:spPr>
-          <a:xfrm>
-            <a:off x="4685348" y="4042410"/>
+            <a:endParaRPr lang="en-US" sz="1750"/>
+          </a:p>
+        </p:txBody>
+      </p:sp>
+      <p:sp>
+        <p:nvSpPr>
+          <p:cNvPr id="1243555627" name="Shape 5"/>
+          <p:cNvSpPr/>
+          <p:nvPr/>
+        </p:nvSpPr>
+        <p:spPr bwMode="auto">
+          <a:xfrm>
+            <a:off x="4494847" y="3947159"/>
             <a:ext cx="3664863" cy="2395657"/>
           </a:xfrm>
           <a:prstGeom prst="roundRect">
@@ -3039,13 +3146,13 @@
       </p:sp>
       <p:sp>
         <p:nvSpPr>
-          <p:cNvPr id="9" name="Text 6"/>
-          <p:cNvSpPr/>
-          <p:nvPr/>
-        </p:nvSpPr>
-        <p:spPr>
-          <a:xfrm>
-            <a:off x="4912162" y="4269224"/>
+          <p:cNvPr id="2131639417" name="Text 6"/>
+          <p:cNvSpPr/>
+          <p:nvPr/>
+        </p:nvSpPr>
+        <p:spPr bwMode="auto">
+          <a:xfrm>
+            <a:off x="4721661" y="4173973"/>
             <a:ext cx="2835235" cy="354330"/>
           </a:xfrm>
           <a:prstGeom prst="rect">
@@ -3063,31 +3170,32 @@
                 <a:spcPts val="2750"/>
               </a:lnSpc>
               <a:buNone/>
-            </a:pPr>
-            <a:r>
-              <a:rPr lang="en-US" sz="2200" dirty="0">
+              <a:defRPr/>
+            </a:pPr>
+            <a:r>
+              <a:rPr lang="en-US" sz="2200">
                 <a:solidFill>
                   <a:srgbClr val="E0D6DE"/>
                 </a:solidFill>
-                <a:latin typeface="Anton" pitchFamily="34" charset="0"/>
-                <a:ea typeface="Anton" pitchFamily="34" charset="-122"/>
-                <a:cs typeface="Anton" pitchFamily="34" charset="-120"/>
+                <a:latin typeface="Anton"/>
+                <a:ea typeface="Anton"/>
+                <a:cs typeface="Anton"/>
               </a:rPr>
               <a:t>Design takeaway</a:t>
             </a:r>
-            <a:endParaRPr lang="en-US" sz="2200" dirty="0"/>
-          </a:p>
-        </p:txBody>
-      </p:sp>
-      <p:sp>
-        <p:nvSpPr>
-          <p:cNvPr id="10" name="Text 7"/>
-          <p:cNvSpPr/>
-          <p:nvPr/>
-        </p:nvSpPr>
-        <p:spPr>
-          <a:xfrm>
-            <a:off x="4912162" y="4759643"/>
+            <a:endParaRPr lang="en-US" sz="2200"/>
+          </a:p>
+        </p:txBody>
+      </p:sp>
+      <p:sp>
+        <p:nvSpPr>
+          <p:cNvPr id="889100838" name="Text 7"/>
+          <p:cNvSpPr/>
+          <p:nvPr/>
+        </p:nvSpPr>
+        <p:spPr bwMode="auto">
+          <a:xfrm>
+            <a:off x="4721661" y="4664392"/>
             <a:ext cx="3211235" cy="1451610"/>
           </a:xfrm>
           <a:prstGeom prst="rect">
@@ -3105,19 +3213,20 @@
                 <a:spcPts val="2850"/>
               </a:lnSpc>
               <a:buNone/>
-            </a:pPr>
-            <a:r>
-              <a:rPr lang="en-US" sz="1750" dirty="0">
+              <a:defRPr/>
+            </a:pPr>
+            <a:r>
+              <a:rPr lang="en-US" sz="1750">
                 <a:solidFill>
                   <a:srgbClr val="E0D6DE"/>
                 </a:solidFill>
-                <a:latin typeface="Fira Sans" pitchFamily="34" charset="0"/>
-                <a:ea typeface="Fira Sans" pitchFamily="34" charset="-122"/>
-                <a:cs typeface="Fira Sans" pitchFamily="34" charset="-120"/>
+                <a:latin typeface="Fira Sans"/>
+                <a:ea typeface="Fira Sans"/>
+                <a:cs typeface="Fira Sans"/>
               </a:rPr>
               <a:t>Higher currents and closer proximities increase off‑wire magnetic field intensity and leakage risk.</a:t>
             </a:r>
-            <a:endParaRPr lang="en-US" sz="1750" dirty="0"/>
+            <a:endParaRPr lang="en-US" sz="1750"/>
           </a:p>
         </p:txBody>
       </p:sp>
@@ -3126,6 +3235,18 @@
   <p:clrMapOvr>
     <a:masterClrMapping/>
   </p:clrMapOvr>
+  <mc:AlternateContent xmlns:mc="http://schemas.openxmlformats.org/markup-compatibility/2006">
+    <mc:Choice xmlns:p159="http://schemas.microsoft.com/office/powerpoint/2015/09/main" xmlns:p14="http://schemas.microsoft.com/office/powerpoint/2010/main" Requires="p159">
+      <p:transition spd="fast" p14:dur="500" advClick="1">
+        <p:fade thruBlk="0"/>
+      </p:transition>
+    </mc:Choice>
+    <mc:Fallback>
+      <p:transition spd="fast" advClick="1">
+        <p:fade thruBlk="0"/>
+      </p:transition>
+    </mc:Fallback>
+  </mc:AlternateContent>
   <p:timing>
     <p:tnLst>
       <p:par>
@@ -3137,7 +3258,7 @@
 </file>
 
 <file path=ppt/slides/slide3.xml><?xml version="1.0" encoding="utf-8"?>
-<p:sld xmlns:a="http://schemas.openxmlformats.org/drawingml/2006/main" xmlns:r="http://schemas.openxmlformats.org/officeDocument/2006/relationships" xmlns:p="http://schemas.openxmlformats.org/presentationml/2006/main">
+<p:sld xmlns:a="http://schemas.openxmlformats.org/drawingml/2006/main" xmlns:r="http://schemas.openxmlformats.org/officeDocument/2006/relationships" xmlns:p="http://schemas.openxmlformats.org/presentationml/2006/main" xmlns:m="http://schemas.openxmlformats.org/officeDocument/2006/math" xmlns:w="http://schemas.openxmlformats.org/wordprocessingml/2006/main" xmlns:mc="http://schemas.openxmlformats.org/markup-compatibility/2006" showMasterPhAnim="0" showMasterSp="1" show="1">
   <p:cSld name="Slide 3">
     <p:spTree>
       <p:nvGrpSpPr>
@@ -3145,7 +3266,7 @@
         <p:cNvGrpSpPr/>
         <p:nvPr/>
       </p:nvGrpSpPr>
-      <p:grpSpPr>
+      <p:grpSpPr bwMode="auto">
         <a:xfrm>
           <a:off x="0" y="0"/>
           <a:ext cx="0" cy="0"/>
@@ -3155,25 +3276,17 @@
       </p:grpSpPr>
       <p:pic>
         <p:nvPicPr>
-          <p:cNvPr id="2" name="Image 0"/>
+          <p:cNvPr id="479446519" name="Image 0"/>
           <p:cNvPicPr>
             <a:picLocks noChangeAspect="1"/>
           </p:cNvPicPr>
           <p:nvPr/>
         </p:nvPicPr>
-        <p:blipFill>
-          <a:blip r:embed="rId3">
-            <a:extLst>
-              <a:ext uri="{28A0092B-C50C-407E-A947-70E740481C1C}">
-                <a14:useLocalDpi xmlns:a14="http://schemas.microsoft.com/office/drawing/2010/main" val="0"/>
-              </a:ext>
-            </a:extLst>
-          </a:blip>
-          <a:stretch>
-            <a:fillRect/>
-          </a:stretch>
+        <p:blipFill rotWithShape="1">
+          <a:blip r:embed="rId3"/>
+          <a:stretch/>
         </p:blipFill>
-        <p:spPr>
+        <p:spPr bwMode="auto">
           <a:xfrm>
             <a:off x="0" y="0"/>
             <a:ext cx="5965150" cy="8229600"/>
@@ -3185,13 +3298,13 @@
       </p:pic>
       <p:sp>
         <p:nvSpPr>
-          <p:cNvPr id="3" name="Text 0"/>
-          <p:cNvSpPr/>
-          <p:nvPr/>
-        </p:nvSpPr>
-        <p:spPr>
-          <a:xfrm>
-            <a:off x="6280190" y="1579483"/>
+          <p:cNvPr id="252763822" name="Text 0"/>
+          <p:cNvSpPr/>
+          <p:nvPr/>
+        </p:nvSpPr>
+        <p:spPr bwMode="auto">
+          <a:xfrm>
+            <a:off x="6470689" y="1484232"/>
             <a:ext cx="5552242" cy="566976"/>
           </a:xfrm>
           <a:prstGeom prst="rect">
@@ -3209,31 +3322,32 @@
                 <a:spcPts val="4450"/>
               </a:lnSpc>
               <a:buNone/>
-            </a:pPr>
-            <a:r>
-              <a:rPr lang="en-US" sz="3550" dirty="0">
+              <a:defRPr/>
+            </a:pPr>
+            <a:r>
+              <a:rPr lang="en-US" sz="3550">
                 <a:solidFill>
                   <a:srgbClr val="FA95AF"/>
                 </a:solidFill>
-                <a:latin typeface="Anton" pitchFamily="34" charset="0"/>
-                <a:ea typeface="Anton" pitchFamily="34" charset="-122"/>
-                <a:cs typeface="Anton" pitchFamily="34" charset="-120"/>
+                <a:latin typeface="Anton"/>
+                <a:ea typeface="Anton"/>
+                <a:cs typeface="Anton"/>
               </a:rPr>
               <a:t>Magnetic Flux &amp; Faraday's Law</a:t>
             </a:r>
-            <a:endParaRPr lang="en-US" sz="3550" dirty="0"/>
-          </a:p>
-        </p:txBody>
-      </p:sp>
-      <p:sp>
-        <p:nvSpPr>
-          <p:cNvPr id="4" name="Text 1"/>
-          <p:cNvSpPr/>
-          <p:nvPr/>
-        </p:nvSpPr>
-        <p:spPr>
-          <a:xfrm>
-            <a:off x="6280190" y="2486620"/>
+            <a:endParaRPr lang="en-US" sz="3550"/>
+          </a:p>
+        </p:txBody>
+      </p:sp>
+      <p:sp>
+        <p:nvSpPr>
+          <p:cNvPr id="1385403428" name="Text 1"/>
+          <p:cNvSpPr/>
+          <p:nvPr/>
+        </p:nvSpPr>
+        <p:spPr bwMode="auto">
+          <a:xfrm>
+            <a:off x="6470689" y="2391369"/>
             <a:ext cx="7556421" cy="1088708"/>
           </a:xfrm>
           <a:prstGeom prst="rect">
@@ -3251,31 +3365,32 @@
                 <a:spcPts val="2850"/>
               </a:lnSpc>
               <a:buNone/>
-            </a:pPr>
-            <a:r>
-              <a:rPr lang="en-US" sz="1750" dirty="0">
+              <a:defRPr/>
+            </a:pPr>
+            <a:r>
+              <a:rPr lang="en-US" sz="1750">
                 <a:solidFill>
                   <a:srgbClr val="E0D6DE"/>
                 </a:solidFill>
-                <a:latin typeface="Fira Sans" pitchFamily="34" charset="0"/>
-                <a:ea typeface="Fira Sans" pitchFamily="34" charset="-122"/>
-                <a:cs typeface="Fira Sans" pitchFamily="34" charset="-120"/>
+                <a:latin typeface="Fira Sans"/>
+                <a:ea typeface="Fira Sans"/>
+                <a:cs typeface="Fira Sans"/>
               </a:rPr>
               <a:t>Magnetic flux Φ quantifies how much magnetic field passes through a loop: Φ = B · A · cosθ. Faraday's Law relates changing flux to an induced voltage:</a:t>
             </a:r>
-            <a:endParaRPr lang="en-US" sz="1750" dirty="0"/>
-          </a:p>
-        </p:txBody>
-      </p:sp>
-      <p:sp>
-        <p:nvSpPr>
-          <p:cNvPr id="5" name="Shape 2"/>
-          <p:cNvSpPr/>
-          <p:nvPr/>
-        </p:nvSpPr>
-        <p:spPr>
-          <a:xfrm>
-            <a:off x="6280190" y="3830479"/>
+            <a:endParaRPr lang="en-US" sz="1750"/>
+          </a:p>
+        </p:txBody>
+      </p:sp>
+      <p:sp>
+        <p:nvSpPr>
+          <p:cNvPr id="791140063" name="Shape 2"/>
+          <p:cNvSpPr/>
+          <p:nvPr/>
+        </p:nvSpPr>
+        <p:spPr bwMode="auto">
+          <a:xfrm>
+            <a:off x="6470689" y="3735228"/>
             <a:ext cx="3664744" cy="2819519"/>
           </a:xfrm>
           <a:prstGeom prst="roundRect">
@@ -3296,13 +3411,13 @@
       </p:sp>
       <p:sp>
         <p:nvSpPr>
-          <p:cNvPr id="6" name="Text 3"/>
-          <p:cNvSpPr/>
-          <p:nvPr/>
-        </p:nvSpPr>
-        <p:spPr>
-          <a:xfrm>
-            <a:off x="6537484" y="4087773"/>
+          <p:cNvPr id="434613069" name="Text 3"/>
+          <p:cNvSpPr/>
+          <p:nvPr/>
+        </p:nvSpPr>
+        <p:spPr bwMode="auto">
+          <a:xfrm>
+            <a:off x="6727983" y="3992522"/>
             <a:ext cx="2835235" cy="354330"/>
           </a:xfrm>
           <a:prstGeom prst="rect">
@@ -3320,31 +3435,32 @@
                 <a:spcPts val="2750"/>
               </a:lnSpc>
               <a:buNone/>
-            </a:pPr>
-            <a:r>
-              <a:rPr lang="en-US" sz="2200" dirty="0">
+              <a:defRPr/>
+            </a:pPr>
+            <a:r>
+              <a:rPr lang="en-US" sz="2200">
                 <a:solidFill>
                   <a:srgbClr val="E0D6DE"/>
                 </a:solidFill>
-                <a:latin typeface="Anton" pitchFamily="34" charset="0"/>
-                <a:ea typeface="Anton" pitchFamily="34" charset="-122"/>
-                <a:cs typeface="Anton" pitchFamily="34" charset="-120"/>
+                <a:latin typeface="Anton"/>
+                <a:ea typeface="Anton"/>
+                <a:cs typeface="Anton"/>
               </a:rPr>
               <a:t>Faraday</a:t>
             </a:r>
-            <a:endParaRPr lang="en-US" sz="2200" dirty="0"/>
-          </a:p>
-        </p:txBody>
-      </p:sp>
-      <p:sp>
-        <p:nvSpPr>
-          <p:cNvPr id="7" name="Text 4"/>
-          <p:cNvSpPr/>
-          <p:nvPr/>
-        </p:nvSpPr>
-        <p:spPr>
-          <a:xfrm>
-            <a:off x="6537484" y="4578191"/>
+            <a:endParaRPr lang="en-US" sz="2200"/>
+          </a:p>
+        </p:txBody>
+      </p:sp>
+      <p:sp>
+        <p:nvSpPr>
+          <p:cNvPr id="1728880007" name="Text 4"/>
+          <p:cNvSpPr/>
+          <p:nvPr/>
+        </p:nvSpPr>
+        <p:spPr bwMode="auto">
+          <a:xfrm>
+            <a:off x="6727983" y="4482940"/>
             <a:ext cx="3150156" cy="1088708"/>
           </a:xfrm>
           <a:prstGeom prst="rect">
@@ -3362,31 +3478,146 @@
                 <a:spcPts val="2850"/>
               </a:lnSpc>
               <a:buNone/>
-            </a:pPr>
-            <a:r>
-              <a:rPr lang="en-US" sz="1750" dirty="0">
+              <a:defRPr/>
+            </a:pPr>
+            <mc:AlternateContent xmlns:mc="http://schemas.openxmlformats.org/markup-compatibility/2006" xmlns:m="http://schemas.openxmlformats.org/officeDocument/2006/math">
+              <mc:Choice xmlns:a14="http://schemas.microsoft.com/office/drawing/2010/main" Requires="a14">
+                <a14:m>
+                  <m:oMathPara>
+                    <m:oMathParaPr/>
+                    <m:oMath>
+                      <m:r>
+                        <m:rPr>
+                          <m:sty m:val="p"/>
+                        </m:rPr>
+                        <a:rPr lang="en-US" sz="2600" u="none" strike="noStrike" cap="none" spc="0">
+                          <a:solidFill>
+                            <a:srgbClr val="E0D6DE"/>
+                          </a:solidFill>
+                          <a:latin typeface="Cambria Math"/>
+                          <a:ea typeface="Cambria Math"/>
+                          <a:cs typeface="Cambria Math"/>
+                        </a:rPr>
+                        <m:t>ε=</m:t>
+                      </m:r>
+                      <m:f>
+                        <m:fPr>
+                          <m:ctrlPr>
+                            <a:rPr lang="en-US" sz="2600" b="0" i="1" u="none" strike="noStrike" cap="none" spc="0">
+                              <a:solidFill>
+                                <a:srgbClr val="E0D6DE"/>
+                              </a:solidFill>
+                              <a:latin typeface="Cambria Math"/>
+                              <a:ea typeface="Cambria Math"/>
+                              <a:cs typeface="Cambria Math"/>
+                            </a:rPr>
+                          </m:ctrlPr>
+                        </m:fPr>
+                        <m:num>
+                          <m:r>
+                            <m:rPr>
+                              <m:sty m:val="i"/>
+                            </m:rPr>
+                            <a:rPr lang="en-US" sz="2600" u="none" strike="noStrike" cap="none" spc="0">
+                              <a:solidFill>
+                                <a:srgbClr val="E0D6DE"/>
+                              </a:solidFill>
+                              <a:latin typeface="Cambria Math"/>
+                              <a:ea typeface="Cambria Math"/>
+                              <a:cs typeface="Cambria Math"/>
+                            </a:rPr>
+                            <m:t>-d</m:t>
+                          </m:r>
+                          <m:r>
+                            <m:rPr>
+                              <m:sty m:val="i"/>
+                            </m:rPr>
+                            <a:rPr lang="en-US" sz="2600" u="none" strike="noStrike" cap="none" spc="0">
+                              <a:solidFill>
+                                <a:srgbClr val="E0D6DE"/>
+                              </a:solidFill>
+                              <a:latin typeface="Cambria Math"/>
+                              <a:ea typeface="Cambria Math"/>
+                              <a:cs typeface="Cambria Math"/>
+                            </a:rPr>
+                            <m:t>Φ</m:t>
+                          </m:r>
+                        </m:num>
+                        <m:den>
+                          <m:r>
+                            <m:rPr>
+                              <m:sty m:val="i"/>
+                            </m:rPr>
+                            <a:rPr lang="en-US" sz="2600" u="none" strike="noStrike" cap="none" spc="0">
+                              <a:solidFill>
+                                <a:srgbClr val="E0D6DE"/>
+                              </a:solidFill>
+                              <a:latin typeface="Cambria Math"/>
+                              <a:ea typeface="Cambria Math"/>
+                              <a:cs typeface="Cambria Math"/>
+                            </a:rPr>
+                            <m:t>dt</m:t>
+                          </m:r>
+                        </m:den>
+                      </m:f>
+                    </m:oMath>
+                  </m:oMathPara>
+                </a14:m>
+              </mc:Choice>
+              <mc:Fallback/>
+            </mc:AlternateContent>
+            <a:r>
+              <a:rPr lang="en-US" sz="2600">
                 <a:solidFill>
                   <a:srgbClr val="E0D6DE"/>
                 </a:solidFill>
-                <a:latin typeface="Fira Sans" pitchFamily="34" charset="0"/>
-                <a:ea typeface="Fira Sans" pitchFamily="34" charset="-122"/>
-                <a:cs typeface="Fira Sans" pitchFamily="34" charset="-120"/>
-              </a:rPr>
-              <a:t>e = −dΦ/dt — a voltage appears only when flux changes over time.</a:t>
-            </a:r>
-            <a:endParaRPr lang="en-US" sz="1750" dirty="0"/>
-          </a:p>
-        </p:txBody>
-      </p:sp>
-      <p:sp>
-        <p:nvSpPr>
-          <p:cNvPr id="8" name="Shape 5"/>
-          <p:cNvSpPr/>
-          <p:nvPr/>
-        </p:nvSpPr>
-        <p:spPr>
-          <a:xfrm>
-            <a:off x="10171748" y="3830479"/>
+                <a:latin typeface="Fira Sans"/>
+                <a:ea typeface="Fira Sans"/>
+                <a:cs typeface="Fira Sans"/>
+              </a:rPr>
+              <a:t> </a:t>
+            </a:r>
+            <a:endParaRPr lang="en-US" sz="2600">
+              <a:solidFill>
+                <a:srgbClr val="E0D6DE"/>
+              </a:solidFill>
+              <a:latin typeface="Fira Sans"/>
+              <a:ea typeface="Fira Sans"/>
+              <a:cs typeface="Fira Sans"/>
+            </a:endParaRPr>
+          </a:p>
+          <a:p>
+            <a:pPr marL="0" indent="0" algn="l">
+              <a:lnSpc>
+                <a:spcPts val="2849"/>
+              </a:lnSpc>
+              <a:buNone/>
+              <a:defRPr/>
+            </a:pPr>
+            <a:r>
+              <a:rPr lang="en-US" sz="1750">
+                <a:solidFill>
+                  <a:srgbClr val="E0D6DE"/>
+                </a:solidFill>
+                <a:latin typeface="Fira Sans"/>
+                <a:ea typeface="Fira Sans"/>
+                <a:cs typeface="Fira Sans"/>
+              </a:rPr>
+              <a:t> a voltage appears only when flux changes over time.</a:t>
+            </a:r>
+            <a:endParaRPr lang="en-US" sz="1750"/>
+          </a:p>
+        </p:txBody>
+      </p:sp>
+      <p:sp>
+        <p:nvSpPr>
+          <p:cNvPr id="1585620003" name="Shape 5"/>
+          <p:cNvSpPr/>
+          <p:nvPr/>
+        </p:nvSpPr>
+        <p:spPr bwMode="auto">
+          <a:xfrm>
+            <a:off x="10362247" y="3735228"/>
             <a:ext cx="3664863" cy="2819519"/>
           </a:xfrm>
           <a:prstGeom prst="roundRect">
@@ -3407,13 +3638,13 @@
       </p:sp>
       <p:sp>
         <p:nvSpPr>
-          <p:cNvPr id="9" name="Text 6"/>
-          <p:cNvSpPr/>
-          <p:nvPr/>
-        </p:nvSpPr>
-        <p:spPr>
-          <a:xfrm>
-            <a:off x="10429042" y="4087773"/>
+          <p:cNvPr id="1864209732" name="Text 6"/>
+          <p:cNvSpPr/>
+          <p:nvPr/>
+        </p:nvSpPr>
+        <p:spPr bwMode="auto">
+          <a:xfrm>
+            <a:off x="10619541" y="3992522"/>
             <a:ext cx="2835235" cy="354330"/>
           </a:xfrm>
           <a:prstGeom prst="rect">
@@ -3431,31 +3662,32 @@
                 <a:spcPts val="2750"/>
               </a:lnSpc>
               <a:buNone/>
-            </a:pPr>
-            <a:r>
-              <a:rPr lang="en-US" sz="2200" dirty="0">
+              <a:defRPr/>
+            </a:pPr>
+            <a:r>
+              <a:rPr lang="en-US" sz="2200">
                 <a:solidFill>
                   <a:srgbClr val="E0D6DE"/>
                 </a:solidFill>
-                <a:latin typeface="Anton" pitchFamily="34" charset="0"/>
-                <a:ea typeface="Anton" pitchFamily="34" charset="-122"/>
-                <a:cs typeface="Anton" pitchFamily="34" charset="-120"/>
+                <a:latin typeface="Anton"/>
+                <a:ea typeface="Anton"/>
+                <a:cs typeface="Anton"/>
               </a:rPr>
               <a:t>Implication</a:t>
             </a:r>
-            <a:endParaRPr lang="en-US" sz="2200" dirty="0"/>
-          </a:p>
-        </p:txBody>
-      </p:sp>
-      <p:sp>
-        <p:nvSpPr>
-          <p:cNvPr id="10" name="Text 7"/>
-          <p:cNvSpPr/>
-          <p:nvPr/>
-        </p:nvSpPr>
-        <p:spPr>
-          <a:xfrm>
-            <a:off x="10429042" y="4578191"/>
+            <a:endParaRPr lang="en-US" sz="2200"/>
+          </a:p>
+        </p:txBody>
+      </p:sp>
+      <p:sp>
+        <p:nvSpPr>
+          <p:cNvPr id="447869428" name="Text 7"/>
+          <p:cNvSpPr/>
+          <p:nvPr/>
+        </p:nvSpPr>
+        <p:spPr bwMode="auto">
+          <a:xfrm>
+            <a:off x="10619541" y="4482940"/>
             <a:ext cx="3150275" cy="1814513"/>
           </a:xfrm>
           <a:prstGeom prst="rect">
@@ -3473,29 +3705,52 @@
                 <a:spcPts val="2850"/>
               </a:lnSpc>
               <a:buNone/>
-            </a:pPr>
-            <a:r>
-              <a:rPr lang="en-US" sz="1750" dirty="0">
+              <a:defRPr/>
+            </a:pPr>
+            <a:r>
+              <a:rPr lang="en-US" sz="1750">
                 <a:solidFill>
                   <a:srgbClr val="E0D6DE"/>
                 </a:solidFill>
-                <a:latin typeface="Fira Sans" pitchFamily="34" charset="0"/>
-                <a:ea typeface="Fira Sans" pitchFamily="34" charset="-122"/>
-                <a:cs typeface="Fira Sans" pitchFamily="34" charset="-120"/>
-              </a:rPr>
-              <a:t>Static current produces steady Φ → no induced e. Rapid changes in current (edges) create dΦ/dt → measurable pulses.</a:t>
-            </a:r>
-            <a:endParaRPr lang="en-US" sz="1750" dirty="0"/>
-          </a:p>
-        </p:txBody>
-      </p:sp>
-      <p:sp>
-        <p:nvSpPr>
-          <p:cNvPr id="11" name="Rectangle 10"/>
-          <p:cNvSpPr/>
-          <p:nvPr/>
-        </p:nvSpPr>
-        <p:spPr>
+                <a:latin typeface="Fira Sans"/>
+                <a:ea typeface="Fira Sans"/>
+                <a:cs typeface="Fira Sans"/>
+              </a:rPr>
+              <a:t>Static current produces steady Φ → no induced </a:t>
+            </a:r>
+            <a:r>
+              <a:rPr lang="en-US" sz="1750">
+                <a:solidFill>
+                  <a:srgbClr val="E0D6DE"/>
+                </a:solidFill>
+                <a:latin typeface="Adwaita Mono"/>
+                <a:ea typeface="Adwaita Mono"/>
+                <a:cs typeface="Adwaita Mono"/>
+              </a:rPr>
+              <a:t>ε</a:t>
+            </a:r>
+            <a:r>
+              <a:rPr lang="en-US" sz="1750">
+                <a:solidFill>
+                  <a:srgbClr val="E0D6DE"/>
+                </a:solidFill>
+                <a:latin typeface="Fira Sans"/>
+                <a:ea typeface="Fira Sans"/>
+                <a:cs typeface="Fira Sans"/>
+              </a:rPr>
+              <a:t>. Rapid changes in current (edges) create dΦ/dt → measurable pulses.</a:t>
+            </a:r>
+            <a:endParaRPr lang="en-US" sz="1750"/>
+          </a:p>
+        </p:txBody>
+      </p:sp>
+      <p:sp>
+        <p:nvSpPr>
+          <p:cNvPr id="1463516957" name="Rectangle 10"/>
+          <p:cNvSpPr/>
+          <p:nvPr/>
+        </p:nvSpPr>
+        <p:spPr bwMode="auto">
           <a:xfrm>
             <a:off x="12265819" y="7429500"/>
             <a:ext cx="2364581" cy="800100"/>
@@ -3530,7 +3785,9 @@
           <a:bodyPr rtlCol="0" anchor="ctr"/>
           <a:lstStyle/>
           <a:p>
-            <a:pPr algn="ctr"/>
+            <a:pPr algn="ctr">
+              <a:defRPr/>
+            </a:pPr>
             <a:endParaRPr lang="en-US"/>
           </a:p>
         </p:txBody>
@@ -3540,6 +3797,18 @@
   <p:clrMapOvr>
     <a:masterClrMapping/>
   </p:clrMapOvr>
+  <mc:AlternateContent xmlns:mc="http://schemas.openxmlformats.org/markup-compatibility/2006">
+    <mc:Choice xmlns:p159="http://schemas.microsoft.com/office/powerpoint/2015/09/main" xmlns:p14="http://schemas.microsoft.com/office/powerpoint/2010/main" Requires="p159">
+      <p:transition spd="fast" p14:dur="500" advClick="1">
+        <p:fade thruBlk="0"/>
+      </p:transition>
+    </mc:Choice>
+    <mc:Fallback>
+      <p:transition spd="fast" advClick="1">
+        <p:fade thruBlk="0"/>
+      </p:transition>
+    </mc:Fallback>
+  </mc:AlternateContent>
   <p:timing>
     <p:tnLst>
       <p:par>
@@ -3551,7 +3820,7 @@
 </file>
 
 <file path=ppt/slides/slide4.xml><?xml version="1.0" encoding="utf-8"?>
-<p:sld xmlns:a="http://schemas.openxmlformats.org/drawingml/2006/main" xmlns:r="http://schemas.openxmlformats.org/officeDocument/2006/relationships" xmlns:p="http://schemas.openxmlformats.org/presentationml/2006/main">
+<p:sld xmlns:a="http://schemas.openxmlformats.org/drawingml/2006/main" xmlns:r="http://schemas.openxmlformats.org/officeDocument/2006/relationships" xmlns:p="http://schemas.openxmlformats.org/presentationml/2006/main" xmlns:m="http://schemas.openxmlformats.org/officeDocument/2006/math" xmlns:w="http://schemas.openxmlformats.org/wordprocessingml/2006/main" xmlns:mc="http://schemas.openxmlformats.org/markup-compatibility/2006" showMasterPhAnim="0" showMasterSp="1" show="1">
   <p:cSld name="Slide 4">
     <p:spTree>
       <p:nvGrpSpPr>
@@ -3559,7 +3828,7 @@
         <p:cNvGrpSpPr/>
         <p:nvPr/>
       </p:nvGrpSpPr>
-      <p:grpSpPr>
+      <p:grpSpPr bwMode="auto">
         <a:xfrm>
           <a:off x="0" y="0"/>
           <a:ext cx="0" cy="0"/>
@@ -3569,28 +3838,20 @@
       </p:grpSpPr>
       <p:pic>
         <p:nvPicPr>
-          <p:cNvPr id="2" name="Image 0"/>
+          <p:cNvPr id="532858373" name="Image 0"/>
           <p:cNvPicPr>
             <a:picLocks noChangeAspect="1"/>
           </p:cNvPicPr>
           <p:nvPr/>
         </p:nvPicPr>
-        <p:blipFill>
-          <a:blip r:embed="rId3">
-            <a:extLst>
-              <a:ext uri="{28A0092B-C50C-407E-A947-70E740481C1C}">
-                <a14:useLocalDpi xmlns:a14="http://schemas.microsoft.com/office/drawing/2010/main" val="0"/>
-              </a:ext>
-            </a:extLst>
-          </a:blip>
-          <a:stretch>
-            <a:fillRect/>
-          </a:stretch>
+        <p:blipFill rotWithShape="1">
+          <a:blip r:embed="rId3"/>
+          <a:stretch/>
         </p:blipFill>
-        <p:spPr>
+        <p:spPr bwMode="auto">
           <a:xfrm>
             <a:off x="8651081" y="0"/>
-            <a:ext cx="5979319" cy="8229600"/>
+            <a:ext cx="5979318" cy="8229600"/>
           </a:xfrm>
           <a:prstGeom prst="rect">
             <a:avLst/>
@@ -3599,11 +3860,11 @@
       </p:pic>
       <p:sp>
         <p:nvSpPr>
-          <p:cNvPr id="3" name="Text 0"/>
-          <p:cNvSpPr/>
-          <p:nvPr/>
-        </p:nvSpPr>
-        <p:spPr>
+          <p:cNvPr id="1538126832" name="Text 0"/>
+          <p:cNvSpPr/>
+          <p:nvPr/>
+        </p:nvSpPr>
+        <p:spPr bwMode="auto">
           <a:xfrm>
             <a:off x="793790" y="1468398"/>
             <a:ext cx="4536519" cy="566976"/>
@@ -3623,29 +3884,30 @@
                 <a:spcPts val="4450"/>
               </a:lnSpc>
               <a:buNone/>
-            </a:pPr>
-            <a:r>
-              <a:rPr lang="en-US" sz="3550" dirty="0">
+              <a:defRPr/>
+            </a:pPr>
+            <a:r>
+              <a:rPr lang="en-US" sz="3550">
                 <a:solidFill>
                   <a:srgbClr val="FA95AF"/>
                 </a:solidFill>
-                <a:latin typeface="Anton" pitchFamily="34" charset="0"/>
-                <a:ea typeface="Anton" pitchFamily="34" charset="-122"/>
-                <a:cs typeface="Anton" pitchFamily="34" charset="-120"/>
+                <a:latin typeface="Anton"/>
+                <a:ea typeface="Anton"/>
+                <a:cs typeface="Anton"/>
               </a:rPr>
               <a:t>Digital Signals &amp; Edges</a:t>
             </a:r>
-            <a:endParaRPr lang="en-US" sz="3550" dirty="0"/>
-          </a:p>
-        </p:txBody>
-      </p:sp>
-      <p:sp>
-        <p:nvSpPr>
-          <p:cNvPr id="4" name="Text 1"/>
-          <p:cNvSpPr/>
-          <p:nvPr/>
-        </p:nvSpPr>
-        <p:spPr>
+            <a:endParaRPr lang="en-US" sz="3550"/>
+          </a:p>
+        </p:txBody>
+      </p:sp>
+      <p:sp>
+        <p:nvSpPr>
+          <p:cNvPr id="419450139" name="Text 1"/>
+          <p:cNvSpPr/>
+          <p:nvPr/>
+        </p:nvSpPr>
+        <p:spPr bwMode="auto">
           <a:xfrm>
             <a:off x="793790" y="2375535"/>
             <a:ext cx="7556421" cy="1088708"/>
@@ -3665,29 +3927,30 @@
                 <a:spcPts val="2850"/>
               </a:lnSpc>
               <a:buNone/>
-            </a:pPr>
-            <a:r>
-              <a:rPr lang="en-US" sz="1750" dirty="0">
+              <a:defRPr/>
+            </a:pPr>
+            <a:r>
+              <a:rPr lang="en-US" sz="1750">
                 <a:solidFill>
                   <a:srgbClr val="E0D6DE"/>
                 </a:solidFill>
-                <a:latin typeface="Fira Sans" pitchFamily="34" charset="0"/>
-                <a:ea typeface="Fira Sans" pitchFamily="34" charset="-122"/>
-                <a:cs typeface="Fira Sans" pitchFamily="34" charset="-120"/>
+                <a:latin typeface="Fira Sans"/>
+                <a:ea typeface="Fira Sans"/>
+                <a:cs typeface="Fira Sans"/>
               </a:rPr>
               <a:t>Digital logic toggles between voltage states; transitions (edges) concentrate spectral energy and dI/dt. Edge polarity maps to induced pulse sign:</a:t>
             </a:r>
-            <a:endParaRPr lang="en-US" sz="1750" dirty="0"/>
-          </a:p>
-        </p:txBody>
-      </p:sp>
-      <p:sp>
-        <p:nvSpPr>
-          <p:cNvPr id="5" name="Shape 2"/>
-          <p:cNvSpPr/>
-          <p:nvPr/>
-        </p:nvSpPr>
-        <p:spPr>
+            <a:endParaRPr lang="en-US" sz="1750"/>
+          </a:p>
+        </p:txBody>
+      </p:sp>
+      <p:sp>
+        <p:nvSpPr>
+          <p:cNvPr id="1233183733" name="Shape 2"/>
+          <p:cNvSpPr/>
+          <p:nvPr/>
+        </p:nvSpPr>
+        <p:spPr bwMode="auto">
           <a:xfrm>
             <a:off x="793790" y="3719393"/>
             <a:ext cx="510302" cy="510302"/>
@@ -3705,11 +3968,11 @@
       </p:sp>
       <p:sp>
         <p:nvSpPr>
-          <p:cNvPr id="6" name="Text 3"/>
-          <p:cNvSpPr/>
-          <p:nvPr/>
-        </p:nvSpPr>
-        <p:spPr>
+          <p:cNvPr id="1381833505" name="Text 3"/>
+          <p:cNvSpPr/>
+          <p:nvPr/>
+        </p:nvSpPr>
+        <p:spPr bwMode="auto">
           <a:xfrm>
             <a:off x="1530906" y="3797260"/>
             <a:ext cx="2835235" cy="354330"/>
@@ -3729,29 +3992,30 @@
                 <a:spcPts val="2750"/>
               </a:lnSpc>
               <a:buNone/>
-            </a:pPr>
-            <a:r>
-              <a:rPr lang="en-US" sz="2200" dirty="0">
+              <a:defRPr/>
+            </a:pPr>
+            <a:r>
+              <a:rPr lang="en-US" sz="2200">
                 <a:solidFill>
                   <a:srgbClr val="E0D6DE"/>
                 </a:solidFill>
-                <a:latin typeface="Anton" pitchFamily="34" charset="0"/>
-                <a:ea typeface="Anton" pitchFamily="34" charset="-122"/>
-                <a:cs typeface="Anton" pitchFamily="34" charset="-120"/>
+                <a:latin typeface="Anton"/>
+                <a:ea typeface="Anton"/>
+                <a:cs typeface="Anton"/>
               </a:rPr>
               <a:t>Rising edge (0 → 1)</a:t>
             </a:r>
-            <a:endParaRPr lang="en-US" sz="2200" dirty="0"/>
-          </a:p>
-        </p:txBody>
-      </p:sp>
-      <p:sp>
-        <p:nvSpPr>
-          <p:cNvPr id="7" name="Text 4"/>
-          <p:cNvSpPr/>
-          <p:nvPr/>
-        </p:nvSpPr>
-        <p:spPr>
+            <a:endParaRPr lang="en-US" sz="2200"/>
+          </a:p>
+        </p:txBody>
+      </p:sp>
+      <p:sp>
+        <p:nvSpPr>
+          <p:cNvPr id="467516386" name="Text 4"/>
+          <p:cNvSpPr/>
+          <p:nvPr/>
+        </p:nvSpPr>
+        <p:spPr bwMode="auto">
           <a:xfrm>
             <a:off x="1530906" y="4287679"/>
             <a:ext cx="6819305" cy="725805"/>
@@ -3771,29 +4035,30 @@
                 <a:spcPts val="2850"/>
               </a:lnSpc>
               <a:buNone/>
-            </a:pPr>
-            <a:r>
-              <a:rPr lang="en-US" sz="1750" dirty="0">
+              <a:defRPr/>
+            </a:pPr>
+            <a:r>
+              <a:rPr lang="en-US" sz="1750">
                 <a:solidFill>
                   <a:srgbClr val="E0D6DE"/>
                 </a:solidFill>
-                <a:latin typeface="Fira Sans" pitchFamily="34" charset="0"/>
-                <a:ea typeface="Fira Sans" pitchFamily="34" charset="-122"/>
-                <a:cs typeface="Fira Sans" pitchFamily="34" charset="-120"/>
+                <a:latin typeface="Fira Sans"/>
+                <a:ea typeface="Fira Sans"/>
+                <a:cs typeface="Fira Sans"/>
               </a:rPr>
               <a:t>Fast current increase → positive dΦ/dt → positive induced pulse on a nearby loop.</a:t>
             </a:r>
-            <a:endParaRPr lang="en-US" sz="1750" dirty="0"/>
-          </a:p>
-        </p:txBody>
-      </p:sp>
-      <p:sp>
-        <p:nvSpPr>
-          <p:cNvPr id="8" name="Shape 5"/>
-          <p:cNvSpPr/>
-          <p:nvPr/>
-        </p:nvSpPr>
-        <p:spPr>
+            <a:endParaRPr lang="en-US" sz="1750"/>
+          </a:p>
+        </p:txBody>
+      </p:sp>
+      <p:sp>
+        <p:nvSpPr>
+          <p:cNvPr id="321040726" name="Shape 5"/>
+          <p:cNvSpPr/>
+          <p:nvPr/>
+        </p:nvSpPr>
+        <p:spPr bwMode="auto">
           <a:xfrm>
             <a:off x="793790" y="5467112"/>
             <a:ext cx="510302" cy="510302"/>
@@ -3811,11 +4076,11 @@
       </p:sp>
       <p:sp>
         <p:nvSpPr>
-          <p:cNvPr id="9" name="Text 6"/>
-          <p:cNvSpPr/>
-          <p:nvPr/>
-        </p:nvSpPr>
-        <p:spPr>
+          <p:cNvPr id="1960568730" name="Text 6"/>
+          <p:cNvSpPr/>
+          <p:nvPr/>
+        </p:nvSpPr>
+        <p:spPr bwMode="auto">
           <a:xfrm>
             <a:off x="1530906" y="5544979"/>
             <a:ext cx="2835235" cy="354330"/>
@@ -3835,29 +4100,30 @@
                 <a:spcPts val="2750"/>
               </a:lnSpc>
               <a:buNone/>
-            </a:pPr>
-            <a:r>
-              <a:rPr lang="en-US" sz="2200" dirty="0">
+              <a:defRPr/>
+            </a:pPr>
+            <a:r>
+              <a:rPr lang="en-US" sz="2200">
                 <a:solidFill>
                   <a:srgbClr val="E0D6DE"/>
                 </a:solidFill>
-                <a:latin typeface="Anton" pitchFamily="34" charset="0"/>
-                <a:ea typeface="Anton" pitchFamily="34" charset="-122"/>
-                <a:cs typeface="Anton" pitchFamily="34" charset="-120"/>
+                <a:latin typeface="Anton"/>
+                <a:ea typeface="Anton"/>
+                <a:cs typeface="Anton"/>
               </a:rPr>
               <a:t>Falling edge (1 → 0)</a:t>
             </a:r>
-            <a:endParaRPr lang="en-US" sz="2200" dirty="0"/>
-          </a:p>
-        </p:txBody>
-      </p:sp>
-      <p:sp>
-        <p:nvSpPr>
-          <p:cNvPr id="10" name="Text 7"/>
-          <p:cNvSpPr/>
-          <p:nvPr/>
-        </p:nvSpPr>
-        <p:spPr>
+            <a:endParaRPr lang="en-US" sz="2200"/>
+          </a:p>
+        </p:txBody>
+      </p:sp>
+      <p:sp>
+        <p:nvSpPr>
+          <p:cNvPr id="399527656" name="Text 7"/>
+          <p:cNvSpPr/>
+          <p:nvPr/>
+        </p:nvSpPr>
+        <p:spPr bwMode="auto">
           <a:xfrm>
             <a:off x="1530906" y="6035397"/>
             <a:ext cx="6819305" cy="725805"/>
@@ -3877,19 +4143,20 @@
                 <a:spcPts val="2850"/>
               </a:lnSpc>
               <a:buNone/>
-            </a:pPr>
-            <a:r>
-              <a:rPr lang="en-US" sz="1750" dirty="0">
+              <a:defRPr/>
+            </a:pPr>
+            <a:r>
+              <a:rPr lang="en-US" sz="1750">
                 <a:solidFill>
                   <a:srgbClr val="E0D6DE"/>
                 </a:solidFill>
-                <a:latin typeface="Fira Sans" pitchFamily="34" charset="0"/>
-                <a:ea typeface="Fira Sans" pitchFamily="34" charset="-122"/>
-                <a:cs typeface="Fira Sans" pitchFamily="34" charset="-120"/>
+                <a:latin typeface="Fira Sans"/>
+                <a:ea typeface="Fira Sans"/>
+                <a:cs typeface="Fira Sans"/>
               </a:rPr>
               <a:t>Fast current decrease → negative dΦ/dt → negative induced pulse.</a:t>
             </a:r>
-            <a:endParaRPr lang="en-US" sz="1750" dirty="0"/>
+            <a:endParaRPr lang="en-US" sz="1750"/>
           </a:p>
         </p:txBody>
       </p:sp>
@@ -3898,6 +4165,18 @@
   <p:clrMapOvr>
     <a:masterClrMapping/>
   </p:clrMapOvr>
+  <mc:AlternateContent xmlns:mc="http://schemas.openxmlformats.org/markup-compatibility/2006">
+    <mc:Choice xmlns:p159="http://schemas.microsoft.com/office/powerpoint/2015/09/main" xmlns:p14="http://schemas.microsoft.com/office/powerpoint/2010/main" Requires="p159">
+      <p:transition spd="fast" p14:dur="500" advClick="1">
+        <p:fade thruBlk="0"/>
+      </p:transition>
+    </mc:Choice>
+    <mc:Fallback>
+      <p:transition spd="fast" advClick="1">
+        <p:fade thruBlk="0"/>
+      </p:transition>
+    </mc:Fallback>
+  </mc:AlternateContent>
   <p:timing>
     <p:tnLst>
       <p:par>
@@ -3909,15 +4188,15 @@
 </file>
 
 <file path=ppt/slides/slide5.xml><?xml version="1.0" encoding="utf-8"?>
-<p:sld xmlns:a="http://schemas.openxmlformats.org/drawingml/2006/main" xmlns:r="http://schemas.openxmlformats.org/officeDocument/2006/relationships" xmlns:p="http://schemas.openxmlformats.org/presentationml/2006/main">
-  <p:cSld>
+<p:sld xmlns:a="http://schemas.openxmlformats.org/drawingml/2006/main" xmlns:r="http://schemas.openxmlformats.org/officeDocument/2006/relationships" xmlns:p="http://schemas.openxmlformats.org/presentationml/2006/main" xmlns:m="http://schemas.openxmlformats.org/officeDocument/2006/math" xmlns:w="http://schemas.openxmlformats.org/wordprocessingml/2006/main" xmlns:mc="http://schemas.openxmlformats.org/markup-compatibility/2006" showMasterPhAnim="0" showMasterSp="1" show="1">
+  <p:cSld name="">
     <p:spTree>
       <p:nvGrpSpPr>
         <p:cNvPr id="1" name=""/>
         <p:cNvGrpSpPr/>
         <p:nvPr/>
       </p:nvGrpSpPr>
-      <p:grpSpPr>
+      <p:grpSpPr bwMode="auto">
         <a:xfrm>
           <a:off x="0" y="0"/>
           <a:ext cx="0" cy="0"/>
@@ -3927,14 +4206,14 @@
       </p:grpSpPr>
       <p:sp>
         <p:nvSpPr>
-          <p:cNvPr id="2" name="Text 0"/>
-          <p:cNvSpPr/>
-          <p:nvPr/>
-        </p:nvSpPr>
-        <p:spPr>
-          <a:xfrm>
-            <a:off x="680918" y="1362908"/>
-            <a:ext cx="3891558" cy="486489"/>
+          <p:cNvPr id="494769699" name="Text 0"/>
+          <p:cNvSpPr/>
+          <p:nvPr/>
+        </p:nvSpPr>
+        <p:spPr bwMode="auto">
+          <a:xfrm flipH="0" flipV="0">
+            <a:off x="680917" y="1362907"/>
+            <a:ext cx="5400231" cy="486488"/>
           </a:xfrm>
           <a:prstGeom prst="rect">
             <a:avLst/>
@@ -3943,7 +4222,7 @@
           <a:ln/>
         </p:spPr>
         <p:txBody>
-          <a:bodyPr wrap="none" lIns="0" tIns="0" rIns="0" bIns="0" rtlCol="0" anchor="t"/>
+          <a:bodyPr wrap="square" lIns="0" tIns="0" rIns="0" bIns="0" rtlCol="0" anchor="t"/>
           <a:lstStyle/>
           <a:p>
             <a:pPr marL="0" indent="0" algn="l">
@@ -3951,29 +4230,30 @@
                 <a:spcPts val="3800"/>
               </a:lnSpc>
               <a:buNone/>
-            </a:pPr>
-            <a:r>
-              <a:rPr lang="en-US" sz="4400" dirty="0">
+              <a:defRPr/>
+            </a:pPr>
+            <a:r>
+              <a:rPr lang="en-US" sz="4400">
                 <a:solidFill>
                   <a:srgbClr val="FA95AF"/>
                 </a:solidFill>
-                <a:latin typeface="Anton" pitchFamily="34" charset="0"/>
-                <a:ea typeface="Anton" pitchFamily="34" charset="-122"/>
-                <a:cs typeface="Anton" pitchFamily="34" charset="-120"/>
+                <a:latin typeface="Anton"/>
+                <a:ea typeface="Anton"/>
+                <a:cs typeface="Anton"/>
               </a:rPr>
               <a:t>The Attack: Crosstalk</a:t>
             </a:r>
-            <a:endParaRPr lang="en-US" sz="4400" dirty="0"/>
-          </a:p>
-        </p:txBody>
-      </p:sp>
-      <p:sp>
-        <p:nvSpPr>
-          <p:cNvPr id="3" name="Text 1"/>
-          <p:cNvSpPr/>
-          <p:nvPr/>
-        </p:nvSpPr>
-        <p:spPr>
+            <a:endParaRPr lang="en-US" sz="4400"/>
+          </a:p>
+        </p:txBody>
+      </p:sp>
+      <p:sp>
+        <p:nvSpPr>
+          <p:cNvPr id="331825141" name="Text 1"/>
+          <p:cNvSpPr/>
+          <p:nvPr/>
+        </p:nvSpPr>
+        <p:spPr bwMode="auto">
           <a:xfrm>
             <a:off x="680918" y="2183130"/>
             <a:ext cx="13268563" cy="578168"/>
@@ -3993,29 +4273,30 @@
                 <a:spcPts val="2250"/>
               </a:lnSpc>
               <a:buNone/>
-            </a:pPr>
-            <a:r>
-              <a:rPr lang="en-US" sz="1500" dirty="0">
+              <a:defRPr/>
+            </a:pPr>
+            <a:r>
+              <a:rPr lang="en-US" sz="1500">
                 <a:solidFill>
                   <a:srgbClr val="E0D6DE"/>
                 </a:solidFill>
-                <a:latin typeface="Fira Sans" pitchFamily="34" charset="0"/>
-                <a:ea typeface="Fira Sans" pitchFamily="34" charset="-122"/>
-                <a:cs typeface="Fira Sans" pitchFamily="34" charset="-120"/>
+                <a:latin typeface="Fira Sans"/>
+                <a:ea typeface="Fira Sans"/>
+                <a:cs typeface="Fira Sans"/>
               </a:rPr>
               <a:t>Crosstalk, often viewed as an electrical engineering nuisance, transforms into a potent security vulnerability when sensitive digital data is involved. It describes the unwanted transfer of energy or signal from one circuit or transmission path to another nearby.</a:t>
             </a:r>
-            <a:endParaRPr lang="en-US" sz="1500" dirty="0"/>
-          </a:p>
-        </p:txBody>
-      </p:sp>
-      <p:sp>
-        <p:nvSpPr>
-          <p:cNvPr id="4" name="Text 2"/>
-          <p:cNvSpPr/>
-          <p:nvPr/>
-        </p:nvSpPr>
-        <p:spPr>
+            <a:endParaRPr lang="en-US" sz="1500"/>
+          </a:p>
+        </p:txBody>
+      </p:sp>
+      <p:sp>
+        <p:nvSpPr>
+          <p:cNvPr id="705303868" name="Text 2"/>
+          <p:cNvSpPr/>
+          <p:nvPr/>
+        </p:nvSpPr>
+        <p:spPr bwMode="auto">
           <a:xfrm>
             <a:off x="680918" y="2949059"/>
             <a:ext cx="13268563" cy="578168"/>
@@ -4035,29 +4316,30 @@
                 <a:spcPts val="2250"/>
               </a:lnSpc>
               <a:buNone/>
-            </a:pPr>
-            <a:r>
-              <a:rPr lang="en-US" sz="1500" dirty="0">
+              <a:defRPr/>
+            </a:pPr>
+            <a:r>
+              <a:rPr lang="en-US" sz="1500">
                 <a:solidFill>
                   <a:srgbClr val="E0D6DE"/>
                 </a:solidFill>
-                <a:latin typeface="Fira Sans" pitchFamily="34" charset="0"/>
-                <a:ea typeface="Fira Sans" pitchFamily="34" charset="-122"/>
-                <a:cs typeface="Fira Sans" pitchFamily="34" charset="-120"/>
+                <a:latin typeface="Fira Sans"/>
+                <a:ea typeface="Fira Sans"/>
+                <a:cs typeface="Fira Sans"/>
               </a:rPr>
               <a:t>In our context, the rapidly changing current (dI/dt) on an active data line, generated by digital signal edges, creates a transient magnetic field. This field then couples with an adjacent, unsuspecting line, which acts as a passive "aggressor" or "receiver" of this unintended signal.</a:t>
             </a:r>
-            <a:endParaRPr lang="en-US" sz="1500" dirty="0"/>
-          </a:p>
-        </p:txBody>
-      </p:sp>
-      <p:sp>
-        <p:nvSpPr>
-          <p:cNvPr id="5" name="Shape 3"/>
-          <p:cNvSpPr/>
-          <p:nvPr/>
-        </p:nvSpPr>
-        <p:spPr>
+            <a:endParaRPr lang="en-US" sz="1500"/>
+          </a:p>
+        </p:txBody>
+      </p:sp>
+      <p:sp>
+        <p:nvSpPr>
+          <p:cNvPr id="1032020327" name="Shape 3"/>
+          <p:cNvSpPr/>
+          <p:nvPr/>
+        </p:nvSpPr>
+        <p:spPr bwMode="auto">
           <a:xfrm>
             <a:off x="680918" y="3714988"/>
             <a:ext cx="4311610" cy="3151584"/>
@@ -4080,11 +4362,11 @@
       </p:sp>
       <p:sp>
         <p:nvSpPr>
-          <p:cNvPr id="6" name="Text 4"/>
-          <p:cNvSpPr/>
-          <p:nvPr/>
-        </p:nvSpPr>
-        <p:spPr>
+          <p:cNvPr id="1055914289" name="Text 4"/>
+          <p:cNvSpPr/>
+          <p:nvPr/>
+        </p:nvSpPr>
+        <p:spPr bwMode="auto">
           <a:xfrm>
             <a:off x="898327" y="3932396"/>
             <a:ext cx="2432209" cy="303967"/>
@@ -4104,29 +4386,30 @@
                 <a:spcPts val="2350"/>
               </a:lnSpc>
               <a:buNone/>
-            </a:pPr>
-            <a:r>
-              <a:rPr lang="en-US" sz="1900" dirty="0">
+              <a:defRPr/>
+            </a:pPr>
+            <a:r>
+              <a:rPr lang="en-US" sz="1900">
                 <a:solidFill>
                   <a:srgbClr val="E0D6DE"/>
                 </a:solidFill>
-                <a:latin typeface="Anton" pitchFamily="34" charset="0"/>
-                <a:ea typeface="Anton" pitchFamily="34" charset="-122"/>
-                <a:cs typeface="Anton" pitchFamily="34" charset="-120"/>
+                <a:latin typeface="Anton"/>
+                <a:ea typeface="Anton"/>
+                <a:cs typeface="Anton"/>
               </a:rPr>
               <a:t>Induced Voltage</a:t>
             </a:r>
-            <a:endParaRPr lang="en-US" sz="1900" dirty="0"/>
-          </a:p>
-        </p:txBody>
-      </p:sp>
-      <p:sp>
-        <p:nvSpPr>
-          <p:cNvPr id="7" name="Text 5"/>
-          <p:cNvSpPr/>
-          <p:nvPr/>
-        </p:nvSpPr>
-        <p:spPr>
+            <a:endParaRPr lang="en-US" sz="1900"/>
+          </a:p>
+        </p:txBody>
+      </p:sp>
+      <p:sp>
+        <p:nvSpPr>
+          <p:cNvPr id="961525427" name="Text 5"/>
+          <p:cNvSpPr/>
+          <p:nvPr/>
+        </p:nvSpPr>
+        <p:spPr bwMode="auto">
           <a:xfrm>
             <a:off x="898327" y="4336494"/>
             <a:ext cx="3876794" cy="1734503"/>
@@ -4146,29 +4429,30 @@
                 <a:spcPts val="2250"/>
               </a:lnSpc>
               <a:buNone/>
-            </a:pPr>
-            <a:r>
-              <a:rPr lang="en-US" sz="1500" dirty="0">
+              <a:defRPr/>
+            </a:pPr>
+            <a:r>
+              <a:rPr lang="en-US" sz="1500">
                 <a:solidFill>
                   <a:srgbClr val="E0D6DE"/>
                 </a:solidFill>
-                <a:latin typeface="Fira Sans" pitchFamily="34" charset="0"/>
-                <a:ea typeface="Fira Sans" pitchFamily="34" charset="-122"/>
-                <a:cs typeface="Fira Sans" pitchFamily="34" charset="-120"/>
+                <a:latin typeface="Fira Sans"/>
+                <a:ea typeface="Fira Sans"/>
+                <a:cs typeface="Fira Sans"/>
               </a:rPr>
               <a:t>The changing magnetic flux (dΦ/dt) from the active data line, as predicted by Faraday's Law, induces a parasitic voltage pulse on the adjacent aggressor line. This pulse is directly proportional to the rate of change of the magnetic flux.</a:t>
             </a:r>
-            <a:endParaRPr lang="en-US" sz="1500" dirty="0"/>
-          </a:p>
-        </p:txBody>
-      </p:sp>
-      <p:sp>
-        <p:nvSpPr>
-          <p:cNvPr id="8" name="Shape 6"/>
-          <p:cNvSpPr/>
-          <p:nvPr/>
-        </p:nvSpPr>
-        <p:spPr>
+            <a:endParaRPr lang="en-US" sz="1500"/>
+          </a:p>
+        </p:txBody>
+      </p:sp>
+      <p:sp>
+        <p:nvSpPr>
+          <p:cNvPr id="1663865731" name="Shape 6"/>
+          <p:cNvSpPr/>
+          <p:nvPr/>
+        </p:nvSpPr>
+        <p:spPr bwMode="auto">
           <a:xfrm>
             <a:off x="5159335" y="3714988"/>
             <a:ext cx="4311610" cy="3151584"/>
@@ -4191,11 +4475,11 @@
       </p:sp>
       <p:sp>
         <p:nvSpPr>
-          <p:cNvPr id="9" name="Text 7"/>
-          <p:cNvSpPr/>
-          <p:nvPr/>
-        </p:nvSpPr>
-        <p:spPr>
+          <p:cNvPr id="1417441717" name="Text 7"/>
+          <p:cNvSpPr/>
+          <p:nvPr/>
+        </p:nvSpPr>
+        <p:spPr bwMode="auto">
           <a:xfrm>
             <a:off x="5376743" y="3932396"/>
             <a:ext cx="2432209" cy="303967"/>
@@ -4215,29 +4499,30 @@
                 <a:spcPts val="2350"/>
               </a:lnSpc>
               <a:buNone/>
-            </a:pPr>
-            <a:r>
-              <a:rPr lang="en-US" sz="1900" dirty="0">
+              <a:defRPr/>
+            </a:pPr>
+            <a:r>
+              <a:rPr lang="en-US" sz="1900">
                 <a:solidFill>
                   <a:srgbClr val="E0D6DE"/>
                 </a:solidFill>
-                <a:latin typeface="Anton" pitchFamily="34" charset="0"/>
-                <a:ea typeface="Anton" pitchFamily="34" charset="-122"/>
-                <a:cs typeface="Anton" pitchFamily="34" charset="-120"/>
+                <a:latin typeface="Anton"/>
+                <a:ea typeface="Anton"/>
+                <a:cs typeface="Anton"/>
               </a:rPr>
               <a:t>Data Replication</a:t>
             </a:r>
-            <a:endParaRPr lang="en-US" sz="1900" dirty="0"/>
-          </a:p>
-        </p:txBody>
-      </p:sp>
-      <p:sp>
-        <p:nvSpPr>
-          <p:cNvPr id="10" name="Text 8"/>
-          <p:cNvSpPr/>
-          <p:nvPr/>
-        </p:nvSpPr>
-        <p:spPr>
+            <a:endParaRPr lang="en-US" sz="1900"/>
+          </a:p>
+        </p:txBody>
+      </p:sp>
+      <p:sp>
+        <p:nvSpPr>
+          <p:cNvPr id="2049285369" name="Text 8"/>
+          <p:cNvSpPr/>
+          <p:nvPr/>
+        </p:nvSpPr>
+        <p:spPr bwMode="auto">
           <a:xfrm>
             <a:off x="5376743" y="4336494"/>
             <a:ext cx="3876794" cy="1734503"/>
@@ -4257,29 +4542,30 @@
                 <a:spcPts val="2250"/>
               </a:lnSpc>
               <a:buNone/>
-            </a:pPr>
-            <a:r>
-              <a:rPr lang="en-US" sz="1500" dirty="0">
+              <a:defRPr/>
+            </a:pPr>
+            <a:r>
+              <a:rPr lang="en-US" sz="1500">
                 <a:solidFill>
                   <a:srgbClr val="E0D6DE"/>
                 </a:solidFill>
-                <a:latin typeface="Fira Sans" pitchFamily="34" charset="0"/>
-                <a:ea typeface="Fira Sans" pitchFamily="34" charset="-122"/>
-                <a:cs typeface="Fira Sans" pitchFamily="34" charset="-120"/>
+                <a:latin typeface="Fira Sans"/>
+                <a:ea typeface="Fira Sans"/>
+                <a:cs typeface="Fira Sans"/>
               </a:rPr>
               <a:t>These induced voltage pulses faithfully mirror the timing and polarity of the original digital transitions. This effectively replicates the binary data onto a nearby line that should ideally be silent or carrying unrelated, non-sensitive information.</a:t>
             </a:r>
-            <a:endParaRPr lang="en-US" sz="1500" dirty="0"/>
-          </a:p>
-        </p:txBody>
-      </p:sp>
-      <p:sp>
-        <p:nvSpPr>
-          <p:cNvPr id="11" name="Shape 9"/>
-          <p:cNvSpPr/>
-          <p:nvPr/>
-        </p:nvSpPr>
-        <p:spPr>
+            <a:endParaRPr lang="en-US" sz="1500"/>
+          </a:p>
+        </p:txBody>
+      </p:sp>
+      <p:sp>
+        <p:nvSpPr>
+          <p:cNvPr id="1825277809" name="Shape 9"/>
+          <p:cNvSpPr/>
+          <p:nvPr/>
+        </p:nvSpPr>
+        <p:spPr bwMode="auto">
           <a:xfrm>
             <a:off x="9637752" y="3714988"/>
             <a:ext cx="4311729" cy="3151584"/>
@@ -4302,11 +4588,11 @@
       </p:sp>
       <p:sp>
         <p:nvSpPr>
-          <p:cNvPr id="12" name="Text 10"/>
-          <p:cNvSpPr/>
-          <p:nvPr/>
-        </p:nvSpPr>
-        <p:spPr>
+          <p:cNvPr id="1072763169" name="Text 10"/>
+          <p:cNvSpPr/>
+          <p:nvPr/>
+        </p:nvSpPr>
+        <p:spPr bwMode="auto">
           <a:xfrm>
             <a:off x="9855160" y="3932396"/>
             <a:ext cx="2432209" cy="303967"/>
@@ -4326,29 +4612,30 @@
                 <a:spcPts val="2350"/>
               </a:lnSpc>
               <a:buNone/>
-            </a:pPr>
-            <a:r>
-              <a:rPr lang="en-US" sz="1900" dirty="0">
+              <a:defRPr/>
+            </a:pPr>
+            <a:r>
+              <a:rPr lang="en-US" sz="1900">
                 <a:solidFill>
                   <a:srgbClr val="E0D6DE"/>
                 </a:solidFill>
-                <a:latin typeface="Anton" pitchFamily="34" charset="0"/>
-                <a:ea typeface="Anton" pitchFamily="34" charset="-122"/>
-                <a:cs typeface="Anton" pitchFamily="34" charset="-120"/>
+                <a:latin typeface="Anton"/>
+                <a:ea typeface="Anton"/>
+                <a:cs typeface="Anton"/>
               </a:rPr>
               <a:t>Stealthy Eavesdropping</a:t>
             </a:r>
-            <a:endParaRPr lang="en-US" sz="1900" dirty="0"/>
-          </a:p>
-        </p:txBody>
-      </p:sp>
-      <p:sp>
-        <p:nvSpPr>
-          <p:cNvPr id="13" name="Text 11"/>
-          <p:cNvSpPr/>
-          <p:nvPr/>
-        </p:nvSpPr>
-        <p:spPr>
+            <a:endParaRPr lang="en-US" sz="1900"/>
+          </a:p>
+        </p:txBody>
+      </p:sp>
+      <p:sp>
+        <p:nvSpPr>
+          <p:cNvPr id="1847380713" name="Text 11"/>
+          <p:cNvSpPr/>
+          <p:nvPr/>
+        </p:nvSpPr>
+        <p:spPr bwMode="auto">
           <a:xfrm>
             <a:off x="9855160" y="4336494"/>
             <a:ext cx="3876913" cy="2312670"/>
@@ -4368,40 +4655,39 @@
                 <a:spcPts val="2250"/>
               </a:lnSpc>
               <a:buNone/>
-            </a:pPr>
-            <a:r>
-              <a:rPr lang="en-US" sz="1500" dirty="0">
+              <a:defRPr/>
+            </a:pPr>
+            <a:r>
+              <a:rPr lang="en-US" sz="1500">
                 <a:solidFill>
                   <a:srgbClr val="E0D6DE"/>
                 </a:solidFill>
-                <a:latin typeface="Fira Sans" pitchFamily="34" charset="0"/>
-                <a:ea typeface="Fira Sans" pitchFamily="34" charset="-122"/>
-                <a:cs typeface="Fira Sans" pitchFamily="34" charset="-120"/>
+                <a:latin typeface="Fira Sans"/>
+                <a:ea typeface="Fira Sans"/>
+                <a:cs typeface="Fira Sans"/>
               </a:rPr>
               <a:t>This electromagnetic phenomenon facilitates non-invasive eavesdropping. Attackers do not require direct electrical contact; mere physical proximity between the data line and their sensing equipment is often sufficient to passively "listen" to the electromagnetic emanations and reconstruct the digital signal.</a:t>
             </a:r>
-            <a:endParaRPr lang="en-US" sz="1500" dirty="0"/>
+            <a:endParaRPr lang="en-US" sz="1500"/>
           </a:p>
         </p:txBody>
       </p:sp>
       <p:pic>
         <p:nvPicPr>
-          <p:cNvPr id="14" name="Picture 13"/>
+          <p:cNvPr id="1869873491" name="Picture 13"/>
           <p:cNvPicPr>
             <a:picLocks noChangeAspect="1"/>
           </p:cNvPicPr>
           <p:nvPr/>
         </p:nvPicPr>
-        <p:blipFill>
+        <p:blipFill rotWithShape="1">
           <a:blip r:embed="rId3"/>
-          <a:stretch>
-            <a:fillRect/>
-          </a:stretch>
+          <a:stretch/>
         </p:blipFill>
-        <p:spPr>
+        <p:spPr bwMode="auto">
           <a:xfrm>
             <a:off x="12268200" y="7429500"/>
-            <a:ext cx="2362200" cy="800100"/>
+            <a:ext cx="2362199" cy="800100"/>
           </a:xfrm>
           <a:prstGeom prst="rect">
             <a:avLst/>
@@ -4409,15 +4695,22 @@
         </p:spPr>
       </p:pic>
     </p:spTree>
-    <p:extLst>
-      <p:ext uri="{BB962C8B-B14F-4D97-AF65-F5344CB8AC3E}">
-        <p14:creationId xmlns:p14="http://schemas.microsoft.com/office/powerpoint/2010/main" val="520321689"/>
-      </p:ext>
-    </p:extLst>
   </p:cSld>
   <p:clrMapOvr>
     <a:masterClrMapping/>
   </p:clrMapOvr>
+  <mc:AlternateContent xmlns:mc="http://schemas.openxmlformats.org/markup-compatibility/2006">
+    <mc:Choice xmlns:p159="http://schemas.microsoft.com/office/powerpoint/2015/09/main" xmlns:p14="http://schemas.microsoft.com/office/powerpoint/2010/main" Requires="p159">
+      <p:transition spd="fast" p14:dur="500" advClick="1">
+        <p:fade thruBlk="0"/>
+      </p:transition>
+    </mc:Choice>
+    <mc:Fallback>
+      <p:transition spd="fast" advClick="1">
+        <p:fade thruBlk="0"/>
+      </p:transition>
+    </mc:Fallback>
+  </mc:AlternateContent>
   <p:timing>
     <p:tnLst>
       <p:par>
@@ -4429,15 +4722,15 @@
 </file>
 
 <file path=ppt/slides/slide6.xml><?xml version="1.0" encoding="utf-8"?>
-<p:sld xmlns:a="http://schemas.openxmlformats.org/drawingml/2006/main" xmlns:r="http://schemas.openxmlformats.org/officeDocument/2006/relationships" xmlns:p="http://schemas.openxmlformats.org/presentationml/2006/main">
-  <p:cSld>
+<p:sld xmlns:a="http://schemas.openxmlformats.org/drawingml/2006/main" xmlns:r="http://schemas.openxmlformats.org/officeDocument/2006/relationships" xmlns:p="http://schemas.openxmlformats.org/presentationml/2006/main" xmlns:m="http://schemas.openxmlformats.org/officeDocument/2006/math" xmlns:w="http://schemas.openxmlformats.org/wordprocessingml/2006/main" xmlns:mc="http://schemas.openxmlformats.org/markup-compatibility/2006" showMasterPhAnim="0" showMasterSp="1" show="1">
+  <p:cSld name="">
     <p:spTree>
       <p:nvGrpSpPr>
         <p:cNvPr id="1" name=""/>
         <p:cNvGrpSpPr/>
         <p:nvPr/>
       </p:nvGrpSpPr>
-      <p:grpSpPr>
+      <p:grpSpPr bwMode="auto">
         <a:xfrm>
           <a:off x="0" y="0"/>
           <a:ext cx="0" cy="0"/>
@@ -4447,11 +4740,11 @@
       </p:grpSpPr>
       <p:sp>
         <p:nvSpPr>
-          <p:cNvPr id="2" name="Text 0"/>
-          <p:cNvSpPr/>
-          <p:nvPr/>
-        </p:nvSpPr>
-        <p:spPr>
+          <p:cNvPr id="1834662095" name="Text 0"/>
+          <p:cNvSpPr/>
+          <p:nvPr/>
+        </p:nvSpPr>
+        <p:spPr bwMode="auto">
           <a:xfrm>
             <a:off x="273961" y="786527"/>
             <a:ext cx="5110639" cy="512088"/>
@@ -4471,40 +4764,41 @@
                 <a:spcPts val="4000"/>
               </a:lnSpc>
               <a:buNone/>
-            </a:pPr>
-            <a:r>
-              <a:rPr lang="en-US" sz="3200" dirty="0">
+              <a:defRPr/>
+            </a:pPr>
+            <a:r>
+              <a:rPr lang="en-US" sz="3200">
                 <a:solidFill>
                   <a:srgbClr val="FA95AF"/>
                 </a:solidFill>
-                <a:latin typeface="Anton" pitchFamily="34" charset="0"/>
-                <a:ea typeface="Anton" pitchFamily="34" charset="-122"/>
-                <a:cs typeface="Anton" pitchFamily="34" charset="-120"/>
+                <a:latin typeface="Anton"/>
+                <a:ea typeface="Anton"/>
+                <a:cs typeface="Anton"/>
               </a:rPr>
               <a:t>The Math Behind </a:t>
             </a:r>
             <a:r>
-              <a:rPr lang="en-US" sz="3200" dirty="0" smtClean="0">
+              <a:rPr lang="en-US" sz="3200">
                 <a:solidFill>
                   <a:srgbClr val="FA95AF"/>
                 </a:solidFill>
-                <a:latin typeface="Anton" pitchFamily="34" charset="0"/>
-                <a:ea typeface="Anton" pitchFamily="34" charset="-122"/>
-                <a:cs typeface="Anton" pitchFamily="34" charset="-120"/>
+                <a:latin typeface="Anton"/>
+                <a:ea typeface="Anton"/>
+                <a:cs typeface="Anton"/>
               </a:rPr>
               <a:t>Leakage:</a:t>
             </a:r>
-            <a:endParaRPr lang="en-US" sz="3200" dirty="0"/>
-          </a:p>
-        </p:txBody>
-      </p:sp>
-      <p:sp>
-        <p:nvSpPr>
-          <p:cNvPr id="3" name="Text 1"/>
-          <p:cNvSpPr/>
-          <p:nvPr/>
-        </p:nvSpPr>
-        <p:spPr>
+            <a:endParaRPr lang="en-US" sz="3200"/>
+          </a:p>
+        </p:txBody>
+      </p:sp>
+      <p:sp>
+        <p:nvSpPr>
+          <p:cNvPr id="222784319" name="Text 1"/>
+          <p:cNvSpPr/>
+          <p:nvPr/>
+        </p:nvSpPr>
+        <p:spPr bwMode="auto">
           <a:xfrm>
             <a:off x="273962" y="1576030"/>
             <a:ext cx="13196649" cy="623411"/>
@@ -4524,29 +4818,30 @@
                 <a:spcPts val="2450"/>
               </a:lnSpc>
               <a:buNone/>
-            </a:pPr>
-            <a:r>
-              <a:rPr lang="en-US" sz="1600" dirty="0">
+              <a:defRPr/>
+            </a:pPr>
+            <a:r>
+              <a:rPr lang="en-US" sz="1600">
                 <a:solidFill>
                   <a:srgbClr val="E0D6DE"/>
                 </a:solidFill>
-                <a:latin typeface="Fira Sans" pitchFamily="34" charset="0"/>
-                <a:ea typeface="Fira Sans" pitchFamily="34" charset="-122"/>
-                <a:cs typeface="Fira Sans" pitchFamily="34" charset="-120"/>
+                <a:latin typeface="Fira Sans"/>
+                <a:ea typeface="Fira Sans"/>
+                <a:cs typeface="Fira Sans"/>
               </a:rPr>
               <a:t>The induced voltage, the very essence of information leakage, is dictated by a critical confluence of factors. This combined leakage equation encapsulates how the change in current in one cable creates a measurable voltage in an adjacent, unshielded conductor:</a:t>
             </a:r>
-            <a:endParaRPr lang="en-US" sz="1600" dirty="0"/>
-          </a:p>
-        </p:txBody>
-      </p:sp>
-      <p:sp>
-        <p:nvSpPr>
-          <p:cNvPr id="4" name="Text 2"/>
-          <p:cNvSpPr/>
-          <p:nvPr/>
-        </p:nvSpPr>
-        <p:spPr>
+            <a:endParaRPr lang="en-US" sz="1600"/>
+          </a:p>
+        </p:txBody>
+      </p:sp>
+      <p:sp>
+        <p:nvSpPr>
+          <p:cNvPr id="2128938650" name="Text 2"/>
+          <p:cNvSpPr/>
+          <p:nvPr/>
+        </p:nvSpPr>
+        <p:spPr bwMode="auto">
           <a:xfrm>
             <a:off x="273962" y="2433518"/>
             <a:ext cx="13196649" cy="589121"/>
@@ -4566,26 +4861,25 @@
                 <a:spcPts val="2750"/>
               </a:lnSpc>
               <a:buNone/>
-            </a:pPr>
-            <a:endParaRPr lang="en-US" sz="1800" dirty="0"/>
+              <a:defRPr/>
+            </a:pPr>
+            <a:endParaRPr lang="en-US" sz="1800"/>
           </a:p>
         </p:txBody>
       </p:sp>
       <p:pic>
         <p:nvPicPr>
-          <p:cNvPr id="5" name="Image 0" descr="preencoded.png"/>
+          <p:cNvPr id="1232608694" name="Image 0" descr="preencoded.png"/>
           <p:cNvPicPr>
             <a:picLocks noChangeAspect="1"/>
           </p:cNvPicPr>
           <p:nvPr/>
         </p:nvPicPr>
-        <p:blipFill>
+        <p:blipFill rotWithShape="1">
           <a:blip r:embed="rId3"/>
-          <a:stretch>
-            <a:fillRect/>
-          </a:stretch>
+          <a:stretch/>
         </p:blipFill>
-        <p:spPr>
+        <p:spPr bwMode="auto">
           <a:xfrm>
             <a:off x="273962" y="2433518"/>
             <a:ext cx="13196649" cy="589121"/>
@@ -4597,11 +4891,11 @@
       </p:pic>
       <p:sp>
         <p:nvSpPr>
-          <p:cNvPr id="6" name="Text 3"/>
-          <p:cNvSpPr/>
-          <p:nvPr/>
-        </p:nvSpPr>
-        <p:spPr>
+          <p:cNvPr id="1999459613" name="Text 3"/>
+          <p:cNvSpPr/>
+          <p:nvPr/>
+        </p:nvSpPr>
+        <p:spPr bwMode="auto">
           <a:xfrm>
             <a:off x="273962" y="3256716"/>
             <a:ext cx="13196649" cy="623411"/>
@@ -4621,29 +4915,30 @@
                 <a:spcPts val="2450"/>
               </a:lnSpc>
               <a:buNone/>
-            </a:pPr>
-            <a:r>
-              <a:rPr lang="en-US" sz="1600" dirty="0">
+              <a:defRPr/>
+            </a:pPr>
+            <a:r>
+              <a:rPr lang="en-US" sz="1600">
                 <a:solidFill>
                   <a:srgbClr val="E0D6DE"/>
                 </a:solidFill>
-                <a:latin typeface="Fira Sans" pitchFamily="34" charset="0"/>
-                <a:ea typeface="Fira Sans" pitchFamily="34" charset="-122"/>
-                <a:cs typeface="Fira Sans" pitchFamily="34" charset="-120"/>
+                <a:latin typeface="Fira Sans"/>
+                <a:ea typeface="Fira Sans"/>
+                <a:cs typeface="Fira Sans"/>
               </a:rPr>
               <a:t>This elegant equation reveals the direct and inverse relationships that govern the susceptibility to crosstalk. Understanding each variable is paramount for effective mitigation.</a:t>
             </a:r>
-            <a:endParaRPr lang="en-US" sz="1600" dirty="0"/>
-          </a:p>
-        </p:txBody>
-      </p:sp>
-      <p:sp>
-        <p:nvSpPr>
-          <p:cNvPr id="7" name="Shape 4"/>
-          <p:cNvSpPr/>
-          <p:nvPr/>
-        </p:nvSpPr>
-        <p:spPr>
+            <a:endParaRPr lang="en-US" sz="1600"/>
+          </a:p>
+        </p:txBody>
+      </p:sp>
+      <p:sp>
+        <p:nvSpPr>
+          <p:cNvPr id="2016108553" name="Shape 4"/>
+          <p:cNvSpPr/>
+          <p:nvPr/>
+        </p:nvSpPr>
+        <p:spPr bwMode="auto">
           <a:xfrm>
             <a:off x="273962" y="4088130"/>
             <a:ext cx="4275534" cy="2886670"/>
@@ -4661,11 +4956,11 @@
       </p:sp>
       <p:sp>
         <p:nvSpPr>
-          <p:cNvPr id="8" name="Shape 5"/>
-          <p:cNvSpPr/>
-          <p:nvPr/>
-        </p:nvSpPr>
-        <p:spPr>
+          <p:cNvPr id="896720919" name="Shape 5"/>
+          <p:cNvSpPr/>
+          <p:nvPr/>
+        </p:nvSpPr>
+        <p:spPr bwMode="auto">
           <a:xfrm>
             <a:off x="478750" y="4292917"/>
             <a:ext cx="614482" cy="614482"/>
@@ -4683,11 +4978,11 @@
       </p:sp>
       <p:sp>
         <p:nvSpPr>
-          <p:cNvPr id="9" name="Text 6"/>
-          <p:cNvSpPr/>
-          <p:nvPr/>
-        </p:nvSpPr>
-        <p:spPr>
+          <p:cNvPr id="558180981" name="Text 6"/>
+          <p:cNvSpPr/>
+          <p:nvPr/>
+        </p:nvSpPr>
+        <p:spPr bwMode="auto">
           <a:xfrm>
             <a:off x="647700" y="4427339"/>
             <a:ext cx="276463" cy="345638"/>
@@ -4707,29 +5002,30 @@
                 <a:spcPts val="3300"/>
               </a:lnSpc>
               <a:buNone/>
-            </a:pPr>
-            <a:r>
-              <a:rPr lang="en-US" sz="2150" dirty="0">
+              <a:defRPr/>
+            </a:pPr>
+            <a:r>
+              <a:rPr lang="en-US" sz="2150">
                 <a:solidFill>
                   <a:srgbClr val="000000"/>
                 </a:solidFill>
-                <a:latin typeface="Anton" pitchFamily="34" charset="0"/>
-                <a:ea typeface="Anton" pitchFamily="34" charset="-122"/>
-                <a:cs typeface="Anton" pitchFamily="34" charset="-120"/>
+                <a:latin typeface="Anton"/>
+                <a:ea typeface="Anton"/>
+                <a:cs typeface="Anton"/>
               </a:rPr>
               <a:t>1</a:t>
             </a:r>
-            <a:endParaRPr lang="en-US" sz="2150" dirty="0"/>
-          </a:p>
-        </p:txBody>
-      </p:sp>
-      <p:sp>
-        <p:nvSpPr>
-          <p:cNvPr id="10" name="Text 7"/>
-          <p:cNvSpPr/>
-          <p:nvPr/>
-        </p:nvSpPr>
-        <p:spPr>
+            <a:endParaRPr lang="en-US" sz="2150"/>
+          </a:p>
+        </p:txBody>
+      </p:sp>
+      <p:sp>
+        <p:nvSpPr>
+          <p:cNvPr id="1213420541" name="Text 7"/>
+          <p:cNvSpPr/>
+          <p:nvPr/>
+        </p:nvSpPr>
+        <p:spPr bwMode="auto">
           <a:xfrm>
             <a:off x="478750" y="5092303"/>
             <a:ext cx="2560320" cy="319921"/>
@@ -4749,29 +5045,30 @@
                 <a:spcPts val="2500"/>
               </a:lnSpc>
               <a:buNone/>
-            </a:pPr>
-            <a:r>
-              <a:rPr lang="en-US" sz="2000" dirty="0">
+              <a:defRPr/>
+            </a:pPr>
+            <a:r>
+              <a:rPr lang="en-US" sz="2000">
                 <a:solidFill>
                   <a:srgbClr val="E0D6DE"/>
                 </a:solidFill>
-                <a:latin typeface="Anton" pitchFamily="34" charset="0"/>
-                <a:ea typeface="Anton" pitchFamily="34" charset="-122"/>
-                <a:cs typeface="Anton" pitchFamily="34" charset="-120"/>
+                <a:latin typeface="Anton"/>
+                <a:ea typeface="Anton"/>
+                <a:cs typeface="Anton"/>
               </a:rPr>
               <a:t>dI/dt: Signal Speed</a:t>
             </a:r>
-            <a:endParaRPr lang="en-US" sz="2000" dirty="0"/>
-          </a:p>
-        </p:txBody>
-      </p:sp>
-      <p:sp>
-        <p:nvSpPr>
-          <p:cNvPr id="11" name="Text 8"/>
-          <p:cNvSpPr/>
-          <p:nvPr/>
-        </p:nvSpPr>
-        <p:spPr>
+            <a:endParaRPr lang="en-US" sz="2000"/>
+          </a:p>
+        </p:txBody>
+      </p:sp>
+      <p:sp>
+        <p:nvSpPr>
+          <p:cNvPr id="657983623" name="Text 8"/>
+          <p:cNvSpPr/>
+          <p:nvPr/>
+        </p:nvSpPr>
+        <p:spPr bwMode="auto">
           <a:xfrm>
             <a:off x="478750" y="5523190"/>
             <a:ext cx="3865959" cy="1246823"/>
@@ -4791,51 +5088,52 @@
                 <a:spcPts val="2450"/>
               </a:lnSpc>
               <a:buNone/>
-            </a:pPr>
-            <a:r>
-              <a:rPr lang="en-US" sz="1600" dirty="0">
+              <a:defRPr/>
+            </a:pPr>
+            <a:r>
+              <a:rPr lang="en-US" sz="1600">
                 <a:solidFill>
                   <a:srgbClr val="E0D6DE"/>
                 </a:solidFill>
-                <a:latin typeface="Fira Sans" pitchFamily="34" charset="0"/>
-                <a:ea typeface="Fira Sans" pitchFamily="34" charset="-122"/>
-                <a:cs typeface="Fira Sans" pitchFamily="34" charset="-120"/>
+                <a:latin typeface="Fira Sans"/>
+                <a:ea typeface="Fira Sans"/>
+                <a:cs typeface="Fira Sans"/>
               </a:rPr>
               <a:t>The faster the </a:t>
             </a:r>
             <a:r>
-              <a:rPr lang="en-US" sz="1600" b="1" dirty="0">
+              <a:rPr lang="en-US" sz="1600" b="1">
                 <a:solidFill>
                   <a:srgbClr val="E0D6DE"/>
                 </a:solidFill>
-                <a:latin typeface="Fira Sans" pitchFamily="34" charset="0"/>
-                <a:ea typeface="Fira Sans" pitchFamily="34" charset="-122"/>
-                <a:cs typeface="Fira Sans" pitchFamily="34" charset="-120"/>
+                <a:latin typeface="Fira Sans"/>
+                <a:ea typeface="Fira Sans"/>
+                <a:cs typeface="Fira Sans"/>
               </a:rPr>
               <a:t>rate of change of current</a:t>
             </a:r>
             <a:r>
-              <a:rPr lang="en-US" sz="1600" dirty="0">
+              <a:rPr lang="en-US" sz="1600">
                 <a:solidFill>
                   <a:srgbClr val="E0D6DE"/>
                 </a:solidFill>
-                <a:latin typeface="Fira Sans" pitchFamily="34" charset="0"/>
-                <a:ea typeface="Fira Sans" pitchFamily="34" charset="-122"/>
-                <a:cs typeface="Fira Sans" pitchFamily="34" charset="-120"/>
+                <a:latin typeface="Fira Sans"/>
+                <a:ea typeface="Fira Sans"/>
+                <a:cs typeface="Fira Sans"/>
               </a:rPr>
               <a:t>, the stronger the induced voltage. High-frequency digital signals with sharp edges are inherently riskier.</a:t>
             </a:r>
-            <a:endParaRPr lang="en-US" sz="1600" dirty="0"/>
-          </a:p>
-        </p:txBody>
-      </p:sp>
-      <p:sp>
-        <p:nvSpPr>
-          <p:cNvPr id="12" name="Shape 9"/>
-          <p:cNvSpPr/>
-          <p:nvPr/>
-        </p:nvSpPr>
-        <p:spPr>
+            <a:endParaRPr lang="en-US" sz="1600"/>
+          </a:p>
+        </p:txBody>
+      </p:sp>
+      <p:sp>
+        <p:nvSpPr>
+          <p:cNvPr id="1961519801" name="Shape 9"/>
+          <p:cNvSpPr/>
+          <p:nvPr/>
+        </p:nvSpPr>
+        <p:spPr bwMode="auto">
           <a:xfrm>
             <a:off x="4734401" y="4088130"/>
             <a:ext cx="4275653" cy="2886670"/>
@@ -4853,11 +5151,11 @@
       </p:sp>
       <p:sp>
         <p:nvSpPr>
-          <p:cNvPr id="13" name="Shape 10"/>
-          <p:cNvSpPr/>
-          <p:nvPr/>
-        </p:nvSpPr>
-        <p:spPr>
+          <p:cNvPr id="2116953596" name="Shape 10"/>
+          <p:cNvSpPr/>
+          <p:nvPr/>
+        </p:nvSpPr>
+        <p:spPr bwMode="auto">
           <a:xfrm>
             <a:off x="4939188" y="4292917"/>
             <a:ext cx="614482" cy="614482"/>
@@ -4875,11 +5173,11 @@
       </p:sp>
       <p:sp>
         <p:nvSpPr>
-          <p:cNvPr id="14" name="Text 11"/>
-          <p:cNvSpPr/>
-          <p:nvPr/>
-        </p:nvSpPr>
-        <p:spPr>
+          <p:cNvPr id="312182451" name="Text 11"/>
+          <p:cNvSpPr/>
+          <p:nvPr/>
+        </p:nvSpPr>
+        <p:spPr bwMode="auto">
           <a:xfrm>
             <a:off x="5108138" y="4427339"/>
             <a:ext cx="276463" cy="345638"/>
@@ -4899,29 +5197,30 @@
                 <a:spcPts val="3300"/>
               </a:lnSpc>
               <a:buNone/>
-            </a:pPr>
-            <a:r>
-              <a:rPr lang="en-US" sz="2150" dirty="0">
+              <a:defRPr/>
+            </a:pPr>
+            <a:r>
+              <a:rPr lang="en-US" sz="2150">
                 <a:solidFill>
                   <a:srgbClr val="000000"/>
                 </a:solidFill>
-                <a:latin typeface="Anton" pitchFamily="34" charset="0"/>
-                <a:ea typeface="Anton" pitchFamily="34" charset="-122"/>
-                <a:cs typeface="Anton" pitchFamily="34" charset="-120"/>
+                <a:latin typeface="Anton"/>
+                <a:ea typeface="Anton"/>
+                <a:cs typeface="Anton"/>
               </a:rPr>
               <a:t>2</a:t>
             </a:r>
-            <a:endParaRPr lang="en-US" sz="2150" dirty="0"/>
-          </a:p>
-        </p:txBody>
-      </p:sp>
-      <p:sp>
-        <p:nvSpPr>
-          <p:cNvPr id="15" name="Text 12"/>
-          <p:cNvSpPr/>
-          <p:nvPr/>
-        </p:nvSpPr>
-        <p:spPr>
+            <a:endParaRPr lang="en-US" sz="2150"/>
+          </a:p>
+        </p:txBody>
+      </p:sp>
+      <p:sp>
+        <p:nvSpPr>
+          <p:cNvPr id="1671404094" name="Text 12"/>
+          <p:cNvSpPr/>
+          <p:nvPr/>
+        </p:nvSpPr>
+        <p:spPr bwMode="auto">
           <a:xfrm>
             <a:off x="4939188" y="5092303"/>
             <a:ext cx="2560320" cy="319921"/>
@@ -4941,29 +5240,30 @@
                 <a:spcPts val="2500"/>
               </a:lnSpc>
               <a:buNone/>
-            </a:pPr>
-            <a:r>
-              <a:rPr lang="en-US" sz="2000" dirty="0">
+              <a:defRPr/>
+            </a:pPr>
+            <a:r>
+              <a:rPr lang="en-US" sz="2000">
                 <a:solidFill>
                   <a:srgbClr val="E0D6DE"/>
                 </a:solidFill>
-                <a:latin typeface="Anton" pitchFamily="34" charset="0"/>
-                <a:ea typeface="Anton" pitchFamily="34" charset="-122"/>
-                <a:cs typeface="Anton" pitchFamily="34" charset="-120"/>
+                <a:latin typeface="Anton"/>
+                <a:ea typeface="Anton"/>
+                <a:cs typeface="Anton"/>
               </a:rPr>
               <a:t>r: Distance</a:t>
             </a:r>
-            <a:endParaRPr lang="en-US" sz="2000" dirty="0"/>
-          </a:p>
-        </p:txBody>
-      </p:sp>
-      <p:sp>
-        <p:nvSpPr>
-          <p:cNvPr id="16" name="Text 13"/>
-          <p:cNvSpPr/>
-          <p:nvPr/>
-        </p:nvSpPr>
-        <p:spPr>
+            <a:endParaRPr lang="en-US" sz="2000"/>
+          </a:p>
+        </p:txBody>
+      </p:sp>
+      <p:sp>
+        <p:nvSpPr>
+          <p:cNvPr id="2074200874" name="Text 13"/>
+          <p:cNvSpPr/>
+          <p:nvPr/>
+        </p:nvSpPr>
+        <p:spPr bwMode="auto">
           <a:xfrm>
             <a:off x="4939188" y="5523190"/>
             <a:ext cx="3866078" cy="1246823"/>
@@ -4983,51 +5283,52 @@
                 <a:spcPts val="2450"/>
               </a:lnSpc>
               <a:buNone/>
-            </a:pPr>
-            <a:r>
-              <a:rPr lang="en-US" sz="1600" dirty="0">
+              <a:defRPr/>
+            </a:pPr>
+            <a:r>
+              <a:rPr lang="en-US" sz="1600">
                 <a:solidFill>
                   <a:srgbClr val="E0D6DE"/>
                 </a:solidFill>
-                <a:latin typeface="Fira Sans" pitchFamily="34" charset="0"/>
-                <a:ea typeface="Fira Sans" pitchFamily="34" charset="-122"/>
-                <a:cs typeface="Fira Sans" pitchFamily="34" charset="-120"/>
+                <a:latin typeface="Fira Sans"/>
+                <a:ea typeface="Fira Sans"/>
+                <a:cs typeface="Fira Sans"/>
               </a:rPr>
               <a:t>The induced voltage is </a:t>
             </a:r>
             <a:r>
-              <a:rPr lang="en-US" sz="1600" b="1" dirty="0">
+              <a:rPr lang="en-US" sz="1600" b="1">
                 <a:solidFill>
                   <a:srgbClr val="E0D6DE"/>
                 </a:solidFill>
-                <a:latin typeface="Fira Sans" pitchFamily="34" charset="0"/>
-                <a:ea typeface="Fira Sans" pitchFamily="34" charset="-122"/>
-                <a:cs typeface="Fira Sans" pitchFamily="34" charset="-120"/>
+                <a:latin typeface="Fira Sans"/>
+                <a:ea typeface="Fira Sans"/>
+                <a:cs typeface="Fira Sans"/>
               </a:rPr>
               <a:t>inversely proportional</a:t>
             </a:r>
             <a:r>
-              <a:rPr lang="en-US" sz="1600" dirty="0">
+              <a:rPr lang="en-US" sz="1600">
                 <a:solidFill>
                   <a:srgbClr val="E0D6DE"/>
                 </a:solidFill>
-                <a:latin typeface="Fira Sans" pitchFamily="34" charset="0"/>
-                <a:ea typeface="Fira Sans" pitchFamily="34" charset="-122"/>
-                <a:cs typeface="Fira Sans" pitchFamily="34" charset="-120"/>
+                <a:latin typeface="Fira Sans"/>
+                <a:ea typeface="Fira Sans"/>
+                <a:cs typeface="Fira Sans"/>
               </a:rPr>
               <a:t> to the distance between the source and victim cables. Closer proximity significantly amplifies leakage.</a:t>
             </a:r>
-            <a:endParaRPr lang="en-US" sz="1600" dirty="0"/>
-          </a:p>
-        </p:txBody>
-      </p:sp>
-      <p:sp>
-        <p:nvSpPr>
-          <p:cNvPr id="17" name="Shape 14"/>
-          <p:cNvSpPr/>
-          <p:nvPr/>
-        </p:nvSpPr>
-        <p:spPr>
+            <a:endParaRPr lang="en-US" sz="1600"/>
+          </a:p>
+        </p:txBody>
+      </p:sp>
+      <p:sp>
+        <p:nvSpPr>
+          <p:cNvPr id="1279654739" name="Shape 14"/>
+          <p:cNvSpPr/>
+          <p:nvPr/>
+        </p:nvSpPr>
+        <p:spPr bwMode="auto">
           <a:xfrm>
             <a:off x="9194958" y="4088130"/>
             <a:ext cx="4275534" cy="2886670"/>
@@ -5045,11 +5346,11 @@
       </p:sp>
       <p:sp>
         <p:nvSpPr>
-          <p:cNvPr id="18" name="Shape 15"/>
-          <p:cNvSpPr/>
-          <p:nvPr/>
-        </p:nvSpPr>
-        <p:spPr>
+          <p:cNvPr id="1946229031" name="Shape 15"/>
+          <p:cNvSpPr/>
+          <p:nvPr/>
+        </p:nvSpPr>
+        <p:spPr bwMode="auto">
           <a:xfrm>
             <a:off x="9399746" y="4292917"/>
             <a:ext cx="614482" cy="614482"/>
@@ -5067,11 +5368,11 @@
       </p:sp>
       <p:sp>
         <p:nvSpPr>
-          <p:cNvPr id="19" name="Text 16"/>
-          <p:cNvSpPr/>
-          <p:nvPr/>
-        </p:nvSpPr>
-        <p:spPr>
+          <p:cNvPr id="1646656259" name="Text 16"/>
+          <p:cNvSpPr/>
+          <p:nvPr/>
+        </p:nvSpPr>
+        <p:spPr bwMode="auto">
           <a:xfrm>
             <a:off x="9568695" y="4427339"/>
             <a:ext cx="276463" cy="345638"/>
@@ -5091,29 +5392,30 @@
                 <a:spcPts val="3300"/>
               </a:lnSpc>
               <a:buNone/>
-            </a:pPr>
-            <a:r>
-              <a:rPr lang="en-US" sz="2150" dirty="0">
+              <a:defRPr/>
+            </a:pPr>
+            <a:r>
+              <a:rPr lang="en-US" sz="2150">
                 <a:solidFill>
                   <a:srgbClr val="000000"/>
                 </a:solidFill>
-                <a:latin typeface="Anton" pitchFamily="34" charset="0"/>
-                <a:ea typeface="Anton" pitchFamily="34" charset="-122"/>
-                <a:cs typeface="Anton" pitchFamily="34" charset="-120"/>
+                <a:latin typeface="Anton"/>
+                <a:ea typeface="Anton"/>
+                <a:cs typeface="Anton"/>
               </a:rPr>
               <a:t>3</a:t>
             </a:r>
-            <a:endParaRPr lang="en-US" sz="2150" dirty="0"/>
-          </a:p>
-        </p:txBody>
-      </p:sp>
-      <p:sp>
-        <p:nvSpPr>
-          <p:cNvPr id="20" name="Text 17"/>
-          <p:cNvSpPr/>
-          <p:nvPr/>
-        </p:nvSpPr>
-        <p:spPr>
+            <a:endParaRPr lang="en-US" sz="2150"/>
+          </a:p>
+        </p:txBody>
+      </p:sp>
+      <p:sp>
+        <p:nvSpPr>
+          <p:cNvPr id="177082080" name="Text 17"/>
+          <p:cNvSpPr/>
+          <p:nvPr/>
+        </p:nvSpPr>
+        <p:spPr bwMode="auto">
           <a:xfrm>
             <a:off x="9399746" y="5092303"/>
             <a:ext cx="2577108" cy="319921"/>
@@ -5133,29 +5435,30 @@
                 <a:spcPts val="2500"/>
               </a:lnSpc>
               <a:buNone/>
-            </a:pPr>
-            <a:r>
-              <a:rPr lang="en-US" sz="2000" dirty="0">
+              <a:defRPr/>
+            </a:pPr>
+            <a:r>
+              <a:rPr lang="en-US" sz="2000">
                 <a:solidFill>
                   <a:srgbClr val="E0D6DE"/>
                 </a:solidFill>
-                <a:latin typeface="Anton" pitchFamily="34" charset="0"/>
-                <a:ea typeface="Anton" pitchFamily="34" charset="-122"/>
-                <a:cs typeface="Anton" pitchFamily="34" charset="-120"/>
+                <a:latin typeface="Anton"/>
+                <a:ea typeface="Anton"/>
+                <a:cs typeface="Anton"/>
               </a:rPr>
               <a:t>A ⋅ cos(θ): Coupling Area</a:t>
             </a:r>
-            <a:endParaRPr lang="en-US" sz="2000" dirty="0"/>
-          </a:p>
-        </p:txBody>
-      </p:sp>
-      <p:sp>
-        <p:nvSpPr>
-          <p:cNvPr id="21" name="Text 18"/>
-          <p:cNvSpPr/>
-          <p:nvPr/>
-        </p:nvSpPr>
-        <p:spPr>
+            <a:endParaRPr lang="en-US" sz="2000"/>
+          </a:p>
+        </p:txBody>
+      </p:sp>
+      <p:sp>
+        <p:nvSpPr>
+          <p:cNvPr id="1703393767" name="Text 18"/>
+          <p:cNvSpPr/>
+          <p:nvPr/>
+        </p:nvSpPr>
+        <p:spPr bwMode="auto">
           <a:xfrm>
             <a:off x="9399746" y="5523190"/>
             <a:ext cx="3865959" cy="1246823"/>
@@ -5175,51 +5478,52 @@
                 <a:spcPts val="2450"/>
               </a:lnSpc>
               <a:buNone/>
-            </a:pPr>
-            <a:r>
-              <a:rPr lang="en-US" sz="1600" dirty="0">
+              <a:defRPr/>
+            </a:pPr>
+            <a:r>
+              <a:rPr lang="en-US" sz="1600">
                 <a:solidFill>
                   <a:srgbClr val="E0D6DE"/>
                 </a:solidFill>
-                <a:latin typeface="Fira Sans" pitchFamily="34" charset="0"/>
-                <a:ea typeface="Fira Sans" pitchFamily="34" charset="-122"/>
-                <a:cs typeface="Fira Sans" pitchFamily="34" charset="-120"/>
+                <a:latin typeface="Fira Sans"/>
+                <a:ea typeface="Fira Sans"/>
+                <a:cs typeface="Fira Sans"/>
               </a:rPr>
               <a:t>This term accounts for the </a:t>
             </a:r>
             <a:r>
-              <a:rPr lang="en-US" sz="1600" b="1" dirty="0">
+              <a:rPr lang="en-US" sz="1600" b="1">
                 <a:solidFill>
                   <a:srgbClr val="E0D6DE"/>
                 </a:solidFill>
-                <a:latin typeface="Fira Sans" pitchFamily="34" charset="0"/>
-                <a:ea typeface="Fira Sans" pitchFamily="34" charset="-122"/>
-                <a:cs typeface="Fira Sans" pitchFamily="34" charset="-120"/>
+                <a:latin typeface="Fira Sans"/>
+                <a:ea typeface="Fira Sans"/>
+                <a:cs typeface="Fira Sans"/>
               </a:rPr>
               <a:t>effective area and orientation</a:t>
             </a:r>
             <a:r>
-              <a:rPr lang="en-US" sz="1600" dirty="0">
+              <a:rPr lang="en-US" sz="1600">
                 <a:solidFill>
                   <a:srgbClr val="E0D6DE"/>
                 </a:solidFill>
-                <a:latin typeface="Fira Sans" pitchFamily="34" charset="0"/>
-                <a:ea typeface="Fira Sans" pitchFamily="34" charset="-122"/>
-                <a:cs typeface="Fira Sans" pitchFamily="34" charset="-120"/>
+                <a:latin typeface="Fira Sans"/>
+                <a:ea typeface="Fira Sans"/>
+                <a:cs typeface="Fira Sans"/>
               </a:rPr>
               <a:t> of magnetic field lines passing through the victim's loop. Parallel routing maximises this coupling.</a:t>
             </a:r>
-            <a:endParaRPr lang="en-US" sz="1600" dirty="0"/>
-          </a:p>
-        </p:txBody>
-      </p:sp>
-      <p:sp>
-        <p:nvSpPr>
-          <p:cNvPr id="22" name="Rectangle 21"/>
-          <p:cNvSpPr/>
-          <p:nvPr/>
-        </p:nvSpPr>
-        <p:spPr>
+            <a:endParaRPr lang="en-US" sz="1600"/>
+          </a:p>
+        </p:txBody>
+      </p:sp>
+      <p:sp>
+        <p:nvSpPr>
+          <p:cNvPr id="715925135" name="Rectangle 21"/>
+          <p:cNvSpPr/>
+          <p:nvPr/>
+        </p:nvSpPr>
+        <p:spPr bwMode="auto">
           <a:xfrm>
             <a:off x="12279274" y="7429500"/>
             <a:ext cx="2364581" cy="800100"/>
@@ -5254,21 +5558,30 @@
           <a:bodyPr rtlCol="0" anchor="ctr"/>
           <a:lstStyle/>
           <a:p>
-            <a:pPr algn="ctr"/>
+            <a:pPr algn="ctr">
+              <a:defRPr/>
+            </a:pPr>
             <a:endParaRPr lang="en-US"/>
           </a:p>
         </p:txBody>
       </p:sp>
     </p:spTree>
-    <p:extLst>
-      <p:ext uri="{BB962C8B-B14F-4D97-AF65-F5344CB8AC3E}">
-        <p14:creationId xmlns:p14="http://schemas.microsoft.com/office/powerpoint/2010/main" val="312562446"/>
-      </p:ext>
-    </p:extLst>
   </p:cSld>
   <p:clrMapOvr>
     <a:masterClrMapping/>
   </p:clrMapOvr>
+  <mc:AlternateContent xmlns:mc="http://schemas.openxmlformats.org/markup-compatibility/2006">
+    <mc:Choice xmlns:p159="http://schemas.microsoft.com/office/powerpoint/2015/09/main" xmlns:p14="http://schemas.microsoft.com/office/powerpoint/2010/main" Requires="p159">
+      <p:transition spd="fast" p14:dur="500" advClick="1">
+        <p:fade thruBlk="0"/>
+      </p:transition>
+    </mc:Choice>
+    <mc:Fallback>
+      <p:transition spd="fast" advClick="1">
+        <p:fade thruBlk="0"/>
+      </p:transition>
+    </mc:Fallback>
+  </mc:AlternateContent>
   <p:timing>
     <p:tnLst>
       <p:par>
@@ -5280,7 +5593,7 @@
 </file>
 
 <file path=ppt/slides/slide7.xml><?xml version="1.0" encoding="utf-8"?>
-<p:sld xmlns:a="http://schemas.openxmlformats.org/drawingml/2006/main" xmlns:r="http://schemas.openxmlformats.org/officeDocument/2006/relationships" xmlns:p="http://schemas.openxmlformats.org/presentationml/2006/main">
+<p:sld xmlns:a="http://schemas.openxmlformats.org/drawingml/2006/main" xmlns:r="http://schemas.openxmlformats.org/officeDocument/2006/relationships" xmlns:p="http://schemas.openxmlformats.org/presentationml/2006/main" xmlns:m="http://schemas.openxmlformats.org/officeDocument/2006/math" xmlns:w="http://schemas.openxmlformats.org/wordprocessingml/2006/main" xmlns:mc="http://schemas.openxmlformats.org/markup-compatibility/2006" showMasterPhAnim="0" showMasterSp="1" show="1">
   <p:cSld name="Slide 7">
     <p:spTree>
       <p:nvGrpSpPr>
@@ -5288,7 +5601,7 @@
         <p:cNvGrpSpPr/>
         <p:nvPr/>
       </p:nvGrpSpPr>
-      <p:grpSpPr>
+      <p:grpSpPr bwMode="auto">
         <a:xfrm>
           <a:off x="0" y="0"/>
           <a:ext cx="0" cy="0"/>
@@ -5298,25 +5611,17 @@
       </p:grpSpPr>
       <p:pic>
         <p:nvPicPr>
-          <p:cNvPr id="2" name="Image 0"/>
+          <p:cNvPr id="1993915551" name="Image 0"/>
           <p:cNvPicPr>
             <a:picLocks noChangeAspect="1"/>
           </p:cNvPicPr>
           <p:nvPr/>
         </p:nvPicPr>
-        <p:blipFill>
-          <a:blip r:embed="rId3">
-            <a:extLst>
-              <a:ext uri="{28A0092B-C50C-407E-A947-70E740481C1C}">
-                <a14:useLocalDpi xmlns:a14="http://schemas.microsoft.com/office/drawing/2010/main" val="0"/>
-              </a:ext>
-            </a:extLst>
-          </a:blip>
-          <a:stretch>
-            <a:fillRect/>
-          </a:stretch>
+        <p:blipFill rotWithShape="1">
+          <a:blip r:embed="rId3"/>
+          <a:stretch/>
         </p:blipFill>
-        <p:spPr>
+        <p:spPr bwMode="auto">
           <a:xfrm>
             <a:off x="57150" y="1316712"/>
             <a:ext cx="5900738" cy="5455562"/>
@@ -5342,11 +5647,11 @@
       </p:pic>
       <p:sp>
         <p:nvSpPr>
-          <p:cNvPr id="3" name="Text 0"/>
-          <p:cNvSpPr/>
-          <p:nvPr/>
-        </p:nvSpPr>
-        <p:spPr>
+          <p:cNvPr id="917408604" name="Text 0"/>
+          <p:cNvSpPr/>
+          <p:nvPr/>
+        </p:nvSpPr>
+        <p:spPr bwMode="auto">
           <a:xfrm>
             <a:off x="6280190" y="1316712"/>
             <a:ext cx="7556421" cy="1133951"/>
@@ -5366,31 +5671,32 @@
                 <a:spcPts val="4450"/>
               </a:lnSpc>
               <a:buNone/>
-            </a:pPr>
-            <a:r>
-              <a:rPr lang="en-US" sz="3550" dirty="0">
+              <a:defRPr/>
+            </a:pPr>
+            <a:r>
+              <a:rPr lang="en-US" sz="3550">
                 <a:solidFill>
                   <a:srgbClr val="FA95AF"/>
                 </a:solidFill>
-                <a:latin typeface="Anton" pitchFamily="34" charset="0"/>
-                <a:ea typeface="Anton" pitchFamily="34" charset="-122"/>
-                <a:cs typeface="Anton" pitchFamily="34" charset="-120"/>
+                <a:latin typeface="Anton"/>
+                <a:ea typeface="Anton"/>
+                <a:cs typeface="Anton"/>
               </a:rPr>
               <a:t>Real-World Examples &amp; Why It's Dangerous</a:t>
             </a:r>
-            <a:endParaRPr lang="en-US" sz="3550" dirty="0"/>
-          </a:p>
-        </p:txBody>
-      </p:sp>
-      <p:sp>
-        <p:nvSpPr>
-          <p:cNvPr id="4" name="Text 1"/>
-          <p:cNvSpPr/>
-          <p:nvPr/>
-        </p:nvSpPr>
-        <p:spPr>
-          <a:xfrm>
-            <a:off x="6280190" y="2790825"/>
+            <a:endParaRPr lang="en-US" sz="3550"/>
+          </a:p>
+        </p:txBody>
+      </p:sp>
+      <p:sp>
+        <p:nvSpPr>
+          <p:cNvPr id="584461953" name="Text 1"/>
+          <p:cNvSpPr/>
+          <p:nvPr/>
+        </p:nvSpPr>
+        <p:spPr bwMode="auto">
+          <a:xfrm>
+            <a:off x="6280190" y="2790824"/>
             <a:ext cx="7556421" cy="725805"/>
           </a:xfrm>
           <a:prstGeom prst="rect">
@@ -5408,29 +5714,30 @@
                 <a:spcPts val="2850"/>
               </a:lnSpc>
               <a:buNone/>
-            </a:pPr>
-            <a:r>
-              <a:rPr lang="en-US" sz="1750" dirty="0">
+              <a:defRPr/>
+            </a:pPr>
+            <a:r>
+              <a:rPr lang="en-US" sz="1750">
                 <a:solidFill>
                   <a:srgbClr val="E0D6DE"/>
                 </a:solidFill>
-                <a:latin typeface="Fira Sans" pitchFamily="34" charset="0"/>
-                <a:ea typeface="Fira Sans" pitchFamily="34" charset="-122"/>
-                <a:cs typeface="Fira Sans" pitchFamily="34" charset="-120"/>
+                <a:latin typeface="Fira Sans"/>
+                <a:ea typeface="Fira Sans"/>
+                <a:cs typeface="Fira Sans"/>
               </a:rPr>
               <a:t>Electromagnetic leakage is a proven attack vector with concrete precedents. It threatens confidentiality across hardware stacks:</a:t>
             </a:r>
-            <a:endParaRPr lang="en-US" sz="1750" dirty="0"/>
-          </a:p>
-        </p:txBody>
-      </p:sp>
-      <p:sp>
-        <p:nvSpPr>
-          <p:cNvPr id="5" name="Text 2"/>
-          <p:cNvSpPr/>
-          <p:nvPr/>
-        </p:nvSpPr>
-        <p:spPr>
+            <a:endParaRPr lang="en-US" sz="1750"/>
+          </a:p>
+        </p:txBody>
+      </p:sp>
+      <p:sp>
+        <p:nvSpPr>
+          <p:cNvPr id="1738771359" name="Text 2"/>
+          <p:cNvSpPr/>
+          <p:nvPr/>
+        </p:nvSpPr>
+        <p:spPr bwMode="auto">
           <a:xfrm>
             <a:off x="6280190" y="3771781"/>
             <a:ext cx="7556421" cy="3141107"/>
@@ -5451,19 +5758,20 @@
               </a:lnSpc>
               <a:buSzPct val="100000"/>
               <a:buChar char="•"/>
-            </a:pPr>
-            <a:r>
-              <a:rPr lang="en-US" sz="1750" dirty="0">
+              <a:defRPr/>
+            </a:pPr>
+            <a:r>
+              <a:rPr lang="en-US" sz="1750">
                 <a:solidFill>
                   <a:srgbClr val="E0D6DE"/>
                 </a:solidFill>
-                <a:latin typeface="Fira Sans" pitchFamily="34" charset="0"/>
-                <a:ea typeface="Fira Sans" pitchFamily="34" charset="-122"/>
-                <a:cs typeface="Fira Sans" pitchFamily="34" charset="-120"/>
+                <a:latin typeface="Fira Sans"/>
+                <a:ea typeface="Fira Sans"/>
+                <a:cs typeface="Fira Sans"/>
               </a:rPr>
               <a:t>TEMPEST-style interceptions: remote recovery of display/keyboard signals.</a:t>
             </a:r>
-            <a:endParaRPr lang="en-US" sz="1750" dirty="0"/>
+            <a:endParaRPr lang="en-US" sz="1750"/>
           </a:p>
           <a:p>
             <a:pPr marL="342900" indent="-342900" algn="l">
@@ -5472,19 +5780,20 @@
               </a:lnSpc>
               <a:buSzPct val="100000"/>
               <a:buChar char="•"/>
-            </a:pPr>
-            <a:r>
-              <a:rPr lang="en-US" sz="1750" dirty="0">
+              <a:defRPr/>
+            </a:pPr>
+            <a:r>
+              <a:rPr lang="en-US" sz="1750">
                 <a:solidFill>
                   <a:srgbClr val="E0D6DE"/>
                 </a:solidFill>
-                <a:latin typeface="Fira Sans" pitchFamily="34" charset="0"/>
-                <a:ea typeface="Fira Sans" pitchFamily="34" charset="-122"/>
-                <a:cs typeface="Fira Sans" pitchFamily="34" charset="-120"/>
+                <a:latin typeface="Fira Sans"/>
+                <a:ea typeface="Fira Sans"/>
+                <a:cs typeface="Fira Sans"/>
               </a:rPr>
               <a:t>PCB parallel traces and multi‑layer routing create tightly coupled paths.</a:t>
             </a:r>
-            <a:endParaRPr lang="en-US" sz="1750" dirty="0"/>
+            <a:endParaRPr lang="en-US" sz="1750"/>
           </a:p>
           <a:p>
             <a:pPr marL="342900" indent="-342900" algn="l">
@@ -5493,19 +5802,20 @@
               </a:lnSpc>
               <a:buSzPct val="100000"/>
               <a:buChar char="•"/>
-            </a:pPr>
-            <a:r>
-              <a:rPr lang="en-US" sz="1750" dirty="0">
+              <a:defRPr/>
+            </a:pPr>
+            <a:r>
+              <a:rPr lang="en-US" sz="1750">
                 <a:solidFill>
                   <a:srgbClr val="E0D6DE"/>
                 </a:solidFill>
-                <a:latin typeface="Fira Sans" pitchFamily="34" charset="0"/>
-                <a:ea typeface="Fira Sans" pitchFamily="34" charset="-122"/>
-                <a:cs typeface="Fira Sans" pitchFamily="34" charset="-120"/>
+                <a:latin typeface="Fira Sans"/>
+                <a:ea typeface="Fira Sans"/>
+                <a:cs typeface="Fira Sans"/>
               </a:rPr>
               <a:t>Ribbon and server rack cables running side-by-side provide long coupling length ℓ.</a:t>
             </a:r>
-            <a:endParaRPr lang="en-US" sz="1750" dirty="0"/>
+            <a:endParaRPr lang="en-US" sz="1750"/>
           </a:p>
           <a:p>
             <a:pPr marL="342900" indent="-342900" algn="l">
@@ -5514,29 +5824,30 @@
               </a:lnSpc>
               <a:buSzPct val="100000"/>
               <a:buChar char="•"/>
-            </a:pPr>
-            <a:r>
-              <a:rPr lang="en-US" sz="1750" dirty="0">
+              <a:defRPr/>
+            </a:pPr>
+            <a:r>
+              <a:rPr lang="en-US" sz="1750">
                 <a:solidFill>
                   <a:srgbClr val="E0D6DE"/>
                 </a:solidFill>
-                <a:latin typeface="Fira Sans" pitchFamily="34" charset="0"/>
-                <a:ea typeface="Fira Sans" pitchFamily="34" charset="-122"/>
-                <a:cs typeface="Fira Sans" pitchFamily="34" charset="-120"/>
+                <a:latin typeface="Fira Sans"/>
+                <a:ea typeface="Fira Sans"/>
+                <a:cs typeface="Fira Sans"/>
               </a:rPr>
               <a:t>Passive, forensics‑free capture makes mitigation largely architectural and physical.</a:t>
             </a:r>
-            <a:endParaRPr lang="en-US" sz="1750" dirty="0"/>
-          </a:p>
-        </p:txBody>
-      </p:sp>
-      <p:sp>
-        <p:nvSpPr>
-          <p:cNvPr id="6" name="Rectangle 5"/>
-          <p:cNvSpPr/>
-          <p:nvPr/>
-        </p:nvSpPr>
-        <p:spPr>
+            <a:endParaRPr lang="en-US" sz="1750"/>
+          </a:p>
+        </p:txBody>
+      </p:sp>
+      <p:sp>
+        <p:nvSpPr>
+          <p:cNvPr id="822674603" name="Rectangle 5"/>
+          <p:cNvSpPr/>
+          <p:nvPr/>
+        </p:nvSpPr>
+        <p:spPr bwMode="auto">
           <a:xfrm>
             <a:off x="12279274" y="7429500"/>
             <a:ext cx="2364581" cy="800100"/>
@@ -5571,7 +5882,9 @@
           <a:bodyPr rtlCol="0" anchor="ctr"/>
           <a:lstStyle/>
           <a:p>
-            <a:pPr algn="ctr"/>
+            <a:pPr algn="ctr">
+              <a:defRPr/>
+            </a:pPr>
             <a:endParaRPr lang="en-US"/>
           </a:p>
         </p:txBody>
@@ -5581,6 +5894,18 @@
   <p:clrMapOvr>
     <a:masterClrMapping/>
   </p:clrMapOvr>
+  <mc:AlternateContent xmlns:mc="http://schemas.openxmlformats.org/markup-compatibility/2006">
+    <mc:Choice xmlns:p159="http://schemas.microsoft.com/office/powerpoint/2015/09/main" xmlns:p14="http://schemas.microsoft.com/office/powerpoint/2010/main" Requires="p159">
+      <p:transition spd="fast" p14:dur="500" advClick="1">
+        <p:fade thruBlk="0"/>
+      </p:transition>
+    </mc:Choice>
+    <mc:Fallback>
+      <p:transition spd="fast" advClick="1">
+        <p:fade thruBlk="0"/>
+      </p:transition>
+    </mc:Fallback>
+  </mc:AlternateContent>
   <p:timing>
     <p:tnLst>
       <p:par>
@@ -5592,7 +5917,7 @@
 </file>
 
 <file path=ppt/slides/slide8.xml><?xml version="1.0" encoding="utf-8"?>
-<p:sld xmlns:a="http://schemas.openxmlformats.org/drawingml/2006/main" xmlns:r="http://schemas.openxmlformats.org/officeDocument/2006/relationships" xmlns:p="http://schemas.openxmlformats.org/presentationml/2006/main">
+<p:sld xmlns:a="http://schemas.openxmlformats.org/drawingml/2006/main" xmlns:r="http://schemas.openxmlformats.org/officeDocument/2006/relationships" xmlns:p="http://schemas.openxmlformats.org/presentationml/2006/main" xmlns:m="http://schemas.openxmlformats.org/officeDocument/2006/math" xmlns:w="http://schemas.openxmlformats.org/wordprocessingml/2006/main" xmlns:mc="http://schemas.openxmlformats.org/markup-compatibility/2006" showMasterPhAnim="0" showMasterSp="1" show="1">
   <p:cSld name="Slide 8">
     <p:spTree>
       <p:nvGrpSpPr>
@@ -5600,7 +5925,7 @@
         <p:cNvGrpSpPr/>
         <p:nvPr/>
       </p:nvGrpSpPr>
-      <p:grpSpPr>
+      <p:grpSpPr bwMode="auto">
         <a:xfrm>
           <a:off x="0" y="0"/>
           <a:ext cx="0" cy="0"/>
@@ -5610,11 +5935,11 @@
       </p:grpSpPr>
       <p:sp>
         <p:nvSpPr>
-          <p:cNvPr id="2" name="Text 0"/>
-          <p:cNvSpPr/>
-          <p:nvPr/>
-        </p:nvSpPr>
-        <p:spPr>
+          <p:cNvPr id="786560893" name="Text 0"/>
+          <p:cNvSpPr/>
+          <p:nvPr/>
+        </p:nvSpPr>
+        <p:spPr bwMode="auto">
           <a:xfrm>
             <a:off x="793790" y="806291"/>
             <a:ext cx="7092077" cy="566976"/>
@@ -5634,37 +5959,36 @@
                 <a:spcPts val="4450"/>
               </a:lnSpc>
               <a:buNone/>
-            </a:pPr>
-            <a:r>
-              <a:rPr lang="en-US" sz="3550" dirty="0">
+              <a:defRPr/>
+            </a:pPr>
+            <a:r>
+              <a:rPr lang="en-US" sz="3550">
                 <a:solidFill>
                   <a:srgbClr val="FA95AF"/>
                 </a:solidFill>
-                <a:latin typeface="Anton" pitchFamily="34" charset="0"/>
-                <a:ea typeface="Anton" pitchFamily="34" charset="-122"/>
-                <a:cs typeface="Anton" pitchFamily="34" charset="-120"/>
+                <a:latin typeface="Anton"/>
+                <a:ea typeface="Anton"/>
+                <a:cs typeface="Anton"/>
               </a:rPr>
               <a:t>Countermeasures — Practical Defenses</a:t>
             </a:r>
-            <a:endParaRPr lang="en-US" sz="3550" dirty="0"/>
+            <a:endParaRPr lang="en-US" sz="3550"/>
           </a:p>
         </p:txBody>
       </p:sp>
       <p:pic>
         <p:nvPicPr>
-          <p:cNvPr id="3" name="Image 0" descr="preencoded.png"/>
+          <p:cNvPr id="1633431763" name="Image 0" descr="preencoded.png"/>
           <p:cNvPicPr>
             <a:picLocks noChangeAspect="1"/>
           </p:cNvPicPr>
           <p:nvPr/>
         </p:nvPicPr>
-        <p:blipFill>
+        <p:blipFill rotWithShape="1">
           <a:blip r:embed="rId3"/>
-          <a:stretch>
-            <a:fillRect/>
-          </a:stretch>
+          <a:stretch/>
         </p:blipFill>
-        <p:spPr>
+        <p:spPr bwMode="auto">
           <a:xfrm>
             <a:off x="266015" y="1968579"/>
             <a:ext cx="5033575" cy="5199579"/>
@@ -5676,11 +6000,11 @@
       </p:pic>
       <p:sp>
         <p:nvSpPr>
-          <p:cNvPr id="4" name="Shape 1"/>
-          <p:cNvSpPr/>
-          <p:nvPr/>
-        </p:nvSpPr>
-        <p:spPr>
+          <p:cNvPr id="472805391" name="Shape 1"/>
+          <p:cNvSpPr/>
+          <p:nvPr/>
+        </p:nvSpPr>
+        <p:spPr bwMode="auto">
           <a:xfrm>
             <a:off x="5559981" y="1968579"/>
             <a:ext cx="4028599" cy="2486382"/>
@@ -5698,13 +6022,13 @@
       </p:sp>
       <p:sp>
         <p:nvSpPr>
-          <p:cNvPr id="5" name="Text 2"/>
-          <p:cNvSpPr/>
-          <p:nvPr/>
-        </p:nvSpPr>
-        <p:spPr>
-          <a:xfrm>
-            <a:off x="5786795" y="2195393"/>
+          <p:cNvPr id="547240403" name="Text 2"/>
+          <p:cNvSpPr/>
+          <p:nvPr/>
+        </p:nvSpPr>
+        <p:spPr bwMode="auto">
+          <a:xfrm>
+            <a:off x="5786794" y="2195393"/>
             <a:ext cx="2835235" cy="354330"/>
           </a:xfrm>
           <a:prstGeom prst="rect">
@@ -5722,31 +6046,32 @@
                 <a:spcPts val="2750"/>
               </a:lnSpc>
               <a:buNone/>
-            </a:pPr>
-            <a:r>
-              <a:rPr lang="en-US" sz="2200" dirty="0">
+              <a:defRPr/>
+            </a:pPr>
+            <a:r>
+              <a:rPr lang="en-US" sz="2200">
                 <a:solidFill>
                   <a:srgbClr val="E0D6DE"/>
                 </a:solidFill>
-                <a:latin typeface="Anton" pitchFamily="34" charset="0"/>
-                <a:ea typeface="Anton" pitchFamily="34" charset="-122"/>
-                <a:cs typeface="Anton" pitchFamily="34" charset="-120"/>
+                <a:latin typeface="Anton"/>
+                <a:ea typeface="Anton"/>
+                <a:cs typeface="Anton"/>
               </a:rPr>
               <a:t>Twisted pairs</a:t>
             </a:r>
-            <a:endParaRPr lang="en-US" sz="2200" dirty="0"/>
-          </a:p>
-        </p:txBody>
-      </p:sp>
-      <p:sp>
-        <p:nvSpPr>
-          <p:cNvPr id="6" name="Text 3"/>
-          <p:cNvSpPr/>
-          <p:nvPr/>
-        </p:nvSpPr>
-        <p:spPr>
-          <a:xfrm>
-            <a:off x="5786795" y="2776538"/>
+            <a:endParaRPr lang="en-US" sz="2200"/>
+          </a:p>
+        </p:txBody>
+      </p:sp>
+      <p:sp>
+        <p:nvSpPr>
+          <p:cNvPr id="204453497" name="Text 3"/>
+          <p:cNvSpPr/>
+          <p:nvPr/>
+        </p:nvSpPr>
+        <p:spPr bwMode="auto">
+          <a:xfrm>
+            <a:off x="5786794" y="2776538"/>
             <a:ext cx="3574971" cy="1088708"/>
           </a:xfrm>
           <a:prstGeom prst="rect">
@@ -5764,29 +6089,30 @@
                 <a:spcPts val="2850"/>
               </a:lnSpc>
               <a:buNone/>
-            </a:pPr>
-            <a:r>
-              <a:rPr lang="en-US" sz="1750" dirty="0">
+              <a:defRPr/>
+            </a:pPr>
+            <a:r>
+              <a:rPr lang="en-US" sz="1750">
                 <a:solidFill>
                   <a:srgbClr val="E0D6DE"/>
                 </a:solidFill>
-                <a:latin typeface="Fira Sans" pitchFamily="34" charset="0"/>
-                <a:ea typeface="Fira Sans" pitchFamily="34" charset="-122"/>
-                <a:cs typeface="Fira Sans" pitchFamily="34" charset="-120"/>
+                <a:latin typeface="Fira Sans"/>
+                <a:ea typeface="Fira Sans"/>
+                <a:cs typeface="Fira Sans"/>
               </a:rPr>
               <a:t>Opposing currents cancel loop area → dramatically reduces captured flux.</a:t>
             </a:r>
-            <a:endParaRPr lang="en-US" sz="1750" dirty="0"/>
-          </a:p>
-        </p:txBody>
-      </p:sp>
-      <p:sp>
-        <p:nvSpPr>
-          <p:cNvPr id="7" name="Shape 4"/>
-          <p:cNvSpPr/>
-          <p:nvPr/>
-        </p:nvSpPr>
-        <p:spPr>
+            <a:endParaRPr lang="en-US" sz="1750"/>
+          </a:p>
+        </p:txBody>
+      </p:sp>
+      <p:sp>
+        <p:nvSpPr>
+          <p:cNvPr id="1822735237" name="Shape 4"/>
+          <p:cNvSpPr/>
+          <p:nvPr/>
+        </p:nvSpPr>
+        <p:spPr bwMode="auto">
           <a:xfrm>
             <a:off x="9815393" y="1968579"/>
             <a:ext cx="4028718" cy="2486382"/>
@@ -5804,11 +6130,11 @@
       </p:sp>
       <p:sp>
         <p:nvSpPr>
-          <p:cNvPr id="8" name="Text 5"/>
-          <p:cNvSpPr/>
-          <p:nvPr/>
-        </p:nvSpPr>
-        <p:spPr>
+          <p:cNvPr id="349323967" name="Text 5"/>
+          <p:cNvSpPr/>
+          <p:nvPr/>
+        </p:nvSpPr>
+        <p:spPr bwMode="auto">
           <a:xfrm>
             <a:off x="10042208" y="2195393"/>
             <a:ext cx="2835235" cy="354330"/>
@@ -5828,29 +6154,30 @@
                 <a:spcPts val="2750"/>
               </a:lnSpc>
               <a:buNone/>
-            </a:pPr>
-            <a:r>
-              <a:rPr lang="en-US" sz="2200" dirty="0">
+              <a:defRPr/>
+            </a:pPr>
+            <a:r>
+              <a:rPr lang="en-US" sz="2200">
                 <a:solidFill>
                   <a:srgbClr val="E0D6DE"/>
                 </a:solidFill>
-                <a:latin typeface="Anton" pitchFamily="34" charset="0"/>
-                <a:ea typeface="Anton" pitchFamily="34" charset="-122"/>
-                <a:cs typeface="Anton" pitchFamily="34" charset="-120"/>
+                <a:latin typeface="Anton"/>
+                <a:ea typeface="Anton"/>
+                <a:cs typeface="Anton"/>
               </a:rPr>
               <a:t>Shielding</a:t>
             </a:r>
-            <a:endParaRPr lang="en-US" sz="2200" dirty="0"/>
-          </a:p>
-        </p:txBody>
-      </p:sp>
-      <p:sp>
-        <p:nvSpPr>
-          <p:cNvPr id="9" name="Text 6"/>
-          <p:cNvSpPr/>
-          <p:nvPr/>
-        </p:nvSpPr>
-        <p:spPr>
+            <a:endParaRPr lang="en-US" sz="2200"/>
+          </a:p>
+        </p:txBody>
+      </p:sp>
+      <p:sp>
+        <p:nvSpPr>
+          <p:cNvPr id="1200540160" name="Text 6"/>
+          <p:cNvSpPr/>
+          <p:nvPr/>
+        </p:nvSpPr>
+        <p:spPr bwMode="auto">
           <a:xfrm>
             <a:off x="10042208" y="2776538"/>
             <a:ext cx="3575090" cy="1451610"/>
@@ -5870,29 +6197,30 @@
                 <a:spcPts val="2850"/>
               </a:lnSpc>
               <a:buNone/>
-            </a:pPr>
-            <a:r>
-              <a:rPr lang="en-US" sz="1750" dirty="0">
+              <a:defRPr/>
+            </a:pPr>
+            <a:r>
+              <a:rPr lang="en-US" sz="1750">
                 <a:solidFill>
                   <a:srgbClr val="E0D6DE"/>
                 </a:solidFill>
-                <a:latin typeface="Fira Sans" pitchFamily="34" charset="0"/>
-                <a:ea typeface="Fira Sans" pitchFamily="34" charset="-122"/>
-                <a:cs typeface="Fira Sans" pitchFamily="34" charset="-120"/>
+                <a:latin typeface="Fira Sans"/>
+                <a:ea typeface="Fira Sans"/>
+                <a:cs typeface="Fira Sans"/>
               </a:rPr>
               <a:t>Magnetic shields (mu-metal, high‑permeability layers) and grounded enclosures limit field escape; use where space permits.</a:t>
             </a:r>
-            <a:endParaRPr lang="en-US" sz="1750" dirty="0"/>
-          </a:p>
-        </p:txBody>
-      </p:sp>
-      <p:sp>
-        <p:nvSpPr>
-          <p:cNvPr id="10" name="Shape 7"/>
-          <p:cNvSpPr/>
-          <p:nvPr/>
-        </p:nvSpPr>
-        <p:spPr>
+            <a:endParaRPr lang="en-US" sz="1750"/>
+          </a:p>
+        </p:txBody>
+      </p:sp>
+      <p:sp>
+        <p:nvSpPr>
+          <p:cNvPr id="1189192921" name="Shape 7"/>
+          <p:cNvSpPr/>
+          <p:nvPr/>
+        </p:nvSpPr>
+        <p:spPr bwMode="auto">
           <a:xfrm>
             <a:off x="5559981" y="4681776"/>
             <a:ext cx="4028599" cy="2486382"/>
@@ -5910,13 +6238,13 @@
       </p:sp>
       <p:sp>
         <p:nvSpPr>
-          <p:cNvPr id="11" name="Text 8"/>
-          <p:cNvSpPr/>
-          <p:nvPr/>
-        </p:nvSpPr>
-        <p:spPr>
-          <a:xfrm>
-            <a:off x="5786795" y="4908590"/>
+          <p:cNvPr id="185349007" name="Text 8"/>
+          <p:cNvSpPr/>
+          <p:nvPr/>
+        </p:nvSpPr>
+        <p:spPr bwMode="auto">
+          <a:xfrm>
+            <a:off x="5786794" y="4908590"/>
             <a:ext cx="2835235" cy="354330"/>
           </a:xfrm>
           <a:prstGeom prst="rect">
@@ -5934,31 +6262,32 @@
                 <a:spcPts val="2750"/>
               </a:lnSpc>
               <a:buNone/>
-            </a:pPr>
-            <a:r>
-              <a:rPr lang="en-US" sz="2200" dirty="0">
+              <a:defRPr/>
+            </a:pPr>
+            <a:r>
+              <a:rPr lang="en-US" sz="2200">
                 <a:solidFill>
                   <a:srgbClr val="E0D6DE"/>
                 </a:solidFill>
-                <a:latin typeface="Anton" pitchFamily="34" charset="0"/>
-                <a:ea typeface="Anton" pitchFamily="34" charset="-122"/>
-                <a:cs typeface="Anton" pitchFamily="34" charset="-120"/>
+                <a:latin typeface="Anton"/>
+                <a:ea typeface="Anton"/>
+                <a:cs typeface="Anton"/>
               </a:rPr>
               <a:t>Distance &amp; routing</a:t>
             </a:r>
-            <a:endParaRPr lang="en-US" sz="2200" dirty="0"/>
-          </a:p>
-        </p:txBody>
-      </p:sp>
-      <p:sp>
-        <p:nvSpPr>
-          <p:cNvPr id="12" name="Text 9"/>
-          <p:cNvSpPr/>
-          <p:nvPr/>
-        </p:nvSpPr>
-        <p:spPr>
-          <a:xfrm>
-            <a:off x="5786795" y="5489734"/>
+            <a:endParaRPr lang="en-US" sz="2200"/>
+          </a:p>
+        </p:txBody>
+      </p:sp>
+      <p:sp>
+        <p:nvSpPr>
+          <p:cNvPr id="889869363" name="Text 9"/>
+          <p:cNvSpPr/>
+          <p:nvPr/>
+        </p:nvSpPr>
+        <p:spPr bwMode="auto">
+          <a:xfrm>
+            <a:off x="5786794" y="5489734"/>
             <a:ext cx="3574971" cy="1451610"/>
           </a:xfrm>
           <a:prstGeom prst="rect">
@@ -5976,29 +6305,30 @@
                 <a:spcPts val="2850"/>
               </a:lnSpc>
               <a:buNone/>
-            </a:pPr>
-            <a:r>
-              <a:rPr lang="en-US" sz="1750" dirty="0">
+              <a:defRPr/>
+            </a:pPr>
+            <a:r>
+              <a:rPr lang="en-US" sz="1750">
                 <a:solidFill>
                   <a:srgbClr val="E0D6DE"/>
                 </a:solidFill>
-                <a:latin typeface="Fira Sans" pitchFamily="34" charset="0"/>
-                <a:ea typeface="Fira Sans" pitchFamily="34" charset="-122"/>
-                <a:cs typeface="Fira Sans" pitchFamily="34" charset="-120"/>
+                <a:latin typeface="Fira Sans"/>
+                <a:ea typeface="Fira Sans"/>
+                <a:cs typeface="Fira Sans"/>
               </a:rPr>
               <a:t>Separate sensitive and untrusted runs; minimize parallel routing length ℓ; use orthogonal crossings where feasible.</a:t>
             </a:r>
-            <a:endParaRPr lang="en-US" sz="1750" dirty="0"/>
-          </a:p>
-        </p:txBody>
-      </p:sp>
-      <p:sp>
-        <p:nvSpPr>
-          <p:cNvPr id="13" name="Shape 10"/>
-          <p:cNvSpPr/>
-          <p:nvPr/>
-        </p:nvSpPr>
-        <p:spPr>
+            <a:endParaRPr lang="en-US" sz="1750"/>
+          </a:p>
+        </p:txBody>
+      </p:sp>
+      <p:sp>
+        <p:nvSpPr>
+          <p:cNvPr id="247211864" name="Shape 10"/>
+          <p:cNvSpPr/>
+          <p:nvPr/>
+        </p:nvSpPr>
+        <p:spPr bwMode="auto">
           <a:xfrm>
             <a:off x="9815393" y="4681776"/>
             <a:ext cx="4028718" cy="2486382"/>
@@ -6016,11 +6346,11 @@
       </p:sp>
       <p:sp>
         <p:nvSpPr>
-          <p:cNvPr id="14" name="Text 11"/>
-          <p:cNvSpPr/>
-          <p:nvPr/>
-        </p:nvSpPr>
-        <p:spPr>
+          <p:cNvPr id="472418465" name="Text 11"/>
+          <p:cNvSpPr/>
+          <p:nvPr/>
+        </p:nvSpPr>
+        <p:spPr bwMode="auto">
           <a:xfrm>
             <a:off x="10042208" y="4908590"/>
             <a:ext cx="2835235" cy="354330"/>
@@ -6040,29 +6370,30 @@
                 <a:spcPts val="2750"/>
               </a:lnSpc>
               <a:buNone/>
-            </a:pPr>
-            <a:r>
-              <a:rPr lang="en-US" sz="2200" dirty="0">
+              <a:defRPr/>
+            </a:pPr>
+            <a:r>
+              <a:rPr lang="en-US" sz="2200">
                 <a:solidFill>
                   <a:srgbClr val="E0D6DE"/>
                 </a:solidFill>
-                <a:latin typeface="Anton" pitchFamily="34" charset="0"/>
-                <a:ea typeface="Anton" pitchFamily="34" charset="-122"/>
-                <a:cs typeface="Anton" pitchFamily="34" charset="-120"/>
+                <a:latin typeface="Anton"/>
+                <a:ea typeface="Anton"/>
+                <a:cs typeface="Anton"/>
               </a:rPr>
               <a:t>Signal shaping</a:t>
             </a:r>
-            <a:endParaRPr lang="en-US" sz="2200" dirty="0"/>
-          </a:p>
-        </p:txBody>
-      </p:sp>
-      <p:sp>
-        <p:nvSpPr>
-          <p:cNvPr id="15" name="Text 12"/>
-          <p:cNvSpPr/>
-          <p:nvPr/>
-        </p:nvSpPr>
-        <p:spPr>
+            <a:endParaRPr lang="en-US" sz="2200"/>
+          </a:p>
+        </p:txBody>
+      </p:sp>
+      <p:sp>
+        <p:nvSpPr>
+          <p:cNvPr id="1432035104" name="Text 12"/>
+          <p:cNvSpPr/>
+          <p:nvPr/>
+        </p:nvSpPr>
+        <p:spPr bwMode="auto">
           <a:xfrm>
             <a:off x="10042208" y="5489734"/>
             <a:ext cx="3575090" cy="1451610"/>
@@ -6082,29 +6413,30 @@
                 <a:spcPts val="2850"/>
               </a:lnSpc>
               <a:buNone/>
-            </a:pPr>
-            <a:r>
-              <a:rPr lang="en-US" sz="1750" dirty="0">
+              <a:defRPr/>
+            </a:pPr>
+            <a:r>
+              <a:rPr lang="en-US" sz="1750">
                 <a:solidFill>
                   <a:srgbClr val="E0D6DE"/>
                 </a:solidFill>
-                <a:latin typeface="Fira Sans" pitchFamily="34" charset="0"/>
-                <a:ea typeface="Fira Sans" pitchFamily="34" charset="-122"/>
-                <a:cs typeface="Fira Sans" pitchFamily="34" charset="-120"/>
+                <a:latin typeface="Fira Sans"/>
+                <a:ea typeface="Fira Sans"/>
+                <a:cs typeface="Fira Sans"/>
               </a:rPr>
               <a:t>Controlled slew rates or intentionally randomized timing reduce the correlation between transitions and payload bits.</a:t>
             </a:r>
-            <a:endParaRPr lang="en-US" sz="1750" dirty="0"/>
-          </a:p>
-        </p:txBody>
-      </p:sp>
-      <p:sp>
-        <p:nvSpPr>
-          <p:cNvPr id="16" name="Rectangle 15"/>
-          <p:cNvSpPr/>
-          <p:nvPr/>
-        </p:nvSpPr>
-        <p:spPr>
+            <a:endParaRPr lang="en-US" sz="1750"/>
+          </a:p>
+        </p:txBody>
+      </p:sp>
+      <p:sp>
+        <p:nvSpPr>
+          <p:cNvPr id="684045949" name="Rectangle 15"/>
+          <p:cNvSpPr/>
+          <p:nvPr/>
+        </p:nvSpPr>
+        <p:spPr bwMode="auto">
           <a:xfrm>
             <a:off x="12265819" y="7429500"/>
             <a:ext cx="2364581" cy="800100"/>
@@ -6139,7 +6471,9 @@
           <a:bodyPr rtlCol="0" anchor="ctr"/>
           <a:lstStyle/>
           <a:p>
-            <a:pPr algn="ctr"/>
+            <a:pPr algn="ctr">
+              <a:defRPr/>
+            </a:pPr>
             <a:endParaRPr lang="en-US"/>
           </a:p>
         </p:txBody>
@@ -6149,6 +6483,18 @@
   <p:clrMapOvr>
     <a:masterClrMapping/>
   </p:clrMapOvr>
+  <mc:AlternateContent xmlns:mc="http://schemas.openxmlformats.org/markup-compatibility/2006">
+    <mc:Choice xmlns:p159="http://schemas.microsoft.com/office/powerpoint/2015/09/main" xmlns:p14="http://schemas.microsoft.com/office/powerpoint/2010/main" Requires="p159">
+      <p:transition spd="fast" p14:dur="500" advClick="1">
+        <p:fade thruBlk="0"/>
+      </p:transition>
+    </mc:Choice>
+    <mc:Fallback>
+      <p:transition spd="fast" advClick="1">
+        <p:fade thruBlk="0"/>
+      </p:transition>
+    </mc:Fallback>
+  </mc:AlternateContent>
   <p:timing>
     <p:tnLst>
       <p:par>
@@ -6160,15 +6506,15 @@
 </file>
 
 <file path=ppt/slides/slide9.xml><?xml version="1.0" encoding="utf-8"?>
-<p:sld xmlns:a="http://schemas.openxmlformats.org/drawingml/2006/main" xmlns:r="http://schemas.openxmlformats.org/officeDocument/2006/relationships" xmlns:p="http://schemas.openxmlformats.org/presentationml/2006/main">
-  <p:cSld>
+<p:sld xmlns:a="http://schemas.openxmlformats.org/drawingml/2006/main" xmlns:r="http://schemas.openxmlformats.org/officeDocument/2006/relationships" xmlns:p="http://schemas.openxmlformats.org/presentationml/2006/main" xmlns:m="http://schemas.openxmlformats.org/officeDocument/2006/math" xmlns:w="http://schemas.openxmlformats.org/wordprocessingml/2006/main" xmlns:mc="http://schemas.openxmlformats.org/markup-compatibility/2006" showMasterPhAnim="0" showMasterSp="1" show="1">
+  <p:cSld name="">
     <p:spTree>
       <p:nvGrpSpPr>
         <p:cNvPr id="1" name=""/>
         <p:cNvGrpSpPr/>
         <p:nvPr/>
       </p:nvGrpSpPr>
-      <p:grpSpPr>
+      <p:grpSpPr bwMode="auto">
         <a:xfrm>
           <a:off x="0" y="0"/>
           <a:ext cx="0" cy="0"/>
@@ -6178,11 +6524,11 @@
       </p:grpSpPr>
       <p:sp>
         <p:nvSpPr>
-          <p:cNvPr id="2" name="Text 0"/>
-          <p:cNvSpPr/>
-          <p:nvPr/>
-        </p:nvSpPr>
-        <p:spPr>
+          <p:cNvPr id="926974501" name="Text 0"/>
+          <p:cNvSpPr/>
+          <p:nvPr/>
+        </p:nvSpPr>
+        <p:spPr bwMode="auto">
           <a:xfrm>
             <a:off x="793790" y="695682"/>
             <a:ext cx="4888349" cy="566976"/>
@@ -6202,29 +6548,30 @@
                 <a:spcPts val="4450"/>
               </a:lnSpc>
               <a:buNone/>
-            </a:pPr>
-            <a:r>
-              <a:rPr lang="en-US" sz="3550" dirty="0">
+              <a:defRPr/>
+            </a:pPr>
+            <a:r>
+              <a:rPr lang="en-US" sz="3550">
                 <a:solidFill>
                   <a:srgbClr val="FA95AF"/>
                 </a:solidFill>
-                <a:latin typeface="Anton" pitchFamily="34" charset="0"/>
-                <a:ea typeface="Anton" pitchFamily="34" charset="-122"/>
-                <a:cs typeface="Anton" pitchFamily="34" charset="-120"/>
+                <a:latin typeface="Anton"/>
+                <a:ea typeface="Anton"/>
+                <a:cs typeface="Anton"/>
               </a:rPr>
               <a:t>Demo: The Pulse Waveform</a:t>
             </a:r>
-            <a:endParaRPr lang="en-US" sz="3550" dirty="0"/>
-          </a:p>
-        </p:txBody>
-      </p:sp>
-      <p:sp>
-        <p:nvSpPr>
-          <p:cNvPr id="3" name="Text 1"/>
-          <p:cNvSpPr/>
-          <p:nvPr/>
-        </p:nvSpPr>
-        <p:spPr>
+            <a:endParaRPr lang="en-US" sz="3550"/>
+          </a:p>
+        </p:txBody>
+      </p:sp>
+      <p:sp>
+        <p:nvSpPr>
+          <p:cNvPr id="685992430" name="Text 1"/>
+          <p:cNvSpPr/>
+          <p:nvPr/>
+        </p:nvSpPr>
+        <p:spPr bwMode="auto">
           <a:xfrm>
             <a:off x="793790" y="1716286"/>
             <a:ext cx="13042821" cy="362903"/>
@@ -6244,37 +6591,36 @@
                 <a:spcPts val="2850"/>
               </a:lnSpc>
               <a:buNone/>
-            </a:pPr>
-            <a:r>
-              <a:rPr lang="en-US" sz="1750" dirty="0">
+              <a:defRPr/>
+            </a:pPr>
+            <a:r>
+              <a:rPr lang="en-US" sz="1750">
                 <a:solidFill>
                   <a:srgbClr val="E0D6DE"/>
                 </a:solidFill>
-                <a:latin typeface="Fira Sans" pitchFamily="34" charset="0"/>
-                <a:ea typeface="Fira Sans" pitchFamily="34" charset="-122"/>
-                <a:cs typeface="Fira Sans" pitchFamily="34" charset="-120"/>
+                <a:latin typeface="Fira Sans"/>
+                <a:ea typeface="Fira Sans"/>
+                <a:cs typeface="Fira Sans"/>
               </a:rPr>
               <a:t>A stacked waveform view clearly illustrates the induced leakage mechanism and how it can be exploited:</a:t>
             </a:r>
-            <a:endParaRPr lang="en-US" sz="1750" dirty="0"/>
+            <a:endParaRPr lang="en-US" sz="1750"/>
           </a:p>
         </p:txBody>
       </p:sp>
       <p:pic>
         <p:nvPicPr>
-          <p:cNvPr id="4" name="Image 0" descr="preencoded.png"/>
+          <p:cNvPr id="1877400170" name="Image 0" descr="preencoded.png"/>
           <p:cNvPicPr>
             <a:picLocks noChangeAspect="1"/>
           </p:cNvPicPr>
           <p:nvPr/>
         </p:nvPicPr>
-        <p:blipFill>
+        <p:blipFill rotWithShape="1">
           <a:blip r:embed="rId3"/>
-          <a:stretch>
-            <a:fillRect/>
-          </a:stretch>
+          <a:stretch/>
         </p:blipFill>
-        <p:spPr>
+        <p:spPr bwMode="auto">
           <a:xfrm>
             <a:off x="793790" y="2334339"/>
             <a:ext cx="1205984" cy="745331"/>
@@ -6286,11 +6632,11 @@
       </p:pic>
       <p:sp>
         <p:nvSpPr>
-          <p:cNvPr id="5" name="Text 2"/>
-          <p:cNvSpPr/>
-          <p:nvPr/>
-        </p:nvSpPr>
-        <p:spPr>
+          <p:cNvPr id="28190189" name="Text 2"/>
+          <p:cNvSpPr/>
+          <p:nvPr/>
+        </p:nvSpPr>
+        <p:spPr bwMode="auto">
           <a:xfrm>
             <a:off x="2283262" y="2334339"/>
             <a:ext cx="2669143" cy="354330"/>
@@ -6310,29 +6656,30 @@
                 <a:spcPts val="2750"/>
               </a:lnSpc>
               <a:buNone/>
-            </a:pPr>
-            <a:r>
-              <a:rPr lang="en-US" sz="2200" dirty="0">
+              <a:defRPr/>
+            </a:pPr>
+            <a:r>
+              <a:rPr lang="en-US" sz="2200">
                 <a:solidFill>
                   <a:srgbClr val="E0D6DE"/>
                 </a:solidFill>
-                <a:latin typeface="Anton" pitchFamily="34" charset="0"/>
-                <a:ea typeface="Anton" pitchFamily="34" charset="-122"/>
-                <a:cs typeface="Anton" pitchFamily="34" charset="-120"/>
+                <a:latin typeface="Anton"/>
+                <a:ea typeface="Anton"/>
+                <a:cs typeface="Anton"/>
               </a:rPr>
               <a:t>Observation</a:t>
             </a:r>
-            <a:endParaRPr lang="en-US" sz="2200" dirty="0"/>
-          </a:p>
-        </p:txBody>
-      </p:sp>
-      <p:sp>
-        <p:nvSpPr>
-          <p:cNvPr id="6" name="Text 3"/>
-          <p:cNvSpPr/>
-          <p:nvPr/>
-        </p:nvSpPr>
-        <p:spPr>
+            <a:endParaRPr lang="en-US" sz="2200"/>
+          </a:p>
+        </p:txBody>
+      </p:sp>
+      <p:sp>
+        <p:nvSpPr>
+          <p:cNvPr id="1187664573" name="Text 3"/>
+          <p:cNvSpPr/>
+          <p:nvPr/>
+        </p:nvSpPr>
+        <p:spPr bwMode="auto">
           <a:xfrm>
             <a:off x="2283262" y="2824758"/>
             <a:ext cx="2669143" cy="3991928"/>
@@ -6352,37 +6699,36 @@
                 <a:spcPts val="2850"/>
               </a:lnSpc>
               <a:buNone/>
-            </a:pPr>
-            <a:r>
-              <a:rPr lang="en-US" sz="1750" dirty="0">
+              <a:defRPr/>
+            </a:pPr>
+            <a:r>
+              <a:rPr lang="en-US" sz="1750">
                 <a:solidFill>
                   <a:srgbClr val="E0D6DE"/>
                 </a:solidFill>
-                <a:latin typeface="Fira Sans" pitchFamily="34" charset="0"/>
-                <a:ea typeface="Fira Sans" pitchFamily="34" charset="-122"/>
-                <a:cs typeface="Fira Sans" pitchFamily="34" charset="-120"/>
+                <a:latin typeface="Fira Sans"/>
+                <a:ea typeface="Fira Sans"/>
+                <a:cs typeface="Fira Sans"/>
               </a:rPr>
               <a:t>Each rapid voltage transition (edge) in the source signal produces a time-aligned, transient voltage spike on a nearby conductor. The polarity of these induced spikes directly encodes the direction of the original bit transition (e.g., 0→1 or 1→0).</a:t>
             </a:r>
-            <a:endParaRPr lang="en-US" sz="1750" dirty="0"/>
+            <a:endParaRPr lang="en-US" sz="1750"/>
           </a:p>
         </p:txBody>
       </p:sp>
       <p:pic>
         <p:nvPicPr>
-          <p:cNvPr id="7" name="Image 1" descr="preencoded.png"/>
+          <p:cNvPr id="1301904298" name="Image 1" descr="preencoded.png"/>
           <p:cNvPicPr>
             <a:picLocks noChangeAspect="1"/>
           </p:cNvPicPr>
           <p:nvPr/>
         </p:nvPicPr>
-        <p:blipFill>
+        <p:blipFill rotWithShape="1">
           <a:blip r:embed="rId4"/>
-          <a:stretch>
-            <a:fillRect/>
-          </a:stretch>
+          <a:stretch/>
         </p:blipFill>
-        <p:spPr>
+        <p:spPr bwMode="auto">
           <a:xfrm>
             <a:off x="5235893" y="2334339"/>
             <a:ext cx="1205984" cy="745331"/>
@@ -6394,11 +6740,11 @@
       </p:pic>
       <p:sp>
         <p:nvSpPr>
-          <p:cNvPr id="8" name="Text 4"/>
-          <p:cNvSpPr/>
-          <p:nvPr/>
-        </p:nvSpPr>
-        <p:spPr>
+          <p:cNvPr id="2064580384" name="Text 4"/>
+          <p:cNvSpPr/>
+          <p:nvPr/>
+        </p:nvSpPr>
+        <p:spPr bwMode="auto">
           <a:xfrm>
             <a:off x="6725364" y="2334339"/>
             <a:ext cx="2669143" cy="708660"/>
@@ -6418,29 +6764,30 @@
                 <a:spcPts val="2750"/>
               </a:lnSpc>
               <a:buNone/>
-            </a:pPr>
-            <a:r>
-              <a:rPr lang="en-US" sz="2200" dirty="0">
+              <a:defRPr/>
+            </a:pPr>
+            <a:r>
+              <a:rPr lang="en-US" sz="2200">
                 <a:solidFill>
                   <a:srgbClr val="E0D6DE"/>
                 </a:solidFill>
-                <a:latin typeface="Anton" pitchFamily="34" charset="0"/>
-                <a:ea typeface="Anton" pitchFamily="34" charset="-122"/>
-                <a:cs typeface="Anton" pitchFamily="34" charset="-120"/>
+                <a:latin typeface="Anton"/>
+                <a:ea typeface="Anton"/>
+                <a:cs typeface="Anton"/>
               </a:rPr>
               <a:t>Forensic Reconstruction</a:t>
             </a:r>
-            <a:endParaRPr lang="en-US" sz="2200" dirty="0"/>
-          </a:p>
-        </p:txBody>
-      </p:sp>
-      <p:sp>
-        <p:nvSpPr>
-          <p:cNvPr id="9" name="Text 5"/>
-          <p:cNvSpPr/>
-          <p:nvPr/>
-        </p:nvSpPr>
-        <p:spPr>
+            <a:endParaRPr lang="en-US" sz="2200"/>
+          </a:p>
+        </p:txBody>
+      </p:sp>
+      <p:sp>
+        <p:nvSpPr>
+          <p:cNvPr id="336192145" name="Text 5"/>
+          <p:cNvSpPr/>
+          <p:nvPr/>
+        </p:nvSpPr>
+        <p:spPr bwMode="auto">
           <a:xfrm>
             <a:off x="6725364" y="3179088"/>
             <a:ext cx="2669143" cy="4354830"/>
@@ -6460,29 +6807,30 @@
                 <a:spcPts val="2850"/>
               </a:lnSpc>
               <a:buNone/>
-            </a:pPr>
-            <a:r>
-              <a:rPr lang="en-US" sz="1750" dirty="0">
+              <a:defRPr/>
+            </a:pPr>
+            <a:r>
+              <a:rPr lang="en-US" sz="1750">
                 <a:solidFill>
                   <a:srgbClr val="E0D6DE"/>
                 </a:solidFill>
-                <a:latin typeface="Fira Sans" pitchFamily="34" charset="0"/>
-                <a:ea typeface="Fira Sans" pitchFamily="34" charset="-122"/>
-                <a:cs typeface="Fira Sans" pitchFamily="34" charset="-120"/>
+                <a:latin typeface="Fira Sans"/>
+                <a:ea typeface="Fira Sans"/>
+                <a:cs typeface="Fira Sans"/>
               </a:rPr>
               <a:t>By precisely timestamping and identifying the polarity of each induced spike, an attacker can reconstruct the original binary bitstream. This allows for full recovery of data, framing, and even protocol timing without direct physical access to the target wire.</a:t>
             </a:r>
-            <a:endParaRPr lang="en-US" sz="1750" dirty="0"/>
-          </a:p>
-        </p:txBody>
-      </p:sp>
-      <p:sp>
-        <p:nvSpPr>
-          <p:cNvPr id="11" name="Text 6"/>
-          <p:cNvSpPr/>
-          <p:nvPr/>
-        </p:nvSpPr>
-        <p:spPr>
+            <a:endParaRPr lang="en-US" sz="1750"/>
+          </a:p>
+        </p:txBody>
+      </p:sp>
+      <p:sp>
+        <p:nvSpPr>
+          <p:cNvPr id="2140643180" name="Text 6"/>
+          <p:cNvSpPr/>
+          <p:nvPr/>
+        </p:nvSpPr>
+        <p:spPr bwMode="auto">
           <a:xfrm>
             <a:off x="11167467" y="2334339"/>
             <a:ext cx="2669143" cy="354330"/>
@@ -6502,29 +6850,30 @@
                 <a:spcPts val="2750"/>
               </a:lnSpc>
               <a:buNone/>
-            </a:pPr>
-            <a:r>
-              <a:rPr lang="en-US" sz="2200" dirty="0">
+              <a:defRPr/>
+            </a:pPr>
+            <a:r>
+              <a:rPr lang="en-US" sz="2200">
                 <a:solidFill>
                   <a:srgbClr val="E0D6DE"/>
                 </a:solidFill>
-                <a:latin typeface="Anton" pitchFamily="34" charset="0"/>
-                <a:ea typeface="Anton" pitchFamily="34" charset="-122"/>
-                <a:cs typeface="Anton" pitchFamily="34" charset="-120"/>
+                <a:latin typeface="Anton"/>
+                <a:ea typeface="Anton"/>
+                <a:cs typeface="Anton"/>
               </a:rPr>
               <a:t>Pulse Characteristics</a:t>
             </a:r>
-            <a:endParaRPr lang="en-US" sz="2200" dirty="0"/>
-          </a:p>
-        </p:txBody>
-      </p:sp>
-      <p:sp>
-        <p:nvSpPr>
-          <p:cNvPr id="12" name="Text 7"/>
-          <p:cNvSpPr/>
-          <p:nvPr/>
-        </p:nvSpPr>
-        <p:spPr>
+            <a:endParaRPr lang="en-US" sz="2200"/>
+          </a:p>
+        </p:txBody>
+      </p:sp>
+      <p:sp>
+        <p:nvSpPr>
+          <p:cNvPr id="3416168" name="Text 7"/>
+          <p:cNvSpPr/>
+          <p:nvPr/>
+        </p:nvSpPr>
+        <p:spPr bwMode="auto">
           <a:xfrm>
             <a:off x="11167467" y="2824758"/>
             <a:ext cx="2669143" cy="4354830"/>
@@ -6544,40 +6893,39 @@
                 <a:spcPts val="2850"/>
               </a:lnSpc>
               <a:buNone/>
-            </a:pPr>
-            <a:r>
-              <a:rPr lang="en-US" sz="1750" dirty="0">
+              <a:defRPr/>
+            </a:pPr>
+            <a:r>
+              <a:rPr lang="en-US" sz="1750">
                 <a:solidFill>
                   <a:srgbClr val="E0D6DE"/>
                 </a:solidFill>
-                <a:latin typeface="Fira Sans" pitchFamily="34" charset="0"/>
-                <a:ea typeface="Fira Sans" pitchFamily="34" charset="-122"/>
-                <a:cs typeface="Fira Sans" pitchFamily="34" charset="-120"/>
+                <a:latin typeface="Fira Sans"/>
+                <a:ea typeface="Fira Sans"/>
+                <a:cs typeface="Fira Sans"/>
               </a:rPr>
               <a:t>The amplitude of the induced pulse is proportional to the rate of change of current () in the source line and the mutual inductance between the conductors. Faster signal edges and closer proximity yield stronger, more easily detectable leakage signals.</a:t>
             </a:r>
-            <a:endParaRPr lang="en-US" sz="1750" dirty="0"/>
+            <a:endParaRPr lang="en-US" sz="1750"/>
           </a:p>
         </p:txBody>
       </p:sp>
       <p:pic>
         <p:nvPicPr>
-          <p:cNvPr id="13" name="Picture 12"/>
+          <p:cNvPr id="1487284218" name="Picture 12"/>
           <p:cNvPicPr>
             <a:picLocks noChangeAspect="1"/>
           </p:cNvPicPr>
           <p:nvPr/>
         </p:nvPicPr>
-        <p:blipFill>
+        <p:blipFill rotWithShape="1">
           <a:blip r:embed="rId5"/>
-          <a:stretch>
-            <a:fillRect/>
-          </a:stretch>
+          <a:stretch/>
         </p:blipFill>
-        <p:spPr>
+        <p:spPr bwMode="auto">
           <a:xfrm>
             <a:off x="12268200" y="7429500"/>
-            <a:ext cx="2362200" cy="800100"/>
+            <a:ext cx="2362199" cy="800100"/>
           </a:xfrm>
           <a:prstGeom prst="rect">
             <a:avLst/>
@@ -6585,15 +6933,22 @@
         </p:spPr>
       </p:pic>
     </p:spTree>
-    <p:extLst>
-      <p:ext uri="{BB962C8B-B14F-4D97-AF65-F5344CB8AC3E}">
-        <p14:creationId xmlns:p14="http://schemas.microsoft.com/office/powerpoint/2010/main" val="2280953922"/>
-      </p:ext>
-    </p:extLst>
   </p:cSld>
   <p:clrMapOvr>
     <a:masterClrMapping/>
   </p:clrMapOvr>
+  <mc:AlternateContent xmlns:mc="http://schemas.openxmlformats.org/markup-compatibility/2006">
+    <mc:Choice xmlns:p159="http://schemas.microsoft.com/office/powerpoint/2015/09/main" xmlns:p14="http://schemas.microsoft.com/office/powerpoint/2010/main" Requires="p159">
+      <p:transition spd="fast" p14:dur="500" advClick="1">
+        <p:fade thruBlk="0"/>
+      </p:transition>
+    </mc:Choice>
+    <mc:Fallback>
+      <p:transition spd="fast" advClick="1">
+        <p:fade thruBlk="0"/>
+      </p:transition>
+    </mc:Fallback>
+  </mc:AlternateContent>
   <p:timing>
     <p:tnLst>
       <p:par>
@@ -6605,7 +6960,7 @@
 </file>
 
 <file path=ppt/theme/theme1.xml><?xml version="1.0" encoding="utf-8"?>
-<a:theme xmlns:a="http://schemas.openxmlformats.org/drawingml/2006/main" name="Office Theme">
+<a:theme xmlns:a="http://schemas.openxmlformats.org/drawingml/2006/main" xmlns:r="http://schemas.openxmlformats.org/officeDocument/2006/relationships" xmlns:p="http://schemas.openxmlformats.org/presentationml/2006/main" name="Office Theme">
   <a:themeElements>
     <a:clrScheme name="Office">
       <a:dk1>
@@ -6647,108 +7002,14 @@
     </a:clrScheme>
     <a:fontScheme name="Office">
       <a:majorFont>
-        <a:latin typeface="Calibri Light" panose="020F0302020204030204"/>
-        <a:ea typeface=""/>
-        <a:cs typeface=""/>
-        <a:font script="Jpan" typeface="游ゴシック Light"/>
-        <a:font script="Hang" typeface="맑은 고딕"/>
-        <a:font script="Hans" typeface="等线 Light"/>
-        <a:font script="Hant" typeface="新細明體"/>
-        <a:font script="Arab" typeface="Times New Roman"/>
-        <a:font script="Hebr" typeface="Times New Roman"/>
-        <a:font script="Thai" typeface="Angsana New"/>
-        <a:font script="Ethi" typeface="Nyala"/>
-        <a:font script="Beng" typeface="Vrinda"/>
-        <a:font script="Gujr" typeface="Shruti"/>
-        <a:font script="Khmr" typeface="MoolBoran"/>
-        <a:font script="Knda" typeface="Tunga"/>
-        <a:font script="Guru" typeface="Raavi"/>
-        <a:font script="Cans" typeface="Euphemia"/>
-        <a:font script="Cher" typeface="Plantagenet Cherokee"/>
-        <a:font script="Yiii" typeface="Microsoft Yi Baiti"/>
-        <a:font script="Tibt" typeface="Microsoft Himalaya"/>
-        <a:font script="Thaa" typeface="MV Boli"/>
-        <a:font script="Deva" typeface="Mangal"/>
-        <a:font script="Telu" typeface="Gautami"/>
-        <a:font script="Taml" typeface="Latha"/>
-        <a:font script="Syrc" typeface="Estrangelo Edessa"/>
-        <a:font script="Orya" typeface="Kalinga"/>
-        <a:font script="Mlym" typeface="Kartika"/>
-        <a:font script="Laoo" typeface="DokChampa"/>
-        <a:font script="Sinh" typeface="Iskoola Pota"/>
-        <a:font script="Mong" typeface="Mongolian Baiti"/>
-        <a:font script="Viet" typeface="Times New Roman"/>
-        <a:font script="Uigh" typeface="Microsoft Uighur"/>
-        <a:font script="Geor" typeface="Sylfaen"/>
-        <a:font script="Armn" typeface="Arial"/>
-        <a:font script="Bugi" typeface="Leelawadee UI"/>
-        <a:font script="Bopo" typeface="Microsoft JhengHei"/>
-        <a:font script="Java" typeface="Javanese Text"/>
-        <a:font script="Lisu" typeface="Segoe UI"/>
-        <a:font script="Mymr" typeface="Myanmar Text"/>
-        <a:font script="Nkoo" typeface="Ebrima"/>
-        <a:font script="Olck" typeface="Nirmala UI"/>
-        <a:font script="Osma" typeface="Ebrima"/>
-        <a:font script="Phag" typeface="Phagspa"/>
-        <a:font script="Syrn" typeface="Estrangelo Edessa"/>
-        <a:font script="Syrj" typeface="Estrangelo Edessa"/>
-        <a:font script="Syre" typeface="Estrangelo Edessa"/>
-        <a:font script="Sora" typeface="Nirmala UI"/>
-        <a:font script="Tale" typeface="Microsoft Tai Le"/>
-        <a:font script="Talu" typeface="Microsoft New Tai Lue"/>
-        <a:font script="Tfng" typeface="Ebrima"/>
+        <a:latin typeface="Calibri Light"/>
+        <a:ea typeface="Arial"/>
+        <a:cs typeface="Arial"/>
       </a:majorFont>
       <a:minorFont>
-        <a:latin typeface="Calibri" panose="020F0502020204030204"/>
-        <a:ea typeface=""/>
-        <a:cs typeface=""/>
-        <a:font script="Jpan" typeface="游ゴシック"/>
-        <a:font script="Hang" typeface="맑은 고딕"/>
-        <a:font script="Hans" typeface="等线"/>
-        <a:font script="Hant" typeface="新細明體"/>
-        <a:font script="Arab" typeface="Arial"/>
-        <a:font script="Hebr" typeface="Arial"/>
-        <a:font script="Thai" typeface="Cordia New"/>
-        <a:font script="Ethi" typeface="Nyala"/>
-        <a:font script="Beng" typeface="Vrinda"/>
-        <a:font script="Gujr" typeface="Shruti"/>
-        <a:font script="Khmr" typeface="DaunPenh"/>
-        <a:font script="Knda" typeface="Tunga"/>
-        <a:font script="Guru" typeface="Raavi"/>
-        <a:font script="Cans" typeface="Euphemia"/>
-        <a:font script="Cher" typeface="Plantagenet Cherokee"/>
-        <a:font script="Yiii" typeface="Microsoft Yi Baiti"/>
-        <a:font script="Tibt" typeface="Microsoft Himalaya"/>
-        <a:font script="Thaa" typeface="MV Boli"/>
-        <a:font script="Deva" typeface="Mangal"/>
-        <a:font script="Telu" typeface="Gautami"/>
-        <a:font script="Taml" typeface="Latha"/>
-        <a:font script="Syrc" typeface="Estrangelo Edessa"/>
-        <a:font script="Orya" typeface="Kalinga"/>
-        <a:font script="Mlym" typeface="Kartika"/>
-        <a:font script="Laoo" typeface="DokChampa"/>
-        <a:font script="Sinh" typeface="Iskoola Pota"/>
-        <a:font script="Mong" typeface="Mongolian Baiti"/>
-        <a:font script="Viet" typeface="Arial"/>
-        <a:font script="Uigh" typeface="Microsoft Uighur"/>
-        <a:font script="Geor" typeface="Sylfaen"/>
-        <a:font script="Armn" typeface="Arial"/>
-        <a:font script="Bugi" typeface="Leelawadee UI"/>
-        <a:font script="Bopo" typeface="Microsoft JhengHei"/>
-        <a:font script="Java" typeface="Javanese Text"/>
-        <a:font script="Lisu" typeface="Segoe UI"/>
-        <a:font script="Mymr" typeface="Myanmar Text"/>
-        <a:font script="Nkoo" typeface="Ebrima"/>
-        <a:font script="Olck" typeface="Nirmala UI"/>
-        <a:font script="Osma" typeface="Ebrima"/>
-        <a:font script="Phag" typeface="Phagspa"/>
-        <a:font script="Syrn" typeface="Estrangelo Edessa"/>
-        <a:font script="Syrj" typeface="Estrangelo Edessa"/>
-        <a:font script="Syre" typeface="Estrangelo Edessa"/>
-        <a:font script="Sora" typeface="Nirmala UI"/>
-        <a:font script="Tale" typeface="Microsoft Tai Le"/>
-        <a:font script="Talu" typeface="Microsoft New Tai Lue"/>
-        <a:font script="Tfng" typeface="Ebrima"/>
+        <a:latin typeface="Calibri"/>
+        <a:ea typeface="Arial"/>
+        <a:cs typeface="Arial"/>
       </a:minorFont>
     </a:fontScheme>
     <a:fmtScheme name="Office">
@@ -6756,7 +7017,7 @@
         <a:solidFill>
           <a:schemeClr val="phClr"/>
         </a:solidFill>
-        <a:gradFill rotWithShape="1">
+        <a:gradFill>
           <a:gsLst>
             <a:gs pos="0">
               <a:schemeClr val="phClr">
@@ -6782,7 +7043,7 @@
           </a:gsLst>
           <a:lin ang="5400000" scaled="0"/>
         </a:gradFill>
-        <a:gradFill rotWithShape="1">
+        <a:gradFill>
           <a:gsLst>
             <a:gs pos="0">
               <a:schemeClr val="phClr">
@@ -6859,7 +7120,7 @@
             <a:satMod val="170000"/>
           </a:schemeClr>
         </a:solidFill>
-        <a:gradFill rotWithShape="1">
+        <a:gradFill>
           <a:gsLst>
             <a:gs pos="0">
               <a:schemeClr val="phClr">
@@ -6890,17 +7151,11 @@
     </a:fmtScheme>
   </a:themeElements>
   <a:objectDefaults/>
-  <a:extraClrSchemeLst/>
-  <a:extLst>
-    <a:ext uri="{05A4C25C-085E-4340-85A3-A5531E510DB2}">
-      <thm15:themeFamily xmlns:thm15="http://schemas.microsoft.com/office/thememl/2012/main" name="Office Theme" id="{62F939B6-93AF-4DB8-9C6B-D6C7DFDC589F}" vid="{4A3C46E8-61CC-4603-A589-7422A47A8E4A}"/>
-    </a:ext>
-  </a:extLst>
 </a:theme>
 </file>
 
 <file path=ppt/theme/theme2.xml><?xml version="1.0" encoding="utf-8"?>
-<a:theme xmlns:a="http://schemas.openxmlformats.org/drawingml/2006/main" name="Office Theme">
+<a:theme xmlns:a="http://schemas.openxmlformats.org/drawingml/2006/main" xmlns:r="http://schemas.openxmlformats.org/officeDocument/2006/relationships" xmlns:p="http://schemas.openxmlformats.org/presentationml/2006/main" name="Office Theme">
   <a:themeElements>
     <a:clrScheme name="Office">
       <a:dk1>
@@ -6942,74 +7197,14 @@
     </a:clrScheme>
     <a:fontScheme name="Office">
       <a:majorFont>
-        <a:latin typeface="Calibri Light" panose="020F0302020204030204"/>
-        <a:ea typeface=""/>
-        <a:cs typeface=""/>
-        <a:font script="Jpan" typeface="游ゴシック Light"/>
-        <a:font script="Hang" typeface="맑은 고딕"/>
-        <a:font script="Hans" typeface="等线 Light"/>
-        <a:font script="Hant" typeface="新細明體"/>
-        <a:font script="Arab" typeface="Times New Roman"/>
-        <a:font script="Hebr" typeface="Times New Roman"/>
-        <a:font script="Thai" typeface="Angsana New"/>
-        <a:font script="Ethi" typeface="Nyala"/>
-        <a:font script="Beng" typeface="Vrinda"/>
-        <a:font script="Gujr" typeface="Shruti"/>
-        <a:font script="Khmr" typeface="MoolBoran"/>
-        <a:font script="Knda" typeface="Tunga"/>
-        <a:font script="Guru" typeface="Raavi"/>
-        <a:font script="Cans" typeface="Euphemia"/>
-        <a:font script="Cher" typeface="Plantagenet Cherokee"/>
-        <a:font script="Yiii" typeface="Microsoft Yi Baiti"/>
-        <a:font script="Tibt" typeface="Microsoft Himalaya"/>
-        <a:font script="Thaa" typeface="MV Boli"/>
-        <a:font script="Deva" typeface="Mangal"/>
-        <a:font script="Telu" typeface="Gautami"/>
-        <a:font script="Taml" typeface="Latha"/>
-        <a:font script="Syrc" typeface="Estrangelo Edessa"/>
-        <a:font script="Orya" typeface="Kalinga"/>
-        <a:font script="Mlym" typeface="Kartika"/>
-        <a:font script="Laoo" typeface="DokChampa"/>
-        <a:font script="Sinh" typeface="Iskoola Pota"/>
-        <a:font script="Mong" typeface="Mongolian Baiti"/>
-        <a:font script="Viet" typeface="Times New Roman"/>
-        <a:font script="Uigh" typeface="Microsoft Uighur"/>
-        <a:font script="Geor" typeface="Sylfaen"/>
+        <a:latin typeface="Calibri Light"/>
+        <a:ea typeface="Arial"/>
+        <a:cs typeface="Arial"/>
       </a:majorFont>
       <a:minorFont>
-        <a:latin typeface="Calibri" panose="020F0502020204030204"/>
-        <a:ea typeface=""/>
-        <a:cs typeface=""/>
-        <a:font script="Jpan" typeface="游ゴシック"/>
-        <a:font script="Hang" typeface="맑은 고딕"/>
-        <a:font script="Hans" typeface="等线"/>
-        <a:font script="Hant" typeface="新細明體"/>
-        <a:font script="Arab" typeface="Arial"/>
-        <a:font script="Hebr" typeface="Arial"/>
-        <a:font script="Thai" typeface="Cordia New"/>
-        <a:font script="Ethi" typeface="Nyala"/>
-        <a:font script="Beng" typeface="Vrinda"/>
-        <a:font script="Gujr" typeface="Shruti"/>
-        <a:font script="Khmr" typeface="DaunPenh"/>
-        <a:font script="Knda" typeface="Tunga"/>
-        <a:font script="Guru" typeface="Raavi"/>
-        <a:font script="Cans" typeface="Euphemia"/>
-        <a:font script="Cher" typeface="Plantagenet Cherokee"/>
-        <a:font script="Yiii" typeface="Microsoft Yi Baiti"/>
-        <a:font script="Tibt" typeface="Microsoft Himalaya"/>
-        <a:font script="Thaa" typeface="MV Boli"/>
-        <a:font script="Deva" typeface="Mangal"/>
-        <a:font script="Telu" typeface="Gautami"/>
-        <a:font script="Taml" typeface="Latha"/>
-        <a:font script="Syrc" typeface="Estrangelo Edessa"/>
-        <a:font script="Orya" typeface="Kalinga"/>
-        <a:font script="Mlym" typeface="Kartika"/>
-        <a:font script="Laoo" typeface="DokChampa"/>
-        <a:font script="Sinh" typeface="Iskoola Pota"/>
-        <a:font script="Mong" typeface="Mongolian Baiti"/>
-        <a:font script="Viet" typeface="Arial"/>
-        <a:font script="Uigh" typeface="Microsoft Uighur"/>
-        <a:font script="Geor" typeface="Sylfaen"/>
+        <a:latin typeface="Calibri"/>
+        <a:ea typeface="Arial"/>
+        <a:cs typeface="Arial"/>
       </a:minorFont>
     </a:fontScheme>
     <a:fmtScheme name="Office">
@@ -7017,7 +7212,7 @@
         <a:solidFill>
           <a:schemeClr val="phClr"/>
         </a:solidFill>
-        <a:gradFill rotWithShape="1">
+        <a:gradFill>
           <a:gsLst>
             <a:gs pos="0">
               <a:schemeClr val="phClr">
@@ -7043,7 +7238,7 @@
           </a:gsLst>
           <a:lin ang="5400000" scaled="0"/>
         </a:gradFill>
-        <a:gradFill rotWithShape="1">
+        <a:gradFill>
           <a:gsLst>
             <a:gs pos="0">
               <a:schemeClr val="phClr">
@@ -7120,7 +7315,7 @@
             <a:satMod val="170000"/>
           </a:schemeClr>
         </a:solidFill>
-        <a:gradFill rotWithShape="1">
+        <a:gradFill>
           <a:gsLst>
             <a:gs pos="0">
               <a:schemeClr val="phClr">
@@ -7151,11 +7346,5 @@
     </a:fmtScheme>
   </a:themeElements>
   <a:objectDefaults/>
-  <a:extraClrSchemeLst/>
-  <a:extLst>
-    <a:ext uri="{05A4C25C-085E-4340-85A3-A5531E510DB2}">
-      <thm15:themeFamily xmlns:thm15="http://schemas.microsoft.com/office/thememl/2012/main" name="Office Theme" id="{62F939B6-93AF-4DB8-9C6B-D6C7DFDC589F}" vid="{4A3C46E8-61CC-4603-A589-7422A47A8E4A}"/>
-    </a:ext>
-  </a:extLst>
 </a:theme>
 </file>